--- a/docs/Carnet-Presentation.pptx
+++ b/docs/Carnet-Presentation.pptx
@@ -7437,7 +7437,7 @@
                 </a:solidFill>
                 <a:latin typeface="Georgia"/>
               </a:rPr>
-              <a:t>49</a:t>
+              <a:t>55</a:t>
             </a:r>
           </a:p>
         </p:txBody>
@@ -7847,7 +7847,7 @@
                 </a:solidFill>
                 <a:latin typeface="Georgia"/>
               </a:rPr>
-              <a:t>708</a:t>
+              <a:t>730</a:t>
             </a:r>
           </a:p>
         </p:txBody>
@@ -8052,7 +8052,7 @@
                 </a:solidFill>
                 <a:latin typeface="Georgia"/>
               </a:rPr>
-              <a:t>11</a:t>
+              <a:t>13</a:t>
             </a:r>
           </a:p>
         </p:txBody>
@@ -8887,7 +8887,7 @@
         <p:spPr>
           <a:xfrm>
             <a:off x="822960" y="2468880"/>
-            <a:ext cx="5336416" cy="548640"/>
+            <a:ext cx="6098761" cy="548640"/>
           </a:xfrm>
           <a:prstGeom prst="rect">
             <a:avLst/>
@@ -8931,7 +8931,7 @@
         <p:spPr>
           <a:xfrm>
             <a:off x="1005840" y="2615184"/>
-            <a:ext cx="5062096" cy="320040"/>
+            <a:ext cx="5824441" cy="320040"/>
           </a:xfrm>
           <a:prstGeom prst="rect">
             <a:avLst/>
@@ -8956,7 +8956,7 @@
                 </a:solidFill>
                 <a:latin typeface="Segoe UI"/>
               </a:rPr>
-              <a:t>Built 42</a:t>
+              <a:t>Built 48</a:t>
             </a:r>
           </a:p>
         </p:txBody>
@@ -8969,8 +8969,8 @@
         </p:nvSpPr>
         <p:spPr>
           <a:xfrm>
-            <a:off x="6159376" y="2468880"/>
-            <a:ext cx="1270575" cy="548640"/>
+            <a:off x="6921721" y="2468880"/>
+            <a:ext cx="1016460" cy="548640"/>
           </a:xfrm>
           <a:prstGeom prst="rect">
             <a:avLst/>
@@ -9013,8 +9013,8 @@
         </p:nvSpPr>
         <p:spPr>
           <a:xfrm>
-            <a:off x="6342256" y="2615184"/>
-            <a:ext cx="996255" cy="320040"/>
+            <a:off x="7104601" y="2615184"/>
+            <a:ext cx="742140" cy="320040"/>
           </a:xfrm>
           <a:prstGeom prst="rect">
             <a:avLst/>
@@ -9039,7 +9039,7 @@
                 </a:solidFill>
                 <a:latin typeface="Segoe UI"/>
               </a:rPr>
-              <a:t>Partial 10</a:t>
+              <a:t>Partial 8</a:t>
             </a:r>
           </a:p>
         </p:txBody>
@@ -9052,8 +9052,8 @@
         </p:nvSpPr>
         <p:spPr>
           <a:xfrm>
-            <a:off x="7429951" y="2468880"/>
-            <a:ext cx="3938783" cy="548640"/>
+            <a:off x="7938181" y="2468880"/>
+            <a:ext cx="3430553" cy="548640"/>
           </a:xfrm>
           <a:prstGeom prst="rect">
             <a:avLst/>
@@ -9096,8 +9096,8 @@
         </p:nvSpPr>
         <p:spPr>
           <a:xfrm>
-            <a:off x="7612831" y="2615184"/>
-            <a:ext cx="3664463" cy="320040"/>
+            <a:off x="8121061" y="2615184"/>
+            <a:ext cx="3156233" cy="320040"/>
           </a:xfrm>
           <a:prstGeom prst="rect">
             <a:avLst/>
@@ -9122,7 +9122,7 @@
                 </a:solidFill>
                 <a:latin typeface="Segoe UI"/>
               </a:rPr>
-              <a:t>Missing 31</a:t>
+              <a:t>Missing 27</a:t>
             </a:r>
           </a:p>
         </p:txBody>

--- a/docs/Carnet-Presentation.pptx
+++ b/docs/Carnet-Presentation.pptx
@@ -8887,7 +8887,7 @@
         <p:spPr>
           <a:xfrm>
             <a:off x="822960" y="2468880"/>
-            <a:ext cx="6098761" cy="548640"/>
+            <a:ext cx="6225818" cy="548640"/>
           </a:xfrm>
           <a:prstGeom prst="rect">
             <a:avLst/>
@@ -8931,7 +8931,7 @@
         <p:spPr>
           <a:xfrm>
             <a:off x="1005840" y="2615184"/>
-            <a:ext cx="5824441" cy="320040"/>
+            <a:ext cx="5951498" cy="320040"/>
           </a:xfrm>
           <a:prstGeom prst="rect">
             <a:avLst/>
@@ -8956,7 +8956,7 @@
                 </a:solidFill>
                 <a:latin typeface="Segoe UI"/>
               </a:rPr>
-              <a:t>Built 48</a:t>
+              <a:t>Built 49</a:t>
             </a:r>
           </a:p>
         </p:txBody>
@@ -8969,7 +8969,7 @@
         </p:nvSpPr>
         <p:spPr>
           <a:xfrm>
-            <a:off x="6921721" y="2468880"/>
+            <a:off x="7048778" y="2468880"/>
             <a:ext cx="1016460" cy="548640"/>
           </a:xfrm>
           <a:prstGeom prst="rect">
@@ -9013,7 +9013,7 @@
         </p:nvSpPr>
         <p:spPr>
           <a:xfrm>
-            <a:off x="7104601" y="2615184"/>
+            <a:off x="7231658" y="2615184"/>
             <a:ext cx="742140" cy="320040"/>
           </a:xfrm>
           <a:prstGeom prst="rect">
@@ -9052,8 +9052,8 @@
         </p:nvSpPr>
         <p:spPr>
           <a:xfrm>
-            <a:off x="7938181" y="2468880"/>
-            <a:ext cx="3430553" cy="548640"/>
+            <a:off x="8065238" y="2468880"/>
+            <a:ext cx="3303495" cy="548640"/>
           </a:xfrm>
           <a:prstGeom prst="rect">
             <a:avLst/>
@@ -9096,8 +9096,8 @@
         </p:nvSpPr>
         <p:spPr>
           <a:xfrm>
-            <a:off x="8121061" y="2615184"/>
-            <a:ext cx="3156233" cy="320040"/>
+            <a:off x="8248118" y="2615184"/>
+            <a:ext cx="3029175" cy="320040"/>
           </a:xfrm>
           <a:prstGeom prst="rect">
             <a:avLst/>
@@ -9122,7 +9122,7 @@
                 </a:solidFill>
                 <a:latin typeface="Segoe UI"/>
               </a:rPr>
-              <a:t>Missing 27</a:t>
+              <a:t>Missing 26</a:t>
             </a:r>
           </a:p>
         </p:txBody>

--- a/docs/Carnet-Presentation.pptx
+++ b/docs/Carnet-Presentation.pptx
@@ -7437,7 +7437,7 @@
                 </a:solidFill>
                 <a:latin typeface="Georgia"/>
               </a:rPr>
-              <a:t>55</a:t>
+              <a:t>56</a:t>
             </a:r>
           </a:p>
         </p:txBody>
@@ -7847,7 +7847,7 @@
                 </a:solidFill>
                 <a:latin typeface="Georgia"/>
               </a:rPr>
-              <a:t>730</a:t>
+              <a:t>750</a:t>
             </a:r>
           </a:p>
         </p:txBody>
@@ -8052,7 +8052,7 @@
                 </a:solidFill>
                 <a:latin typeface="Georgia"/>
               </a:rPr>
-              <a:t>13</a:t>
+              <a:t>14</a:t>
             </a:r>
           </a:p>
         </p:txBody>
@@ -8257,7 +8257,7 @@
                 </a:solidFill>
                 <a:latin typeface="Georgia"/>
               </a:rPr>
-              <a:t>247</a:t>
+              <a:t>269</a:t>
             </a:r>
           </a:p>
         </p:txBody>
@@ -8887,7 +8887,7 @@
         <p:spPr>
           <a:xfrm>
             <a:off x="822960" y="2468880"/>
-            <a:ext cx="6225818" cy="548640"/>
+            <a:ext cx="7623451" cy="548640"/>
           </a:xfrm>
           <a:prstGeom prst="rect">
             <a:avLst/>
@@ -8931,7 +8931,7 @@
         <p:spPr>
           <a:xfrm>
             <a:off x="1005840" y="2615184"/>
-            <a:ext cx="5951498" cy="320040"/>
+            <a:ext cx="7349131" cy="320040"/>
           </a:xfrm>
           <a:prstGeom prst="rect">
             <a:avLst/>
@@ -8956,7 +8956,7 @@
                 </a:solidFill>
                 <a:latin typeface="Segoe UI"/>
               </a:rPr>
-              <a:t>Built 49</a:t>
+              <a:t>Built 60</a:t>
             </a:r>
           </a:p>
         </p:txBody>
@@ -8969,8 +8969,8 @@
         </p:nvSpPr>
         <p:spPr>
           <a:xfrm>
-            <a:off x="7048778" y="2468880"/>
-            <a:ext cx="1016460" cy="548640"/>
+            <a:off x="8446411" y="2468880"/>
+            <a:ext cx="635287" cy="548640"/>
           </a:xfrm>
           <a:prstGeom prst="rect">
             <a:avLst/>
@@ -9007,53 +9007,14 @@
       </p:sp>
       <p:sp>
         <p:nvSpPr>
-          <p:cNvPr id="9" name="TextBox 8"/>
-          <p:cNvSpPr txBox="1"/>
-          <p:nvPr/>
-        </p:nvSpPr>
-        <p:spPr>
-          <a:xfrm>
-            <a:off x="7231658" y="2615184"/>
-            <a:ext cx="742140" cy="320040"/>
-          </a:xfrm>
-          <a:prstGeom prst="rect">
-            <a:avLst/>
-          </a:prstGeom>
-          <a:noFill/>
-        </p:spPr>
-        <p:txBody>
-          <a:bodyPr wrap="square" anchor="t" lIns="0" rIns="0" tIns="0" bIns="0">
-            <a:spAutoFit/>
-          </a:bodyPr>
-          <a:lstStyle/>
-          <a:p>
-            <a:pPr algn="l">
-              <a:lnSpc>
-                <a:spcPct val="115000"/>
-              </a:lnSpc>
-            </a:pPr>
-            <a:r>
-              <a:rPr sz="1300" b="1">
-                <a:solidFill>
-                  <a:srgbClr val="FFFFFF"/>
-                </a:solidFill>
-                <a:latin typeface="Segoe UI"/>
-              </a:rPr>
-              <a:t>Partial 8</a:t>
-            </a:r>
-          </a:p>
-        </p:txBody>
-      </p:sp>
-      <p:sp>
-        <p:nvSpPr>
-          <p:cNvPr id="10" name="Rectangle 9"/>
+          <p:cNvPr id="9" name="Rectangle 8"/>
           <p:cNvSpPr/>
           <p:nvPr/>
         </p:nvSpPr>
         <p:spPr>
           <a:xfrm>
-            <a:off x="8065238" y="2468880"/>
-            <a:ext cx="3303495" cy="548640"/>
+            <a:off x="9081698" y="2468880"/>
+            <a:ext cx="2287035" cy="548640"/>
           </a:xfrm>
           <a:prstGeom prst="rect">
             <a:avLst/>
@@ -9090,46 +9051,46 @@
       </p:sp>
       <p:sp>
         <p:nvSpPr>
+          <p:cNvPr id="10" name="TextBox 9"/>
+          <p:cNvSpPr txBox="1"/>
+          <p:nvPr/>
+        </p:nvSpPr>
+        <p:spPr>
+          <a:xfrm>
+            <a:off x="9264578" y="2615184"/>
+            <a:ext cx="2012715" cy="320040"/>
+          </a:xfrm>
+          <a:prstGeom prst="rect">
+            <a:avLst/>
+          </a:prstGeom>
+          <a:noFill/>
+        </p:spPr>
+        <p:txBody>
+          <a:bodyPr wrap="square" anchor="t" lIns="0" rIns="0" tIns="0" bIns="0">
+            <a:spAutoFit/>
+          </a:bodyPr>
+          <a:lstStyle/>
+          <a:p>
+            <a:pPr algn="l">
+              <a:lnSpc>
+                <a:spcPct val="115000"/>
+              </a:lnSpc>
+            </a:pPr>
+            <a:r>
+              <a:rPr sz="1300" b="1">
+                <a:solidFill>
+                  <a:srgbClr val="535E60"/>
+                </a:solidFill>
+                <a:latin typeface="Segoe UI"/>
+              </a:rPr>
+              <a:t>Missing 18</a:t>
+            </a:r>
+          </a:p>
+        </p:txBody>
+      </p:sp>
+      <p:sp>
+        <p:nvSpPr>
           <p:cNvPr id="11" name="TextBox 10"/>
-          <p:cNvSpPr txBox="1"/>
-          <p:nvPr/>
-        </p:nvSpPr>
-        <p:spPr>
-          <a:xfrm>
-            <a:off x="8248118" y="2615184"/>
-            <a:ext cx="3029175" cy="320040"/>
-          </a:xfrm>
-          <a:prstGeom prst="rect">
-            <a:avLst/>
-          </a:prstGeom>
-          <a:noFill/>
-        </p:spPr>
-        <p:txBody>
-          <a:bodyPr wrap="square" anchor="t" lIns="0" rIns="0" tIns="0" bIns="0">
-            <a:spAutoFit/>
-          </a:bodyPr>
-          <a:lstStyle/>
-          <a:p>
-            <a:pPr algn="l">
-              <a:lnSpc>
-                <a:spcPct val="115000"/>
-              </a:lnSpc>
-            </a:pPr>
-            <a:r>
-              <a:rPr sz="1300" b="1">
-                <a:solidFill>
-                  <a:srgbClr val="535E60"/>
-                </a:solidFill>
-                <a:latin typeface="Segoe UI"/>
-              </a:rPr>
-              <a:t>Missing 26</a:t>
-            </a:r>
-          </a:p>
-        </p:txBody>
-      </p:sp>
-      <p:sp>
-        <p:nvSpPr>
-          <p:cNvPr id="12" name="TextBox 11"/>
           <p:cNvSpPr txBox="1"/>
           <p:nvPr/>
         </p:nvSpPr>
@@ -9168,7 +9129,7 @@
       </p:sp>
       <p:sp>
         <p:nvSpPr>
-          <p:cNvPr id="13" name="Rectangle 12"/>
+          <p:cNvPr id="12" name="Rectangle 11"/>
           <p:cNvSpPr/>
           <p:nvPr/>
         </p:nvSpPr>
@@ -9212,7 +9173,7 @@
       </p:sp>
       <p:sp>
         <p:nvSpPr>
-          <p:cNvPr id="14" name="TextBox 13"/>
+          <p:cNvPr id="13" name="TextBox 12"/>
           <p:cNvSpPr txBox="1"/>
           <p:nvPr/>
         </p:nvSpPr>
@@ -9260,7 +9221,7 @@
       </p:sp>
       <p:sp>
         <p:nvSpPr>
-          <p:cNvPr id="15" name="Rectangle 14"/>
+          <p:cNvPr id="14" name="Rectangle 13"/>
           <p:cNvSpPr/>
           <p:nvPr/>
         </p:nvSpPr>
@@ -9304,7 +9265,7 @@
       </p:sp>
       <p:sp>
         <p:nvSpPr>
-          <p:cNvPr id="16" name="TextBox 15"/>
+          <p:cNvPr id="15" name="TextBox 14"/>
           <p:cNvSpPr txBox="1"/>
           <p:nvPr/>
         </p:nvSpPr>
@@ -9352,7 +9313,7 @@
       </p:sp>
       <p:sp>
         <p:nvSpPr>
-          <p:cNvPr id="17" name="Rectangle 16"/>
+          <p:cNvPr id="16" name="Rectangle 15"/>
           <p:cNvSpPr/>
           <p:nvPr/>
         </p:nvSpPr>
@@ -9396,7 +9357,7 @@
       </p:sp>
       <p:sp>
         <p:nvSpPr>
-          <p:cNvPr id="18" name="TextBox 17"/>
+          <p:cNvPr id="17" name="TextBox 16"/>
           <p:cNvSpPr txBox="1"/>
           <p:nvPr/>
         </p:nvSpPr>
@@ -9444,7 +9405,7 @@
       </p:sp>
       <p:sp>
         <p:nvSpPr>
-          <p:cNvPr id="19" name="TextBox 18"/>
+          <p:cNvPr id="18" name="TextBox 17"/>
           <p:cNvSpPr txBox="1"/>
           <p:nvPr/>
         </p:nvSpPr>
@@ -9483,7 +9444,7 @@
       </p:sp>
       <p:sp>
         <p:nvSpPr>
-          <p:cNvPr id="20" name="TextBox 19"/>
+          <p:cNvPr id="19" name="TextBox 18"/>
           <p:cNvSpPr txBox="1"/>
           <p:nvPr/>
         </p:nvSpPr>

--- a/docs/Carnet-Presentation.pptx
+++ b/docs/Carnet-Presentation.pptx
@@ -7437,7 +7437,7 @@
                 </a:solidFill>
                 <a:latin typeface="Georgia"/>
               </a:rPr>
-              <a:t>56</a:t>
+              <a:t>59</a:t>
             </a:r>
           </a:p>
         </p:txBody>
@@ -7642,7 +7642,7 @@
                 </a:solidFill>
                 <a:latin typeface="Georgia"/>
               </a:rPr>
-              <a:t>99</a:t>
+              <a:t>101</a:t>
             </a:r>
           </a:p>
         </p:txBody>
@@ -7847,7 +7847,7 @@
                 </a:solidFill>
                 <a:latin typeface="Georgia"/>
               </a:rPr>
-              <a:t>750</a:t>
+              <a:t>767</a:t>
             </a:r>
           </a:p>
         </p:txBody>
@@ -8052,7 +8052,7 @@
                 </a:solidFill>
                 <a:latin typeface="Georgia"/>
               </a:rPr>
-              <a:t>14</a:t>
+              <a:t>15</a:t>
             </a:r>
           </a:p>
         </p:txBody>
@@ -8257,7 +8257,7 @@
                 </a:solidFill>
                 <a:latin typeface="Georgia"/>
               </a:rPr>
-              <a:t>269</a:t>
+              <a:t>278</a:t>
             </a:r>
           </a:p>
         </p:txBody>
@@ -8887,7 +8887,7 @@
         <p:spPr>
           <a:xfrm>
             <a:off x="822960" y="2468880"/>
-            <a:ext cx="7623451" cy="548640"/>
+            <a:ext cx="8371388" cy="548640"/>
           </a:xfrm>
           <a:prstGeom prst="rect">
             <a:avLst/>
@@ -8931,7 +8931,7 @@
         <p:spPr>
           <a:xfrm>
             <a:off x="1005840" y="2615184"/>
-            <a:ext cx="7349131" cy="320040"/>
+            <a:ext cx="8097068" cy="320040"/>
           </a:xfrm>
           <a:prstGeom prst="rect">
             <a:avLst/>
@@ -8956,7 +8956,7 @@
                 </a:solidFill>
                 <a:latin typeface="Segoe UI"/>
               </a:rPr>
-              <a:t>Built 60</a:t>
+              <a:t>Built 77</a:t>
             </a:r>
           </a:p>
         </p:txBody>
@@ -8969,8 +8969,8 @@
         </p:nvSpPr>
         <p:spPr>
           <a:xfrm>
-            <a:off x="8446411" y="2468880"/>
-            <a:ext cx="635287" cy="548640"/>
+            <a:off x="9194348" y="2468880"/>
+            <a:ext cx="434877" cy="548640"/>
           </a:xfrm>
           <a:prstGeom prst="rect">
             <a:avLst/>
@@ -9013,8 +9013,8 @@
         </p:nvSpPr>
         <p:spPr>
           <a:xfrm>
-            <a:off x="9081698" y="2468880"/>
-            <a:ext cx="2287035" cy="548640"/>
+            <a:off x="9629225" y="2468880"/>
+            <a:ext cx="1739509" cy="548640"/>
           </a:xfrm>
           <a:prstGeom prst="rect">
             <a:avLst/>
@@ -9057,8 +9057,8 @@
         </p:nvSpPr>
         <p:spPr>
           <a:xfrm>
-            <a:off x="9264578" y="2615184"/>
-            <a:ext cx="2012715" cy="320040"/>
+            <a:off x="9812105" y="2615184"/>
+            <a:ext cx="1465189" cy="320040"/>
           </a:xfrm>
           <a:prstGeom prst="rect">
             <a:avLst/>
@@ -9083,7 +9083,7 @@
                 </a:solidFill>
                 <a:latin typeface="Segoe UI"/>
               </a:rPr>
-              <a:t>Missing 18</a:t>
+              <a:t>Missing 16</a:t>
             </a:r>
           </a:p>
         </p:txBody>

--- a/docs/Carnet-Presentation.pptx
+++ b/docs/Carnet-Presentation.pptx
@@ -7437,7 +7437,7 @@
                 </a:solidFill>
                 <a:latin typeface="Georgia"/>
               </a:rPr>
-              <a:t>59</a:t>
+              <a:t>60</a:t>
             </a:r>
           </a:p>
         </p:txBody>
@@ -7847,7 +7847,7 @@
                 </a:solidFill>
                 <a:latin typeface="Georgia"/>
               </a:rPr>
-              <a:t>767</a:t>
+              <a:t>800</a:t>
             </a:r>
           </a:p>
         </p:txBody>
@@ -8052,7 +8052,7 @@
                 </a:solidFill>
                 <a:latin typeface="Georgia"/>
               </a:rPr>
-              <a:t>15</a:t>
+              <a:t>16</a:t>
             </a:r>
           </a:p>
         </p:txBody>
@@ -8257,7 +8257,7 @@
                 </a:solidFill>
                 <a:latin typeface="Georgia"/>
               </a:rPr>
-              <a:t>278</a:t>
+              <a:t>288</a:t>
             </a:r>
           </a:p>
         </p:txBody>
@@ -8887,7 +8887,7 @@
         <p:spPr>
           <a:xfrm>
             <a:off x="822960" y="2468880"/>
-            <a:ext cx="8371388" cy="548640"/>
+            <a:ext cx="8542077" cy="548640"/>
           </a:xfrm>
           <a:prstGeom prst="rect">
             <a:avLst/>
@@ -8931,7 +8931,7 @@
         <p:spPr>
           <a:xfrm>
             <a:off x="1005840" y="2615184"/>
-            <a:ext cx="8097068" cy="320040"/>
+            <a:ext cx="8267757" cy="320040"/>
           </a:xfrm>
           <a:prstGeom prst="rect">
             <a:avLst/>
@@ -8956,7 +8956,7 @@
                 </a:solidFill>
                 <a:latin typeface="Segoe UI"/>
               </a:rPr>
-              <a:t>Built 77</a:t>
+              <a:t>Built 81</a:t>
             </a:r>
           </a:p>
         </p:txBody>
@@ -8969,8 +8969,8 @@
         </p:nvSpPr>
         <p:spPr>
           <a:xfrm>
-            <a:off x="9194348" y="2468880"/>
-            <a:ext cx="434877" cy="548640"/>
+            <a:off x="9365037" y="2468880"/>
+            <a:ext cx="316373" cy="548640"/>
           </a:xfrm>
           <a:prstGeom prst="rect">
             <a:avLst/>
@@ -9013,8 +9013,8 @@
         </p:nvSpPr>
         <p:spPr>
           <a:xfrm>
-            <a:off x="9629225" y="2468880"/>
-            <a:ext cx="1739509" cy="548640"/>
+            <a:off x="9681410" y="2468880"/>
+            <a:ext cx="1687324" cy="548640"/>
           </a:xfrm>
           <a:prstGeom prst="rect">
             <a:avLst/>
@@ -9057,8 +9057,8 @@
         </p:nvSpPr>
         <p:spPr>
           <a:xfrm>
-            <a:off x="9812105" y="2615184"/>
-            <a:ext cx="1465189" cy="320040"/>
+            <a:off x="9864290" y="2615184"/>
+            <a:ext cx="1413004" cy="320040"/>
           </a:xfrm>
           <a:prstGeom prst="rect">
             <a:avLst/>

--- a/docs/Carnet-Presentation.pptx
+++ b/docs/Carnet-Presentation.pptx
@@ -7437,7 +7437,7 @@
                 </a:solidFill>
                 <a:latin typeface="Georgia"/>
               </a:rPr>
-              <a:t>60</a:t>
+              <a:t>64</a:t>
             </a:r>
           </a:p>
         </p:txBody>
@@ -7847,7 +7847,7 @@
                 </a:solidFill>
                 <a:latin typeface="Georgia"/>
               </a:rPr>
-              <a:t>800</a:t>
+              <a:t>823</a:t>
             </a:r>
           </a:p>
         </p:txBody>
@@ -8052,7 +8052,7 @@
                 </a:solidFill>
                 <a:latin typeface="Georgia"/>
               </a:rPr>
-              <a:t>16</a:t>
+              <a:t>17</a:t>
             </a:r>
           </a:p>
         </p:txBody>
@@ -8257,7 +8257,7 @@
                 </a:solidFill>
                 <a:latin typeface="Georgia"/>
               </a:rPr>
-              <a:t>288</a:t>
+              <a:t>296</a:t>
             </a:r>
           </a:p>
         </p:txBody>
@@ -8887,7 +8887,7 @@
         <p:spPr>
           <a:xfrm>
             <a:off x="822960" y="2468880"/>
-            <a:ext cx="8542077" cy="548640"/>
+            <a:ext cx="8619143" cy="548640"/>
           </a:xfrm>
           <a:prstGeom prst="rect">
             <a:avLst/>
@@ -8931,7 +8931,7 @@
         <p:spPr>
           <a:xfrm>
             <a:off x="1005840" y="2615184"/>
-            <a:ext cx="8267757" cy="320040"/>
+            <a:ext cx="8344823" cy="320040"/>
           </a:xfrm>
           <a:prstGeom prst="rect">
             <a:avLst/>
@@ -8956,7 +8956,7 @@
                 </a:solidFill>
                 <a:latin typeface="Segoe UI"/>
               </a:rPr>
-              <a:t>Built 81</a:t>
+              <a:t>Built 85</a:t>
             </a:r>
           </a:p>
         </p:txBody>
@@ -8969,8 +8969,8 @@
         </p:nvSpPr>
         <p:spPr>
           <a:xfrm>
-            <a:off x="9365037" y="2468880"/>
-            <a:ext cx="316373" cy="548640"/>
+            <a:off x="9442103" y="2468880"/>
+            <a:ext cx="304205" cy="548640"/>
           </a:xfrm>
           <a:prstGeom prst="rect">
             <a:avLst/>
@@ -9013,8 +9013,8 @@
         </p:nvSpPr>
         <p:spPr>
           <a:xfrm>
-            <a:off x="9681410" y="2468880"/>
-            <a:ext cx="1687324" cy="548640"/>
+            <a:off x="9746308" y="2468880"/>
+            <a:ext cx="1622426" cy="548640"/>
           </a:xfrm>
           <a:prstGeom prst="rect">
             <a:avLst/>
@@ -9057,8 +9057,8 @@
         </p:nvSpPr>
         <p:spPr>
           <a:xfrm>
-            <a:off x="9864290" y="2615184"/>
-            <a:ext cx="1413004" cy="320040"/>
+            <a:off x="9929188" y="2615184"/>
+            <a:ext cx="1348106" cy="320040"/>
           </a:xfrm>
           <a:prstGeom prst="rect">
             <a:avLst/>

--- a/docs/Carnet-Presentation.pptx
+++ b/docs/Carnet-Presentation.pptx
@@ -7437,7 +7437,7 @@
                 </a:solidFill>
                 <a:latin typeface="Georgia"/>
               </a:rPr>
-              <a:t>64</a:t>
+              <a:t>68</a:t>
             </a:r>
           </a:p>
         </p:txBody>
@@ -7642,7 +7642,7 @@
                 </a:solidFill>
                 <a:latin typeface="Georgia"/>
               </a:rPr>
-              <a:t>101</a:t>
+              <a:t>105</a:t>
             </a:r>
           </a:p>
         </p:txBody>
@@ -7847,7 +7847,7 @@
                 </a:solidFill>
                 <a:latin typeface="Georgia"/>
               </a:rPr>
-              <a:t>823</a:t>
+              <a:t>856</a:t>
             </a:r>
           </a:p>
         </p:txBody>
@@ -8052,7 +8052,7 @@
                 </a:solidFill>
                 <a:latin typeface="Georgia"/>
               </a:rPr>
-              <a:t>17</a:t>
+              <a:t>18</a:t>
             </a:r>
           </a:p>
         </p:txBody>
@@ -8257,7 +8257,7 @@
                 </a:solidFill>
                 <a:latin typeface="Georgia"/>
               </a:rPr>
-              <a:t>296</a:t>
+              <a:t>306</a:t>
             </a:r>
           </a:p>
         </p:txBody>
@@ -8887,7 +8887,7 @@
         <p:spPr>
           <a:xfrm>
             <a:off x="822960" y="2468880"/>
-            <a:ext cx="8619143" cy="548640"/>
+            <a:ext cx="8695639" cy="548640"/>
           </a:xfrm>
           <a:prstGeom prst="rect">
             <a:avLst/>
@@ -8931,7 +8931,7 @@
         <p:spPr>
           <a:xfrm>
             <a:off x="1005840" y="2615184"/>
-            <a:ext cx="8344823" cy="320040"/>
+            <a:ext cx="8421319" cy="320040"/>
           </a:xfrm>
           <a:prstGeom prst="rect">
             <a:avLst/>
@@ -8956,7 +8956,7 @@
                 </a:solidFill>
                 <a:latin typeface="Segoe UI"/>
               </a:rPr>
-              <a:t>Built 85</a:t>
+              <a:t>Built 94</a:t>
             </a:r>
           </a:p>
         </p:txBody>
@@ -8969,8 +8969,8 @@
         </p:nvSpPr>
         <p:spPr>
           <a:xfrm>
-            <a:off x="9442103" y="2468880"/>
-            <a:ext cx="304205" cy="548640"/>
+            <a:off x="9518599" y="2468880"/>
+            <a:ext cx="277520" cy="548640"/>
           </a:xfrm>
           <a:prstGeom prst="rect">
             <a:avLst/>
@@ -9013,8 +9013,8 @@
         </p:nvSpPr>
         <p:spPr>
           <a:xfrm>
-            <a:off x="9746308" y="2468880"/>
-            <a:ext cx="1622426" cy="548640"/>
+            <a:off x="9796119" y="2468880"/>
+            <a:ext cx="1572615" cy="548640"/>
           </a:xfrm>
           <a:prstGeom prst="rect">
             <a:avLst/>
@@ -9057,8 +9057,8 @@
         </p:nvSpPr>
         <p:spPr>
           <a:xfrm>
-            <a:off x="9929188" y="2615184"/>
-            <a:ext cx="1348106" cy="320040"/>
+            <a:off x="9978999" y="2615184"/>
+            <a:ext cx="1298295" cy="320040"/>
           </a:xfrm>
           <a:prstGeom prst="rect">
             <a:avLst/>
@@ -9083,7 +9083,7 @@
                 </a:solidFill>
                 <a:latin typeface="Segoe UI"/>
               </a:rPr>
-              <a:t>Missing 16</a:t>
+              <a:t>Missing 17</a:t>
             </a:r>
           </a:p>
         </p:txBody>

--- a/docs/Carnet-Presentation.pptx
+++ b/docs/Carnet-Presentation.pptx
@@ -7437,7 +7437,7 @@
                 </a:solidFill>
                 <a:latin typeface="Georgia"/>
               </a:rPr>
-              <a:t>68</a:t>
+              <a:t>69</a:t>
             </a:r>
           </a:p>
         </p:txBody>
@@ -7642,7 +7642,7 @@
                 </a:solidFill>
                 <a:latin typeface="Georgia"/>
               </a:rPr>
-              <a:t>105</a:t>
+              <a:t>106</a:t>
             </a:r>
           </a:p>
         </p:txBody>
@@ -7847,7 +7847,7 @@
                 </a:solidFill>
                 <a:latin typeface="Georgia"/>
               </a:rPr>
-              <a:t>856</a:t>
+              <a:t>894</a:t>
             </a:r>
           </a:p>
         </p:txBody>
@@ -8052,7 +8052,7 @@
                 </a:solidFill>
                 <a:latin typeface="Georgia"/>
               </a:rPr>
-              <a:t>18</a:t>
+              <a:t>19</a:t>
             </a:r>
           </a:p>
         </p:txBody>
@@ -8257,7 +8257,7 @@
                 </a:solidFill>
                 <a:latin typeface="Georgia"/>
               </a:rPr>
-              <a:t>306</a:t>
+              <a:t>314</a:t>
             </a:r>
           </a:p>
         </p:txBody>
@@ -8887,7 +8887,7 @@
         <p:spPr>
           <a:xfrm>
             <a:off x="822960" y="2468880"/>
-            <a:ext cx="8695639" cy="548640"/>
+            <a:ext cx="8774084" cy="548640"/>
           </a:xfrm>
           <a:prstGeom prst="rect">
             <a:avLst/>
@@ -8931,7 +8931,7 @@
         <p:spPr>
           <a:xfrm>
             <a:off x="1005840" y="2615184"/>
-            <a:ext cx="8421319" cy="320040"/>
+            <a:ext cx="8499764" cy="320040"/>
           </a:xfrm>
           <a:prstGeom prst="rect">
             <a:avLst/>
@@ -8956,7 +8956,7 @@
                 </a:solidFill>
                 <a:latin typeface="Segoe UI"/>
               </a:rPr>
-              <a:t>Built 94</a:t>
+              <a:t>Built 104</a:t>
             </a:r>
           </a:p>
         </p:txBody>
@@ -8969,8 +8969,8 @@
         </p:nvSpPr>
         <p:spPr>
           <a:xfrm>
-            <a:off x="9518599" y="2468880"/>
-            <a:ext cx="277520" cy="548640"/>
+            <a:off x="9597044" y="2468880"/>
+            <a:ext cx="253098" cy="548640"/>
           </a:xfrm>
           <a:prstGeom prst="rect">
             <a:avLst/>
@@ -9013,8 +9013,8 @@
         </p:nvSpPr>
         <p:spPr>
           <a:xfrm>
-            <a:off x="9796119" y="2468880"/>
-            <a:ext cx="1572615" cy="548640"/>
+            <a:off x="9850142" y="2468880"/>
+            <a:ext cx="1518591" cy="548640"/>
           </a:xfrm>
           <a:prstGeom prst="rect">
             <a:avLst/>
@@ -9057,8 +9057,8 @@
         </p:nvSpPr>
         <p:spPr>
           <a:xfrm>
-            <a:off x="9978999" y="2615184"/>
-            <a:ext cx="1298295" cy="320040"/>
+            <a:off x="10033022" y="2615184"/>
+            <a:ext cx="1244271" cy="320040"/>
           </a:xfrm>
           <a:prstGeom prst="rect">
             <a:avLst/>
@@ -9083,7 +9083,7 @@
                 </a:solidFill>
                 <a:latin typeface="Segoe UI"/>
               </a:rPr>
-              <a:t>Missing 17</a:t>
+              <a:t>Missing 18</a:t>
             </a:r>
           </a:p>
         </p:txBody>

--- a/docs/Carnet-Presentation.pptx
+++ b/docs/Carnet-Presentation.pptx
@@ -7437,7 +7437,7 @@
                 </a:solidFill>
                 <a:latin typeface="Georgia"/>
               </a:rPr>
-              <a:t>69</a:t>
+              <a:t>70</a:t>
             </a:r>
           </a:p>
         </p:txBody>
@@ -7642,7 +7642,7 @@
                 </a:solidFill>
                 <a:latin typeface="Georgia"/>
               </a:rPr>
-              <a:t>106</a:t>
+              <a:t>107</a:t>
             </a:r>
           </a:p>
         </p:txBody>
@@ -7847,7 +7847,7 @@
                 </a:solidFill>
                 <a:latin typeface="Georgia"/>
               </a:rPr>
-              <a:t>894</a:t>
+              <a:t>920</a:t>
             </a:r>
           </a:p>
         </p:txBody>
@@ -8052,7 +8052,7 @@
                 </a:solidFill>
                 <a:latin typeface="Georgia"/>
               </a:rPr>
-              <a:t>19</a:t>
+              <a:t>20</a:t>
             </a:r>
           </a:p>
         </p:txBody>
@@ -8257,7 +8257,7 @@
                 </a:solidFill>
                 <a:latin typeface="Georgia"/>
               </a:rPr>
-              <a:t>314</a:t>
+              <a:t>323</a:t>
             </a:r>
           </a:p>
         </p:txBody>
@@ -8887,7 +8887,7 @@
         <p:spPr>
           <a:xfrm>
             <a:off x="822960" y="2468880"/>
-            <a:ext cx="8774084" cy="548640"/>
+            <a:ext cx="8842226" cy="548640"/>
           </a:xfrm>
           <a:prstGeom prst="rect">
             <a:avLst/>
@@ -8931,7 +8931,7 @@
         <p:spPr>
           <a:xfrm>
             <a:off x="1005840" y="2615184"/>
-            <a:ext cx="8499764" cy="320040"/>
+            <a:ext cx="8567906" cy="320040"/>
           </a:xfrm>
           <a:prstGeom prst="rect">
             <a:avLst/>
@@ -8956,7 +8956,7 @@
                 </a:solidFill>
                 <a:latin typeface="Segoe UI"/>
               </a:rPr>
-              <a:t>Built 104</a:t>
+              <a:t>Built 109</a:t>
             </a:r>
           </a:p>
         </p:txBody>
@@ -8969,8 +8969,8 @@
         </p:nvSpPr>
         <p:spPr>
           <a:xfrm>
-            <a:off x="9597044" y="2468880"/>
-            <a:ext cx="253098" cy="548640"/>
+            <a:off x="9665186" y="2468880"/>
+            <a:ext cx="243364" cy="548640"/>
           </a:xfrm>
           <a:prstGeom prst="rect">
             <a:avLst/>
@@ -9013,8 +9013,8 @@
         </p:nvSpPr>
         <p:spPr>
           <a:xfrm>
-            <a:off x="9850142" y="2468880"/>
-            <a:ext cx="1518591" cy="548640"/>
+            <a:off x="9908550" y="2468880"/>
+            <a:ext cx="1460184" cy="548640"/>
           </a:xfrm>
           <a:prstGeom prst="rect">
             <a:avLst/>
@@ -9057,8 +9057,8 @@
         </p:nvSpPr>
         <p:spPr>
           <a:xfrm>
-            <a:off x="10033022" y="2615184"/>
-            <a:ext cx="1244271" cy="320040"/>
+            <a:off x="10091430" y="2615184"/>
+            <a:ext cx="1185864" cy="320040"/>
           </a:xfrm>
           <a:prstGeom prst="rect">
             <a:avLst/>

--- a/docs/Carnet-Presentation.pptx
+++ b/docs/Carnet-Presentation.pptx
@@ -7437,7 +7437,7 @@
                 </a:solidFill>
                 <a:latin typeface="Georgia"/>
               </a:rPr>
-              <a:t>70</a:t>
+              <a:t>74</a:t>
             </a:r>
           </a:p>
         </p:txBody>
@@ -7642,7 +7642,7 @@
                 </a:solidFill>
                 <a:latin typeface="Georgia"/>
               </a:rPr>
-              <a:t>107</a:t>
+              <a:t>111</a:t>
             </a:r>
           </a:p>
         </p:txBody>
@@ -7847,7 +7847,7 @@
                 </a:solidFill>
                 <a:latin typeface="Georgia"/>
               </a:rPr>
-              <a:t>920</a:t>
+              <a:t>974</a:t>
             </a:r>
           </a:p>
         </p:txBody>
@@ -8052,7 +8052,7 @@
                 </a:solidFill>
                 <a:latin typeface="Georgia"/>
               </a:rPr>
-              <a:t>20</a:t>
+              <a:t>21</a:t>
             </a:r>
           </a:p>
         </p:txBody>
@@ -8257,7 +8257,7 @@
                 </a:solidFill>
                 <a:latin typeface="Georgia"/>
               </a:rPr>
-              <a:t>323</a:t>
+              <a:t>337</a:t>
             </a:r>
           </a:p>
         </p:txBody>
@@ -8887,7 +8887,7 @@
         <p:spPr>
           <a:xfrm>
             <a:off x="822960" y="2468880"/>
-            <a:ext cx="8842226" cy="548640"/>
+            <a:ext cx="9139671" cy="548640"/>
           </a:xfrm>
           <a:prstGeom prst="rect">
             <a:avLst/>
@@ -8931,7 +8931,7 @@
         <p:spPr>
           <a:xfrm>
             <a:off x="1005840" y="2615184"/>
-            <a:ext cx="8567906" cy="320040"/>
+            <a:ext cx="8865351" cy="320040"/>
           </a:xfrm>
           <a:prstGeom prst="rect">
             <a:avLst/>
@@ -8956,7 +8956,7 @@
                 </a:solidFill>
                 <a:latin typeface="Segoe UI"/>
               </a:rPr>
-              <a:t>Built 109</a:t>
+              <a:t>Built 117</a:t>
             </a:r>
           </a:p>
         </p:txBody>
@@ -8969,8 +8969,8 @@
         </p:nvSpPr>
         <p:spPr>
           <a:xfrm>
-            <a:off x="9665186" y="2468880"/>
-            <a:ext cx="243364" cy="548640"/>
+            <a:off x="9962631" y="2468880"/>
+            <a:ext cx="156233" cy="548640"/>
           </a:xfrm>
           <a:prstGeom prst="rect">
             <a:avLst/>
@@ -9013,8 +9013,8 @@
         </p:nvSpPr>
         <p:spPr>
           <a:xfrm>
-            <a:off x="9908550" y="2468880"/>
-            <a:ext cx="1460184" cy="548640"/>
+            <a:off x="10118864" y="2468880"/>
+            <a:ext cx="1249869" cy="548640"/>
           </a:xfrm>
           <a:prstGeom prst="rect">
             <a:avLst/>
@@ -9057,8 +9057,8 @@
         </p:nvSpPr>
         <p:spPr>
           <a:xfrm>
-            <a:off x="10091430" y="2615184"/>
-            <a:ext cx="1185864" cy="320040"/>
+            <a:off x="10301744" y="2615184"/>
+            <a:ext cx="975549" cy="320040"/>
           </a:xfrm>
           <a:prstGeom prst="rect">
             <a:avLst/>
@@ -9083,7 +9083,7 @@
                 </a:solidFill>
                 <a:latin typeface="Segoe UI"/>
               </a:rPr>
-              <a:t>Missing 18</a:t>
+              <a:t>Missing 16</a:t>
             </a:r>
           </a:p>
         </p:txBody>

--- a/docs/Carnet-Presentation.pptx
+++ b/docs/Carnet-Presentation.pptx
@@ -7437,7 +7437,7 @@
                 </a:solidFill>
                 <a:latin typeface="Georgia"/>
               </a:rPr>
-              <a:t>74</a:t>
+              <a:t>77</a:t>
             </a:r>
           </a:p>
         </p:txBody>
@@ -7642,7 +7642,7 @@
                 </a:solidFill>
                 <a:latin typeface="Georgia"/>
               </a:rPr>
-              <a:t>111</a:t>
+              <a:t>112</a:t>
             </a:r>
           </a:p>
         </p:txBody>
@@ -7847,7 +7847,7 @@
                 </a:solidFill>
                 <a:latin typeface="Georgia"/>
               </a:rPr>
-              <a:t>974</a:t>
+              <a:t>993</a:t>
             </a:r>
           </a:p>
         </p:txBody>
@@ -8052,7 +8052,7 @@
                 </a:solidFill>
                 <a:latin typeface="Georgia"/>
               </a:rPr>
-              <a:t>21</a:t>
+              <a:t>22</a:t>
             </a:r>
           </a:p>
         </p:txBody>
@@ -8257,7 +8257,7 @@
                 </a:solidFill>
                 <a:latin typeface="Georgia"/>
               </a:rPr>
-              <a:t>337</a:t>
+              <a:t>349</a:t>
             </a:r>
           </a:p>
         </p:txBody>
@@ -8887,7 +8887,7 @@
         <p:spPr>
           <a:xfrm>
             <a:off x="822960" y="2468880"/>
-            <a:ext cx="9139671" cy="548640"/>
+            <a:ext cx="9134720" cy="548640"/>
           </a:xfrm>
           <a:prstGeom prst="rect">
             <a:avLst/>
@@ -8931,7 +8931,7 @@
         <p:spPr>
           <a:xfrm>
             <a:off x="1005840" y="2615184"/>
-            <a:ext cx="8865351" cy="320040"/>
+            <a:ext cx="8860400" cy="320040"/>
           </a:xfrm>
           <a:prstGeom prst="rect">
             <a:avLst/>
@@ -8956,7 +8956,7 @@
                 </a:solidFill>
                 <a:latin typeface="Segoe UI"/>
               </a:rPr>
-              <a:t>Built 117</a:t>
+              <a:t>Built 123</a:t>
             </a:r>
           </a:p>
         </p:txBody>
@@ -8969,8 +8969,8 @@
         </p:nvSpPr>
         <p:spPr>
           <a:xfrm>
-            <a:off x="9962631" y="2468880"/>
-            <a:ext cx="156233" cy="548640"/>
+            <a:off x="9957680" y="2468880"/>
+            <a:ext cx="148532" cy="548640"/>
           </a:xfrm>
           <a:prstGeom prst="rect">
             <a:avLst/>
@@ -9013,8 +9013,8 @@
         </p:nvSpPr>
         <p:spPr>
           <a:xfrm>
-            <a:off x="10118864" y="2468880"/>
-            <a:ext cx="1249869" cy="548640"/>
+            <a:off x="10106212" y="2468880"/>
+            <a:ext cx="1262522" cy="548640"/>
           </a:xfrm>
           <a:prstGeom prst="rect">
             <a:avLst/>
@@ -9057,8 +9057,8 @@
         </p:nvSpPr>
         <p:spPr>
           <a:xfrm>
-            <a:off x="10301744" y="2615184"/>
-            <a:ext cx="975549" cy="320040"/>
+            <a:off x="10289092" y="2615184"/>
+            <a:ext cx="988202" cy="320040"/>
           </a:xfrm>
           <a:prstGeom prst="rect">
             <a:avLst/>
@@ -9083,7 +9083,7 @@
                 </a:solidFill>
                 <a:latin typeface="Segoe UI"/>
               </a:rPr>
-              <a:t>Missing 16</a:t>
+              <a:t>Missing 17</a:t>
             </a:r>
           </a:p>
         </p:txBody>

--- a/docs/Carnet-Presentation.pptx
+++ b/docs/Carnet-Presentation.pptx
@@ -7642,7 +7642,7 @@
                 </a:solidFill>
                 <a:latin typeface="Georgia"/>
               </a:rPr>
-              <a:t>112</a:t>
+              <a:t>114</a:t>
             </a:r>
           </a:p>
         </p:txBody>
@@ -7847,7 +7847,7 @@
                 </a:solidFill>
                 <a:latin typeface="Georgia"/>
               </a:rPr>
-              <a:t>993</a:t>
+              <a:t>1,013</a:t>
             </a:r>
           </a:p>
         </p:txBody>
@@ -8052,7 +8052,7 @@
                 </a:solidFill>
                 <a:latin typeface="Georgia"/>
               </a:rPr>
-              <a:t>22</a:t>
+              <a:t>23</a:t>
             </a:r>
           </a:p>
         </p:txBody>
@@ -8257,7 +8257,7 @@
                 </a:solidFill>
                 <a:latin typeface="Georgia"/>
               </a:rPr>
-              <a:t>349</a:t>
+              <a:t>357</a:t>
             </a:r>
           </a:p>
         </p:txBody>
@@ -8887,7 +8887,7 @@
         <p:spPr>
           <a:xfrm>
             <a:off x="822960" y="2468880"/>
-            <a:ext cx="9134720" cy="548640"/>
+            <a:ext cx="9173379" cy="548640"/>
           </a:xfrm>
           <a:prstGeom prst="rect">
             <a:avLst/>
@@ -8931,7 +8931,7 @@
         <p:spPr>
           <a:xfrm>
             <a:off x="1005840" y="2615184"/>
-            <a:ext cx="8860400" cy="320040"/>
+            <a:ext cx="8899059" cy="320040"/>
           </a:xfrm>
           <a:prstGeom prst="rect">
             <a:avLst/>
@@ -8956,7 +8956,7 @@
                 </a:solidFill>
                 <a:latin typeface="Segoe UI"/>
               </a:rPr>
-              <a:t>Built 123</a:t>
+              <a:t>Built 127</a:t>
             </a:r>
           </a:p>
         </p:txBody>
@@ -8969,8 +8969,8 @@
         </p:nvSpPr>
         <p:spPr>
           <a:xfrm>
-            <a:off x="9957680" y="2468880"/>
-            <a:ext cx="148532" cy="548640"/>
+            <a:off x="9996339" y="2468880"/>
+            <a:ext cx="144462" cy="548640"/>
           </a:xfrm>
           <a:prstGeom prst="rect">
             <a:avLst/>
@@ -9013,8 +9013,8 @@
         </p:nvSpPr>
         <p:spPr>
           <a:xfrm>
-            <a:off x="10106212" y="2468880"/>
-            <a:ext cx="1262522" cy="548640"/>
+            <a:off x="10140801" y="2468880"/>
+            <a:ext cx="1227932" cy="548640"/>
           </a:xfrm>
           <a:prstGeom prst="rect">
             <a:avLst/>
@@ -9057,8 +9057,8 @@
         </p:nvSpPr>
         <p:spPr>
           <a:xfrm>
-            <a:off x="10289092" y="2615184"/>
-            <a:ext cx="988202" cy="320040"/>
+            <a:off x="10323681" y="2615184"/>
+            <a:ext cx="953612" cy="320040"/>
           </a:xfrm>
           <a:prstGeom prst="rect">
             <a:avLst/>

--- a/docs/Carnet-Presentation.pptx
+++ b/docs/Carnet-Presentation.pptx
@@ -7437,7 +7437,7 @@
                 </a:solidFill>
                 <a:latin typeface="Georgia"/>
               </a:rPr>
-              <a:t>77</a:t>
+              <a:t>92</a:t>
             </a:r>
           </a:p>
         </p:txBody>
@@ -7642,7 +7642,7 @@
                 </a:solidFill>
                 <a:latin typeface="Georgia"/>
               </a:rPr>
-              <a:t>114</a:t>
+              <a:t>121</a:t>
             </a:r>
           </a:p>
         </p:txBody>
@@ -7847,7 +7847,7 @@
                 </a:solidFill>
                 <a:latin typeface="Georgia"/>
               </a:rPr>
-              <a:t>1,013</a:t>
+              <a:t>1,230</a:t>
             </a:r>
           </a:p>
         </p:txBody>
@@ -8052,7 +8052,7 @@
                 </a:solidFill>
                 <a:latin typeface="Georgia"/>
               </a:rPr>
-              <a:t>23</a:t>
+              <a:t>30</a:t>
             </a:r>
           </a:p>
         </p:txBody>
@@ -8257,7 +8257,7 @@
                 </a:solidFill>
                 <a:latin typeface="Georgia"/>
               </a:rPr>
-              <a:t>357</a:t>
+              <a:t>415</a:t>
             </a:r>
           </a:p>
         </p:txBody>
@@ -8887,7 +8887,7 @@
         <p:spPr>
           <a:xfrm>
             <a:off x="822960" y="2468880"/>
-            <a:ext cx="9173379" cy="548640"/>
+            <a:ext cx="9678998" cy="548640"/>
           </a:xfrm>
           <a:prstGeom prst="rect">
             <a:avLst/>
@@ -8931,7 +8931,7 @@
         <p:spPr>
           <a:xfrm>
             <a:off x="1005840" y="2615184"/>
-            <a:ext cx="8899059" cy="320040"/>
+            <a:ext cx="9404678" cy="320040"/>
           </a:xfrm>
           <a:prstGeom prst="rect">
             <a:avLst/>
@@ -8956,7 +8956,7 @@
                 </a:solidFill>
                 <a:latin typeface="Segoe UI"/>
               </a:rPr>
-              <a:t>Built 127</a:t>
+              <a:t>Built 134</a:t>
             </a:r>
           </a:p>
         </p:txBody>
@@ -8969,8 +8969,8 @@
         </p:nvSpPr>
         <p:spPr>
           <a:xfrm>
-            <a:off x="9996339" y="2468880"/>
-            <a:ext cx="144462" cy="548640"/>
+            <a:off x="10501958" y="2468880"/>
+            <a:ext cx="72231" cy="548640"/>
           </a:xfrm>
           <a:prstGeom prst="rect">
             <a:avLst/>
@@ -9013,8 +9013,8 @@
         </p:nvSpPr>
         <p:spPr>
           <a:xfrm>
-            <a:off x="10140801" y="2468880"/>
-            <a:ext cx="1227932" cy="548640"/>
+            <a:off x="10574189" y="2468880"/>
+            <a:ext cx="794544" cy="548640"/>
           </a:xfrm>
           <a:prstGeom prst="rect">
             <a:avLst/>
@@ -9057,45 +9057,6 @@
         </p:nvSpPr>
         <p:spPr>
           <a:xfrm>
-            <a:off x="10323681" y="2615184"/>
-            <a:ext cx="953612" cy="320040"/>
-          </a:xfrm>
-          <a:prstGeom prst="rect">
-            <a:avLst/>
-          </a:prstGeom>
-          <a:noFill/>
-        </p:spPr>
-        <p:txBody>
-          <a:bodyPr wrap="square" anchor="t" lIns="0" rIns="0" tIns="0" bIns="0">
-            <a:spAutoFit/>
-          </a:bodyPr>
-          <a:lstStyle/>
-          <a:p>
-            <a:pPr algn="l">
-              <a:lnSpc>
-                <a:spcPct val="115000"/>
-              </a:lnSpc>
-            </a:pPr>
-            <a:r>
-              <a:rPr sz="1300" b="1">
-                <a:solidFill>
-                  <a:srgbClr val="535E60"/>
-                </a:solidFill>
-                <a:latin typeface="Segoe UI"/>
-              </a:rPr>
-              <a:t>Missing 17</a:t>
-            </a:r>
-          </a:p>
-        </p:txBody>
-      </p:sp>
-      <p:sp>
-        <p:nvSpPr>
-          <p:cNvPr id="11" name="TextBox 10"/>
-          <p:cNvSpPr txBox="1"/>
-          <p:nvPr/>
-        </p:nvSpPr>
-        <p:spPr>
-          <a:xfrm>
             <a:off x="822960" y="3246120"/>
             <a:ext cx="10424160" cy="548640"/>
           </a:xfrm>
@@ -9129,7 +9090,7 @@
       </p:sp>
       <p:sp>
         <p:nvSpPr>
-          <p:cNvPr id="12" name="Rectangle 11"/>
+          <p:cNvPr id="11" name="Rectangle 10"/>
           <p:cNvSpPr/>
           <p:nvPr/>
         </p:nvSpPr>
@@ -9173,7 +9134,7 @@
       </p:sp>
       <p:sp>
         <p:nvSpPr>
-          <p:cNvPr id="13" name="TextBox 12"/>
+          <p:cNvPr id="12" name="TextBox 11"/>
           <p:cNvSpPr txBox="1"/>
           <p:nvPr/>
         </p:nvSpPr>
@@ -9221,7 +9182,7 @@
       </p:sp>
       <p:sp>
         <p:nvSpPr>
-          <p:cNvPr id="14" name="Rectangle 13"/>
+          <p:cNvPr id="13" name="Rectangle 12"/>
           <p:cNvSpPr/>
           <p:nvPr/>
         </p:nvSpPr>
@@ -9265,7 +9226,7 @@
       </p:sp>
       <p:sp>
         <p:nvSpPr>
-          <p:cNvPr id="15" name="TextBox 14"/>
+          <p:cNvPr id="14" name="TextBox 13"/>
           <p:cNvSpPr txBox="1"/>
           <p:nvPr/>
         </p:nvSpPr>
@@ -9313,7 +9274,7 @@
       </p:sp>
       <p:sp>
         <p:nvSpPr>
-          <p:cNvPr id="16" name="Rectangle 15"/>
+          <p:cNvPr id="15" name="Rectangle 14"/>
           <p:cNvSpPr/>
           <p:nvPr/>
         </p:nvSpPr>
@@ -9357,7 +9318,7 @@
       </p:sp>
       <p:sp>
         <p:nvSpPr>
-          <p:cNvPr id="17" name="TextBox 16"/>
+          <p:cNvPr id="16" name="TextBox 15"/>
           <p:cNvSpPr txBox="1"/>
           <p:nvPr/>
         </p:nvSpPr>
@@ -9405,7 +9366,7 @@
       </p:sp>
       <p:sp>
         <p:nvSpPr>
-          <p:cNvPr id="18" name="TextBox 17"/>
+          <p:cNvPr id="17" name="TextBox 16"/>
           <p:cNvSpPr txBox="1"/>
           <p:nvPr/>
         </p:nvSpPr>
@@ -9444,7 +9405,7 @@
       </p:sp>
       <p:sp>
         <p:nvSpPr>
-          <p:cNvPr id="19" name="TextBox 18"/>
+          <p:cNvPr id="18" name="TextBox 17"/>
           <p:cNvSpPr txBox="1"/>
           <p:nvPr/>
         </p:nvSpPr>

--- a/docs/Carnet-Presentation.pptx
+++ b/docs/Carnet-Presentation.pptx
@@ -7642,7 +7642,7 @@
                 </a:solidFill>
                 <a:latin typeface="Georgia"/>
               </a:rPr>
-              <a:t>121</a:t>
+              <a:t>122</a:t>
             </a:r>
           </a:p>
         </p:txBody>
@@ -7847,7 +7847,7 @@
                 </a:solidFill>
                 <a:latin typeface="Georgia"/>
               </a:rPr>
-              <a:t>1,230</a:t>
+              <a:t>1,242</a:t>
             </a:r>
           </a:p>
         </p:txBody>
@@ -8052,7 +8052,7 @@
                 </a:solidFill>
                 <a:latin typeface="Georgia"/>
               </a:rPr>
-              <a:t>30</a:t>
+              <a:t>31</a:t>
             </a:r>
           </a:p>
         </p:txBody>
@@ -8257,7 +8257,7 @@
                 </a:solidFill>
                 <a:latin typeface="Georgia"/>
               </a:rPr>
-              <a:t>415</a:t>
+              <a:t>423</a:t>
             </a:r>
           </a:p>
         </p:txBody>
@@ -8887,7 +8887,7 @@
         <p:spPr>
           <a:xfrm>
             <a:off x="822960" y="2468880"/>
-            <a:ext cx="9678998" cy="548640"/>
+            <a:ext cx="10040155" cy="548640"/>
           </a:xfrm>
           <a:prstGeom prst="rect">
             <a:avLst/>
@@ -8931,7 +8931,7 @@
         <p:spPr>
           <a:xfrm>
             <a:off x="1005840" y="2615184"/>
-            <a:ext cx="9404678" cy="320040"/>
+            <a:ext cx="9765835" cy="320040"/>
           </a:xfrm>
           <a:prstGeom prst="rect">
             <a:avLst/>
@@ -8956,7 +8956,7 @@
                 </a:solidFill>
                 <a:latin typeface="Segoe UI"/>
               </a:rPr>
-              <a:t>Built 134</a:t>
+              <a:t>Built 139</a:t>
             </a:r>
           </a:p>
         </p:txBody>
@@ -8969,7 +8969,7 @@
         </p:nvSpPr>
         <p:spPr>
           <a:xfrm>
-            <a:off x="10501958" y="2468880"/>
+            <a:off x="10863115" y="2468880"/>
             <a:ext cx="72231" cy="548640"/>
           </a:xfrm>
           <a:prstGeom prst="rect">
@@ -9013,8 +9013,8 @@
         </p:nvSpPr>
         <p:spPr>
           <a:xfrm>
-            <a:off x="10574189" y="2468880"/>
-            <a:ext cx="794544" cy="548640"/>
+            <a:off x="10935346" y="2468880"/>
+            <a:ext cx="433388" cy="548640"/>
           </a:xfrm>
           <a:prstGeom prst="rect">
             <a:avLst/>

--- a/docs/Carnet-Presentation.pptx
+++ b/docs/Carnet-Presentation.pptx
@@ -7847,7 +7847,7 @@
                 </a:solidFill>
                 <a:latin typeface="Georgia"/>
               </a:rPr>
-              <a:t>1,242</a:t>
+              <a:t>1,252</a:t>
             </a:r>
           </a:p>
         </p:txBody>
@@ -8052,7 +8052,7 @@
                 </a:solidFill>
                 <a:latin typeface="Georgia"/>
               </a:rPr>
-              <a:t>31</a:t>
+              <a:t>34</a:t>
             </a:r>
           </a:p>
         </p:txBody>
@@ -8257,7 +8257,7 @@
                 </a:solidFill>
                 <a:latin typeface="Georgia"/>
               </a:rPr>
-              <a:t>423</a:t>
+              <a:t>429</a:t>
             </a:r>
           </a:p>
         </p:txBody>

--- a/docs/Carnet-Presentation.pptx
+++ b/docs/Carnet-Presentation.pptx
@@ -7642,7 +7642,7 @@
                 </a:solidFill>
                 <a:latin typeface="Georgia"/>
               </a:rPr>
-              <a:t>122</a:t>
+              <a:t>123</a:t>
             </a:r>
           </a:p>
         </p:txBody>
@@ -7847,7 +7847,7 @@
                 </a:solidFill>
                 <a:latin typeface="Georgia"/>
               </a:rPr>
-              <a:t>1,252</a:t>
+              <a:t>1,262</a:t>
             </a:r>
           </a:p>
         </p:txBody>
@@ -8052,7 +8052,7 @@
                 </a:solidFill>
                 <a:latin typeface="Georgia"/>
               </a:rPr>
-              <a:t>34</a:t>
+              <a:t>35</a:t>
             </a:r>
           </a:p>
         </p:txBody>
@@ -8257,7 +8257,7 @@
                 </a:solidFill>
                 <a:latin typeface="Georgia"/>
               </a:rPr>
-              <a:t>429</a:t>
+              <a:t>436</a:t>
             </a:r>
           </a:p>
         </p:txBody>
@@ -8887,7 +8887,7 @@
         <p:spPr>
           <a:xfrm>
             <a:off x="822960" y="2468880"/>
-            <a:ext cx="10040155" cy="548640"/>
+            <a:ext cx="10056898" cy="548640"/>
           </a:xfrm>
           <a:prstGeom prst="rect">
             <a:avLst/>
@@ -8931,7 +8931,7 @@
         <p:spPr>
           <a:xfrm>
             <a:off x="1005840" y="2615184"/>
-            <a:ext cx="9765835" cy="320040"/>
+            <a:ext cx="9782578" cy="320040"/>
           </a:xfrm>
           <a:prstGeom prst="rect">
             <a:avLst/>
@@ -8956,7 +8956,7 @@
                 </a:solidFill>
                 <a:latin typeface="Segoe UI"/>
               </a:rPr>
-              <a:t>Built 139</a:t>
+              <a:t>Built 144</a:t>
             </a:r>
           </a:p>
         </p:txBody>
@@ -8969,8 +8969,8 @@
         </p:nvSpPr>
         <p:spPr>
           <a:xfrm>
-            <a:off x="10863115" y="2468880"/>
-            <a:ext cx="72231" cy="548640"/>
+            <a:off x="10879858" y="2468880"/>
+            <a:ext cx="69839" cy="548640"/>
           </a:xfrm>
           <a:prstGeom prst="rect">
             <a:avLst/>
@@ -9013,8 +9013,8 @@
         </p:nvSpPr>
         <p:spPr>
           <a:xfrm>
-            <a:off x="10935346" y="2468880"/>
-            <a:ext cx="433388" cy="548640"/>
+            <a:off x="10949697" y="2468880"/>
+            <a:ext cx="349197" cy="548640"/>
           </a:xfrm>
           <a:prstGeom prst="rect">
             <a:avLst/>

--- a/docs/Carnet-Presentation.pptx
+++ b/docs/Carnet-Presentation.pptx
@@ -7437,7 +7437,7 @@
                 </a:solidFill>
                 <a:latin typeface="Georgia"/>
               </a:rPr>
-              <a:t>92</a:t>
+              <a:t>98</a:t>
             </a:r>
           </a:p>
         </p:txBody>
@@ -7642,7 +7642,7 @@
                 </a:solidFill>
                 <a:latin typeface="Georgia"/>
               </a:rPr>
-              <a:t>123</a:t>
+              <a:t>125</a:t>
             </a:r>
           </a:p>
         </p:txBody>
@@ -7847,7 +7847,7 @@
                 </a:solidFill>
                 <a:latin typeface="Georgia"/>
               </a:rPr>
-              <a:t>1,262</a:t>
+              <a:t>—</a:t>
             </a:r>
           </a:p>
         </p:txBody>
@@ -8052,7 +8052,7 @@
                 </a:solidFill>
                 <a:latin typeface="Georgia"/>
               </a:rPr>
-              <a:t>35</a:t>
+              <a:t>39</a:t>
             </a:r>
           </a:p>
         </p:txBody>
@@ -8257,7 +8257,7 @@
                 </a:solidFill>
                 <a:latin typeface="Georgia"/>
               </a:rPr>
-              <a:t>436</a:t>
+              <a:t>465</a:t>
             </a:r>
           </a:p>
         </p:txBody>
@@ -8887,7 +8887,7 @@
         <p:spPr>
           <a:xfrm>
             <a:off x="822960" y="2468880"/>
-            <a:ext cx="10056898" cy="548640"/>
+            <a:ext cx="8788145" cy="548640"/>
           </a:xfrm>
           <a:prstGeom prst="rect">
             <a:avLst/>
@@ -8931,7 +8931,7 @@
         <p:spPr>
           <a:xfrm>
             <a:off x="1005840" y="2615184"/>
-            <a:ext cx="9782578" cy="320040"/>
+            <a:ext cx="8513825" cy="320040"/>
           </a:xfrm>
           <a:prstGeom prst="rect">
             <a:avLst/>
@@ -8956,7 +8956,7 @@
                 </a:solidFill>
                 <a:latin typeface="Segoe UI"/>
               </a:rPr>
-              <a:t>Built 144</a:t>
+              <a:t>Built 155</a:t>
             </a:r>
           </a:p>
         </p:txBody>
@@ -8969,8 +8969,8 @@
         </p:nvSpPr>
         <p:spPr>
           <a:xfrm>
-            <a:off x="10879858" y="2468880"/>
-            <a:ext cx="69839" cy="548640"/>
+            <a:off x="9611105" y="2468880"/>
+            <a:ext cx="226790" cy="548640"/>
           </a:xfrm>
           <a:prstGeom prst="rect">
             <a:avLst/>
@@ -9013,8 +9013,8 @@
         </p:nvSpPr>
         <p:spPr>
           <a:xfrm>
-            <a:off x="10949697" y="2468880"/>
-            <a:ext cx="349197" cy="548640"/>
+            <a:off x="9837895" y="2468880"/>
+            <a:ext cx="1474140" cy="548640"/>
           </a:xfrm>
           <a:prstGeom prst="rect">
             <a:avLst/>
@@ -9057,6 +9057,45 @@
         </p:nvSpPr>
         <p:spPr>
           <a:xfrm>
+            <a:off x="10020775" y="2615184"/>
+            <a:ext cx="1199820" cy="320040"/>
+          </a:xfrm>
+          <a:prstGeom prst="rect">
+            <a:avLst/>
+          </a:prstGeom>
+          <a:noFill/>
+        </p:spPr>
+        <p:txBody>
+          <a:bodyPr wrap="square" anchor="t" lIns="0" rIns="0" tIns="0" bIns="0">
+            <a:spAutoFit/>
+          </a:bodyPr>
+          <a:lstStyle/>
+          <a:p>
+            <a:pPr algn="l">
+              <a:lnSpc>
+                <a:spcPct val="115000"/>
+              </a:lnSpc>
+            </a:pPr>
+            <a:r>
+              <a:rPr sz="1300" b="1">
+                <a:solidFill>
+                  <a:srgbClr val="535E60"/>
+                </a:solidFill>
+                <a:latin typeface="Segoe UI"/>
+              </a:rPr>
+              <a:t>Missing 26</a:t>
+            </a:r>
+          </a:p>
+        </p:txBody>
+      </p:sp>
+      <p:sp>
+        <p:nvSpPr>
+          <p:cNvPr id="11" name="TextBox 10"/>
+          <p:cNvSpPr txBox="1"/>
+          <p:nvPr/>
+        </p:nvSpPr>
+        <p:spPr>
+          <a:xfrm>
             <a:off x="822960" y="3246120"/>
             <a:ext cx="10424160" cy="548640"/>
           </a:xfrm>
@@ -9090,7 +9129,7 @@
       </p:sp>
       <p:sp>
         <p:nvSpPr>
-          <p:cNvPr id="11" name="Rectangle 10"/>
+          <p:cNvPr id="12" name="Rectangle 11"/>
           <p:cNvSpPr/>
           <p:nvPr/>
         </p:nvSpPr>
@@ -9134,7 +9173,7 @@
       </p:sp>
       <p:sp>
         <p:nvSpPr>
-          <p:cNvPr id="12" name="TextBox 11"/>
+          <p:cNvPr id="13" name="TextBox 12"/>
           <p:cNvSpPr txBox="1"/>
           <p:nvPr/>
         </p:nvSpPr>
@@ -9182,7 +9221,7 @@
       </p:sp>
       <p:sp>
         <p:nvSpPr>
-          <p:cNvPr id="13" name="Rectangle 12"/>
+          <p:cNvPr id="14" name="Rectangle 13"/>
           <p:cNvSpPr/>
           <p:nvPr/>
         </p:nvSpPr>
@@ -9226,7 +9265,7 @@
       </p:sp>
       <p:sp>
         <p:nvSpPr>
-          <p:cNvPr id="14" name="TextBox 13"/>
+          <p:cNvPr id="15" name="TextBox 14"/>
           <p:cNvSpPr txBox="1"/>
           <p:nvPr/>
         </p:nvSpPr>
@@ -9274,7 +9313,7 @@
       </p:sp>
       <p:sp>
         <p:nvSpPr>
-          <p:cNvPr id="15" name="Rectangle 14"/>
+          <p:cNvPr id="16" name="Rectangle 15"/>
           <p:cNvSpPr/>
           <p:nvPr/>
         </p:nvSpPr>
@@ -9318,7 +9357,7 @@
       </p:sp>
       <p:sp>
         <p:nvSpPr>
-          <p:cNvPr id="16" name="TextBox 15"/>
+          <p:cNvPr id="17" name="TextBox 16"/>
           <p:cNvSpPr txBox="1"/>
           <p:nvPr/>
         </p:nvSpPr>
@@ -9366,7 +9405,7 @@
       </p:sp>
       <p:sp>
         <p:nvSpPr>
-          <p:cNvPr id="17" name="TextBox 16"/>
+          <p:cNvPr id="18" name="TextBox 17"/>
           <p:cNvSpPr txBox="1"/>
           <p:nvPr/>
         </p:nvSpPr>
@@ -9405,7 +9444,7 @@
       </p:sp>
       <p:sp>
         <p:nvSpPr>
-          <p:cNvPr id="18" name="TextBox 17"/>
+          <p:cNvPr id="19" name="TextBox 18"/>
           <p:cNvSpPr txBox="1"/>
           <p:nvPr/>
         </p:nvSpPr>

--- a/docs/Carnet-Presentation.pptx
+++ b/docs/Carnet-Presentation.pptx
@@ -8257,7 +8257,7 @@
                 </a:solidFill>
                 <a:latin typeface="Georgia"/>
               </a:rPr>
-              <a:t>465</a:t>
+              <a:t>472</a:t>
             </a:r>
           </a:p>
         </p:txBody>
@@ -8887,7 +8887,7 @@
         <p:spPr>
           <a:xfrm>
             <a:off x="822960" y="2468880"/>
-            <a:ext cx="8788145" cy="548640"/>
+            <a:ext cx="8853939" cy="548640"/>
           </a:xfrm>
           <a:prstGeom prst="rect">
             <a:avLst/>
@@ -8931,7 +8931,7 @@
         <p:spPr>
           <a:xfrm>
             <a:off x="1005840" y="2615184"/>
-            <a:ext cx="8513825" cy="320040"/>
+            <a:ext cx="8579619" cy="320040"/>
           </a:xfrm>
           <a:prstGeom prst="rect">
             <a:avLst/>
@@ -8956,7 +8956,7 @@
                 </a:solidFill>
                 <a:latin typeface="Segoe UI"/>
               </a:rPr>
-              <a:t>Built 155</a:t>
+              <a:t>Built 157</a:t>
             </a:r>
           </a:p>
         </p:txBody>
@@ -8969,8 +8969,8 @@
         </p:nvSpPr>
         <p:spPr>
           <a:xfrm>
-            <a:off x="9611105" y="2468880"/>
-            <a:ext cx="226790" cy="548640"/>
+            <a:off x="9676899" y="2468880"/>
+            <a:ext cx="225578" cy="548640"/>
           </a:xfrm>
           <a:prstGeom prst="rect">
             <a:avLst/>
@@ -9013,8 +9013,8 @@
         </p:nvSpPr>
         <p:spPr>
           <a:xfrm>
-            <a:off x="9837895" y="2468880"/>
-            <a:ext cx="1474140" cy="548640"/>
+            <a:off x="9902477" y="2468880"/>
+            <a:ext cx="1409862" cy="548640"/>
           </a:xfrm>
           <a:prstGeom prst="rect">
             <a:avLst/>
@@ -9057,8 +9057,8 @@
         </p:nvSpPr>
         <p:spPr>
           <a:xfrm>
-            <a:off x="10020775" y="2615184"/>
-            <a:ext cx="1199820" cy="320040"/>
+            <a:off x="10085357" y="2615184"/>
+            <a:ext cx="1135542" cy="320040"/>
           </a:xfrm>
           <a:prstGeom prst="rect">
             <a:avLst/>
@@ -9083,7 +9083,7 @@
                 </a:solidFill>
                 <a:latin typeface="Segoe UI"/>
               </a:rPr>
-              <a:t>Missing 26</a:t>
+              <a:t>Missing 25</a:t>
             </a:r>
           </a:p>
         </p:txBody>

--- a/docs/Carnet-Presentation.pptx
+++ b/docs/Carnet-Presentation.pptx
@@ -8052,7 +8052,7 @@
                 </a:solidFill>
                 <a:latin typeface="Georgia"/>
               </a:rPr>
-              <a:t>39</a:t>
+              <a:t>40</a:t>
             </a:r>
           </a:p>
         </p:txBody>
@@ -8257,7 +8257,7 @@
                 </a:solidFill>
                 <a:latin typeface="Georgia"/>
               </a:rPr>
-              <a:t>472</a:t>
+              <a:t>478</a:t>
             </a:r>
           </a:p>
         </p:txBody>
@@ -8887,7 +8887,7 @@
         <p:spPr>
           <a:xfrm>
             <a:off x="822960" y="2468880"/>
-            <a:ext cx="8853939" cy="548640"/>
+            <a:ext cx="8910333" cy="548640"/>
           </a:xfrm>
           <a:prstGeom prst="rect">
             <a:avLst/>
@@ -8931,7 +8931,7 @@
         <p:spPr>
           <a:xfrm>
             <a:off x="1005840" y="2615184"/>
-            <a:ext cx="8579619" cy="320040"/>
+            <a:ext cx="8636013" cy="320040"/>
           </a:xfrm>
           <a:prstGeom prst="rect">
             <a:avLst/>
@@ -8956,7 +8956,7 @@
                 </a:solidFill>
                 <a:latin typeface="Segoe UI"/>
               </a:rPr>
-              <a:t>Built 157</a:t>
+              <a:t>Built 158</a:t>
             </a:r>
           </a:p>
         </p:txBody>
@@ -8969,7 +8969,7 @@
         </p:nvSpPr>
         <p:spPr>
           <a:xfrm>
-            <a:off x="9676899" y="2468880"/>
+            <a:off x="9733293" y="2468880"/>
             <a:ext cx="225578" cy="548640"/>
           </a:xfrm>
           <a:prstGeom prst="rect">
@@ -9013,8 +9013,8 @@
         </p:nvSpPr>
         <p:spPr>
           <a:xfrm>
-            <a:off x="9902477" y="2468880"/>
-            <a:ext cx="1409862" cy="548640"/>
+            <a:off x="9958871" y="2468880"/>
+            <a:ext cx="1353468" cy="548640"/>
           </a:xfrm>
           <a:prstGeom prst="rect">
             <a:avLst/>
@@ -9057,8 +9057,8 @@
         </p:nvSpPr>
         <p:spPr>
           <a:xfrm>
-            <a:off x="10085357" y="2615184"/>
-            <a:ext cx="1135542" cy="320040"/>
+            <a:off x="10141751" y="2615184"/>
+            <a:ext cx="1079148" cy="320040"/>
           </a:xfrm>
           <a:prstGeom prst="rect">
             <a:avLst/>
@@ -9083,7 +9083,7 @@
                 </a:solidFill>
                 <a:latin typeface="Segoe UI"/>
               </a:rPr>
-              <a:t>Missing 25</a:t>
+              <a:t>Missing 24</a:t>
             </a:r>
           </a:p>
         </p:txBody>

--- a/docs/Carnet-Presentation.pptx
+++ b/docs/Carnet-Presentation.pptx
@@ -7437,7 +7437,7 @@
                 </a:solidFill>
                 <a:latin typeface="Georgia"/>
               </a:rPr>
-              <a:t>98</a:t>
+              <a:t>99</a:t>
             </a:r>
           </a:p>
         </p:txBody>
@@ -7642,7 +7642,7 @@
                 </a:solidFill>
                 <a:latin typeface="Georgia"/>
               </a:rPr>
-              <a:t>125</a:t>
+              <a:t>127</a:t>
             </a:r>
           </a:p>
         </p:txBody>
@@ -8052,7 +8052,7 @@
                 </a:solidFill>
                 <a:latin typeface="Georgia"/>
               </a:rPr>
-              <a:t>40</a:t>
+              <a:t>41</a:t>
             </a:r>
           </a:p>
         </p:txBody>
@@ -8257,7 +8257,7 @@
                 </a:solidFill>
                 <a:latin typeface="Georgia"/>
               </a:rPr>
-              <a:t>478</a:t>
+              <a:t>484</a:t>
             </a:r>
           </a:p>
         </p:txBody>
@@ -8887,7 +8887,7 @@
         <p:spPr>
           <a:xfrm>
             <a:off x="822960" y="2468880"/>
-            <a:ext cx="8910333" cy="548640"/>
+            <a:ext cx="9023122" cy="548640"/>
           </a:xfrm>
           <a:prstGeom prst="rect">
             <a:avLst/>
@@ -8931,7 +8931,7 @@
         <p:spPr>
           <a:xfrm>
             <a:off x="1005840" y="2615184"/>
-            <a:ext cx="8636013" cy="320040"/>
+            <a:ext cx="8748802" cy="320040"/>
           </a:xfrm>
           <a:prstGeom prst="rect">
             <a:avLst/>
@@ -8956,7 +8956,7 @@
                 </a:solidFill>
                 <a:latin typeface="Segoe UI"/>
               </a:rPr>
-              <a:t>Built 158</a:t>
+              <a:t>Built 160</a:t>
             </a:r>
           </a:p>
         </p:txBody>
@@ -8969,7 +8969,7 @@
         </p:nvSpPr>
         <p:spPr>
           <a:xfrm>
-            <a:off x="9733293" y="2468880"/>
+            <a:off x="9846082" y="2468880"/>
             <a:ext cx="225578" cy="548640"/>
           </a:xfrm>
           <a:prstGeom prst="rect">
@@ -9013,8 +9013,8 @@
         </p:nvSpPr>
         <p:spPr>
           <a:xfrm>
-            <a:off x="9958871" y="2468880"/>
-            <a:ext cx="1353468" cy="548640"/>
+            <a:off x="10071660" y="2468880"/>
+            <a:ext cx="1240679" cy="548640"/>
           </a:xfrm>
           <a:prstGeom prst="rect">
             <a:avLst/>
@@ -9057,8 +9057,8 @@
         </p:nvSpPr>
         <p:spPr>
           <a:xfrm>
-            <a:off x="10141751" y="2615184"/>
-            <a:ext cx="1079148" cy="320040"/>
+            <a:off x="10254540" y="2615184"/>
+            <a:ext cx="966359" cy="320040"/>
           </a:xfrm>
           <a:prstGeom prst="rect">
             <a:avLst/>
@@ -9083,7 +9083,7 @@
                 </a:solidFill>
                 <a:latin typeface="Segoe UI"/>
               </a:rPr>
-              <a:t>Missing 24</a:t>
+              <a:t>Missing 22</a:t>
             </a:r>
           </a:p>
         </p:txBody>

--- a/docs/Carnet-Presentation.pptx
+++ b/docs/Carnet-Presentation.pptx
@@ -7437,7 +7437,7 @@
                 </a:solidFill>
                 <a:latin typeface="Georgia"/>
               </a:rPr>
-              <a:t>99</a:t>
+              <a:t>100</a:t>
             </a:r>
           </a:p>
         </p:txBody>
@@ -8052,7 +8052,7 @@
                 </a:solidFill>
                 <a:latin typeface="Georgia"/>
               </a:rPr>
-              <a:t>41</a:t>
+              <a:t>42</a:t>
             </a:r>
           </a:p>
         </p:txBody>
@@ -8257,7 +8257,7 @@
                 </a:solidFill>
                 <a:latin typeface="Georgia"/>
               </a:rPr>
-              <a:t>484</a:t>
+              <a:t>491</a:t>
             </a:r>
           </a:p>
         </p:txBody>
@@ -8887,7 +8887,7 @@
         <p:spPr>
           <a:xfrm>
             <a:off x="822960" y="2468880"/>
-            <a:ext cx="9023122" cy="548640"/>
+            <a:ext cx="9135912" cy="548640"/>
           </a:xfrm>
           <a:prstGeom prst="rect">
             <a:avLst/>
@@ -8931,7 +8931,7 @@
         <p:spPr>
           <a:xfrm>
             <a:off x="1005840" y="2615184"/>
-            <a:ext cx="8748802" cy="320040"/>
+            <a:ext cx="8861592" cy="320040"/>
           </a:xfrm>
           <a:prstGeom prst="rect">
             <a:avLst/>
@@ -8956,7 +8956,7 @@
                 </a:solidFill>
                 <a:latin typeface="Segoe UI"/>
               </a:rPr>
-              <a:t>Built 160</a:t>
+              <a:t>Built 162</a:t>
             </a:r>
           </a:p>
         </p:txBody>
@@ -8969,8 +8969,8 @@
         </p:nvSpPr>
         <p:spPr>
           <a:xfrm>
-            <a:off x="9846082" y="2468880"/>
-            <a:ext cx="225578" cy="548640"/>
+            <a:off x="9958872" y="2468880"/>
+            <a:ext cx="169183" cy="548640"/>
           </a:xfrm>
           <a:prstGeom prst="rect">
             <a:avLst/>
@@ -9013,8 +9013,8 @@
         </p:nvSpPr>
         <p:spPr>
           <a:xfrm>
-            <a:off x="10071660" y="2468880"/>
-            <a:ext cx="1240679" cy="548640"/>
+            <a:off x="10128055" y="2468880"/>
+            <a:ext cx="1184284" cy="548640"/>
           </a:xfrm>
           <a:prstGeom prst="rect">
             <a:avLst/>
@@ -9057,8 +9057,8 @@
         </p:nvSpPr>
         <p:spPr>
           <a:xfrm>
-            <a:off x="10254540" y="2615184"/>
-            <a:ext cx="966359" cy="320040"/>
+            <a:off x="10310935" y="2615184"/>
+            <a:ext cx="909964" cy="320040"/>
           </a:xfrm>
           <a:prstGeom prst="rect">
             <a:avLst/>
@@ -9083,7 +9083,7 @@
                 </a:solidFill>
                 <a:latin typeface="Segoe UI"/>
               </a:rPr>
-              <a:t>Missing 22</a:t>
+              <a:t>Missing 21</a:t>
             </a:r>
           </a:p>
         </p:txBody>
@@ -11797,7 +11797,7 @@
                 </a:solidFill>
                 <a:latin typeface="Georgia"/>
               </a:rPr>
-              <a:t>7</a:t>
+              <a:t>32</a:t>
             </a:r>
           </a:p>
         </p:txBody>
@@ -11836,7 +11836,7 @@
                 </a:solidFill>
                 <a:latin typeface="Segoe UI"/>
               </a:rPr>
-              <a:t>Digital vehicle inspection</a:t>
+              <a:t>Card payment through a provider</a:t>
             </a:r>
           </a:p>
         </p:txBody>
@@ -11875,7 +11875,7 @@
                 </a:solidFill>
                 <a:latin typeface="Segoe UI"/>
               </a:rPr>
-              <a:t>Six tables exist and no interface. An inspection is what turns a booked oil change into approved brake work.</a:t>
+              <a:t>A provider seam with a stub that behaves like the real one, a "Pay now" in the portal, failed payments as a state, and reconciliation that names the difference.</a:t>
             </a:r>
           </a:p>
         </p:txBody>
@@ -11958,7 +11958,7 @@
                 </a:solidFill>
                 <a:latin typeface="Georgia"/>
               </a:rPr>
-              <a:t>8</a:t>
+              <a:t>33</a:t>
             </a:r>
           </a:p>
         </p:txBody>
@@ -11997,7 +11997,7 @@
                 </a:solidFill>
                 <a:latin typeface="Segoe UI"/>
               </a:rPr>
-              <a:t>The floor and the diary</a:t>
+              <a:t>Data in, data out</a:t>
             </a:r>
           </a:p>
         </p:txBody>
@@ -12036,7 +12036,7 @@
                 </a:solidFill>
                 <a:latin typeface="Segoe UI"/>
               </a:rPr>
-              <a:t>Day, month, technician and site views. Drag a job between bays, with the capacity check running on the drop.</a:t>
+              <a:t>CSV import with mapping, validation and a report of what did not go in; export of everything a workshop owns.</a:t>
             </a:r>
           </a:p>
         </p:txBody>
@@ -12119,7 +12119,7 @@
                 </a:solidFill>
                 <a:latin typeface="Georgia"/>
               </a:rPr>
-              <a:t>9</a:t>
+              <a:t>34</a:t>
             </a:r>
           </a:p>
         </p:txBody>
@@ -12158,7 +12158,7 @@
                 </a:solidFill>
                 <a:latin typeface="Segoe UI"/>
               </a:rPr>
-              <a:t>Warranty, fleet, customer thread</a:t>
+              <a:t>The workflow, as one thing</a:t>
             </a:r>
           </a:p>
         </p:txBody>
@@ -12197,7 +12197,7 @@
                 </a:solidFill>
                 <a:latin typeface="Segoe UI"/>
               </a:rPr>
-              <a:t>A fifty-vehicle company is fifty unrelated records today. This opens a market rather than adding a feature.</a:t>
+              <a:t>An approved estimate becomes a job in one press; extra work is quoted and approved without leaving the job.</a:t>
             </a:r>
           </a:p>
         </p:txBody>
@@ -12280,7 +12280,7 @@
                 </a:solidFill>
                 <a:latin typeface="Georgia"/>
               </a:rPr>
-              <a:t>10</a:t>
+              <a:t>35</a:t>
             </a:r>
           </a:p>
         </p:txBody>
@@ -12319,7 +12319,7 @@
                 </a:solidFill>
                 <a:latin typeface="Segoe UI"/>
               </a:rPr>
-              <a:t>Reviews, loyalty and the inbox</a:t>
+              <a:t>Arrival and departure</a:t>
             </a:r>
           </a:p>
         </p:txBody>
@@ -12358,7 +12358,7 @@
                 </a:solidFill>
                 <a:latin typeface="Segoe UI"/>
               </a:rPr>
-              <a:t>A strong rating invited to a public review, a poor one into a private conversation. Replies land against the job.</a:t>
+              <a:t>Check-in and check-out, signatures on the record, key tags.</a:t>
             </a:r>
           </a:p>
         </p:txBody>
@@ -12441,7 +12441,7 @@
                 </a:solidFill>
                 <a:latin typeface="Georgia"/>
               </a:rPr>
-              <a:t>11</a:t>
+              <a:t>36</a:t>
             </a:r>
           </a:p>
         </p:txBody>
@@ -12480,7 +12480,7 @@
                 </a:solidFill>
                 <a:latin typeface="Segoe UI"/>
               </a:rPr>
-              <a:t>Filling in the ERP</a:t>
+              <a:t>Conversations</a:t>
             </a:r>
           </a:p>
         </p:txBody>
@@ -12519,7 +12519,7 @@
                 </a:solidFill>
                 <a:latin typeface="Segoe UI"/>
               </a:rPr>
-              <a:t>Supplier payments, purchase price history, refunds, card payment, payroll export.</a:t>
+              <a:t>One thread per customer across email, SMS and WhatsApp, on the job it is about.</a:t>
             </a:r>
           </a:p>
         </p:txBody>
@@ -12602,7 +12602,7 @@
                 </a:solidFill>
                 <a:latin typeface="Georgia"/>
               </a:rPr>
-              <a:t>12</a:t>
+              <a:t>37</a:t>
             </a:r>
           </a:p>
         </p:txBody>
@@ -12641,7 +12641,7 @@
                 </a:solidFill>
                 <a:latin typeface="Segoe UI"/>
               </a:rPr>
-              <a:t>Answers rather than pages</a:t>
+              <a:t>Packages and templates</a:t>
             </a:r>
           </a:p>
         </p:txBody>
@@ -12680,7 +12680,7 @@
                 </a:solidFill>
                 <a:latin typeface="Segoe UI"/>
               </a:rPr>
-              <a:t>Ask a question in words. AI inside the workflow, never deciding anything.</a:t>
+              <a:t>Service packages priced as one thing; job templates that put the right lines on from the start.</a:t>
             </a:r>
           </a:p>
         </p:txBody>

--- a/docs/Carnet-Presentation.pptx
+++ b/docs/Carnet-Presentation.pptx
@@ -7437,7 +7437,7 @@
                 </a:solidFill>
                 <a:latin typeface="Georgia"/>
               </a:rPr>
-              <a:t>100</a:t>
+              <a:t>102</a:t>
             </a:r>
           </a:p>
         </p:txBody>
@@ -7642,7 +7642,7 @@
                 </a:solidFill>
                 <a:latin typeface="Georgia"/>
               </a:rPr>
-              <a:t>127</a:t>
+              <a:t>128</a:t>
             </a:r>
           </a:p>
         </p:txBody>
@@ -8052,7 +8052,7 @@
                 </a:solidFill>
                 <a:latin typeface="Georgia"/>
               </a:rPr>
-              <a:t>42</a:t>
+              <a:t>43</a:t>
             </a:r>
           </a:p>
         </p:txBody>
@@ -8257,7 +8257,7 @@
                 </a:solidFill>
                 <a:latin typeface="Georgia"/>
               </a:rPr>
-              <a:t>491</a:t>
+              <a:t>498</a:t>
             </a:r>
           </a:p>
         </p:txBody>
@@ -8887,7 +8887,7 @@
         <p:spPr>
           <a:xfrm>
             <a:off x="822960" y="2468880"/>
-            <a:ext cx="9135912" cy="548640"/>
+            <a:ext cx="9192306" cy="548640"/>
           </a:xfrm>
           <a:prstGeom prst="rect">
             <a:avLst/>
@@ -8931,7 +8931,7 @@
         <p:spPr>
           <a:xfrm>
             <a:off x="1005840" y="2615184"/>
-            <a:ext cx="8861592" cy="320040"/>
+            <a:ext cx="8917986" cy="320040"/>
           </a:xfrm>
           <a:prstGeom prst="rect">
             <a:avLst/>
@@ -8956,7 +8956,7 @@
                 </a:solidFill>
                 <a:latin typeface="Segoe UI"/>
               </a:rPr>
-              <a:t>Built 162</a:t>
+              <a:t>Built 163</a:t>
             </a:r>
           </a:p>
         </p:txBody>
@@ -8969,8 +8969,8 @@
         </p:nvSpPr>
         <p:spPr>
           <a:xfrm>
-            <a:off x="9958872" y="2468880"/>
-            <a:ext cx="169183" cy="548640"/>
+            <a:off x="10015266" y="2468880"/>
+            <a:ext cx="225578" cy="548640"/>
           </a:xfrm>
           <a:prstGeom prst="rect">
             <a:avLst/>
@@ -9013,8 +9013,8 @@
         </p:nvSpPr>
         <p:spPr>
           <a:xfrm>
-            <a:off x="10128055" y="2468880"/>
-            <a:ext cx="1184284" cy="548640"/>
+            <a:off x="10240844" y="2468880"/>
+            <a:ext cx="1071495" cy="548640"/>
           </a:xfrm>
           <a:prstGeom prst="rect">
             <a:avLst/>
@@ -9057,8 +9057,8 @@
         </p:nvSpPr>
         <p:spPr>
           <a:xfrm>
-            <a:off x="10310935" y="2615184"/>
-            <a:ext cx="909964" cy="320040"/>
+            <a:off x="10423724" y="2615184"/>
+            <a:ext cx="797175" cy="320040"/>
           </a:xfrm>
           <a:prstGeom prst="rect">
             <a:avLst/>
@@ -9083,7 +9083,7 @@
                 </a:solidFill>
                 <a:latin typeface="Segoe UI"/>
               </a:rPr>
-              <a:t>Missing 21</a:t>
+              <a:t>Missing 19</a:t>
             </a:r>
           </a:p>
         </p:txBody>
@@ -11797,7 +11797,7 @@
                 </a:solidFill>
                 <a:latin typeface="Georgia"/>
               </a:rPr>
-              <a:t>32</a:t>
+              <a:t>33</a:t>
             </a:r>
           </a:p>
         </p:txBody>
@@ -11836,7 +11836,7 @@
                 </a:solidFill>
                 <a:latin typeface="Segoe UI"/>
               </a:rPr>
-              <a:t>Card payment through a provider</a:t>
+              <a:t>Data in, data out</a:t>
             </a:r>
           </a:p>
         </p:txBody>
@@ -11875,7 +11875,7 @@
                 </a:solidFill>
                 <a:latin typeface="Segoe UI"/>
               </a:rPr>
-              <a:t>A provider seam with a stub that behaves like the real one, a "Pay now" in the portal, failed payments as a state, and reconciliation that names the difference.</a:t>
+              <a:t>CSV import with mapping, validation and a report of what did not go in; export of everything a workshop owns.</a:t>
             </a:r>
           </a:p>
         </p:txBody>
@@ -11958,7 +11958,7 @@
                 </a:solidFill>
                 <a:latin typeface="Georgia"/>
               </a:rPr>
-              <a:t>33</a:t>
+              <a:t>34</a:t>
             </a:r>
           </a:p>
         </p:txBody>
@@ -11997,7 +11997,7 @@
                 </a:solidFill>
                 <a:latin typeface="Segoe UI"/>
               </a:rPr>
-              <a:t>Data in, data out</a:t>
+              <a:t>The workflow, as one thing</a:t>
             </a:r>
           </a:p>
         </p:txBody>
@@ -12036,7 +12036,7 @@
                 </a:solidFill>
                 <a:latin typeface="Segoe UI"/>
               </a:rPr>
-              <a:t>CSV import with mapping, validation and a report of what did not go in; export of everything a workshop owns.</a:t>
+              <a:t>An approved estimate becomes a job in one press; extra work is quoted and approved without leaving the job.</a:t>
             </a:r>
           </a:p>
         </p:txBody>
@@ -12119,7 +12119,7 @@
                 </a:solidFill>
                 <a:latin typeface="Georgia"/>
               </a:rPr>
-              <a:t>34</a:t>
+              <a:t>35</a:t>
             </a:r>
           </a:p>
         </p:txBody>
@@ -12158,7 +12158,7 @@
                 </a:solidFill>
                 <a:latin typeface="Segoe UI"/>
               </a:rPr>
-              <a:t>The workflow, as one thing</a:t>
+              <a:t>Arrival and departure</a:t>
             </a:r>
           </a:p>
         </p:txBody>
@@ -12197,7 +12197,7 @@
                 </a:solidFill>
                 <a:latin typeface="Segoe UI"/>
               </a:rPr>
-              <a:t>An approved estimate becomes a job in one press; extra work is quoted and approved without leaving the job.</a:t>
+              <a:t>Check-in and check-out, signatures on the record, key tags.</a:t>
             </a:r>
           </a:p>
         </p:txBody>
@@ -12280,7 +12280,7 @@
                 </a:solidFill>
                 <a:latin typeface="Georgia"/>
               </a:rPr>
-              <a:t>35</a:t>
+              <a:t>36</a:t>
             </a:r>
           </a:p>
         </p:txBody>
@@ -12319,7 +12319,7 @@
                 </a:solidFill>
                 <a:latin typeface="Segoe UI"/>
               </a:rPr>
-              <a:t>Arrival and departure</a:t>
+              <a:t>Conversations</a:t>
             </a:r>
           </a:p>
         </p:txBody>
@@ -12358,7 +12358,7 @@
                 </a:solidFill>
                 <a:latin typeface="Segoe UI"/>
               </a:rPr>
-              <a:t>Check-in and check-out, signatures on the record, key tags.</a:t>
+              <a:t>One thread per customer across email, SMS and WhatsApp, on the job it is about; a payment link in a message.</a:t>
             </a:r>
           </a:p>
         </p:txBody>
@@ -12441,7 +12441,7 @@
                 </a:solidFill>
                 <a:latin typeface="Georgia"/>
               </a:rPr>
-              <a:t>36</a:t>
+              <a:t>37</a:t>
             </a:r>
           </a:p>
         </p:txBody>
@@ -12480,7 +12480,7 @@
                 </a:solidFill>
                 <a:latin typeface="Segoe UI"/>
               </a:rPr>
-              <a:t>Conversations</a:t>
+              <a:t>Packages and templates</a:t>
             </a:r>
           </a:p>
         </p:txBody>
@@ -12519,7 +12519,7 @@
                 </a:solidFill>
                 <a:latin typeface="Segoe UI"/>
               </a:rPr>
-              <a:t>One thread per customer across email, SMS and WhatsApp, on the job it is about.</a:t>
+              <a:t>Service packages priced as one thing; job templates that put the right lines on from the start.</a:t>
             </a:r>
           </a:p>
         </p:txBody>
@@ -12602,7 +12602,7 @@
                 </a:solidFill>
                 <a:latin typeface="Georgia"/>
               </a:rPr>
-              <a:t>37</a:t>
+              <a:t>38</a:t>
             </a:r>
           </a:p>
         </p:txBody>
@@ -12641,7 +12641,7 @@
                 </a:solidFill>
                 <a:latin typeface="Segoe UI"/>
               </a:rPr>
-              <a:t>Packages and templates</a:t>
+              <a:t>Parts back, work out</a:t>
             </a:r>
           </a:p>
         </p:txBody>
@@ -12680,7 +12680,7 @@
                 </a:solidFill>
                 <a:latin typeface="Segoe UI"/>
               </a:rPr>
-              <a:t>Service packages priced as one thing; job templates that put the right lines on from the start.</a:t>
+              <a:t>Returns and cores to the supplier; sublet work on the job with its own cost.</a:t>
             </a:r>
           </a:p>
         </p:txBody>

--- a/docs/Carnet-Presentation.pptx
+++ b/docs/Carnet-Presentation.pptx
@@ -7437,7 +7437,7 @@
                 </a:solidFill>
                 <a:latin typeface="Georgia"/>
               </a:rPr>
-              <a:t>102</a:t>
+              <a:t>104</a:t>
             </a:r>
           </a:p>
         </p:txBody>
@@ -8887,7 +8887,7 @@
         <p:spPr>
           <a:xfrm>
             <a:off x="822960" y="2468880"/>
-            <a:ext cx="9192306" cy="548640"/>
+            <a:ext cx="9199505" cy="548640"/>
           </a:xfrm>
           <a:prstGeom prst="rect">
             <a:avLst/>
@@ -8931,7 +8931,7 @@
         <p:spPr>
           <a:xfrm>
             <a:off x="1005840" y="2615184"/>
-            <a:ext cx="8917986" cy="320040"/>
+            <a:ext cx="8925185" cy="320040"/>
           </a:xfrm>
           <a:prstGeom prst="rect">
             <a:avLst/>
@@ -8956,7 +8956,7 @@
                 </a:solidFill>
                 <a:latin typeface="Segoe UI"/>
               </a:rPr>
-              <a:t>Built 163</a:t>
+              <a:t>Built 164</a:t>
             </a:r>
           </a:p>
         </p:txBody>
@@ -8969,8 +8969,8 @@
         </p:nvSpPr>
         <p:spPr>
           <a:xfrm>
-            <a:off x="10015266" y="2468880"/>
-            <a:ext cx="225578" cy="548640"/>
+            <a:off x="10022465" y="2468880"/>
+            <a:ext cx="224378" cy="548640"/>
           </a:xfrm>
           <a:prstGeom prst="rect">
             <a:avLst/>
@@ -9013,8 +9013,8 @@
         </p:nvSpPr>
         <p:spPr>
           <a:xfrm>
-            <a:off x="10240844" y="2468880"/>
-            <a:ext cx="1071495" cy="548640"/>
+            <a:off x="10246843" y="2468880"/>
+            <a:ext cx="1065796" cy="548640"/>
           </a:xfrm>
           <a:prstGeom prst="rect">
             <a:avLst/>
@@ -9057,8 +9057,8 @@
         </p:nvSpPr>
         <p:spPr>
           <a:xfrm>
-            <a:off x="10423724" y="2615184"/>
-            <a:ext cx="797175" cy="320040"/>
+            <a:off x="10429723" y="2615184"/>
+            <a:ext cx="791476" cy="320040"/>
           </a:xfrm>
           <a:prstGeom prst="rect">
             <a:avLst/>

--- a/docs/Carnet-Presentation.pptx
+++ b/docs/Carnet-Presentation.pptx
@@ -7437,7 +7437,7 @@
                 </a:solidFill>
                 <a:latin typeface="Georgia"/>
               </a:rPr>
-              <a:t>104</a:t>
+              <a:t>106</a:t>
             </a:r>
           </a:p>
         </p:txBody>
@@ -8052,7 +8052,7 @@
                 </a:solidFill>
                 <a:latin typeface="Georgia"/>
               </a:rPr>
-              <a:t>43</a:t>
+              <a:t>44</a:t>
             </a:r>
           </a:p>
         </p:txBody>
@@ -8257,7 +8257,7 @@
                 </a:solidFill>
                 <a:latin typeface="Georgia"/>
               </a:rPr>
-              <a:t>498</a:t>
+              <a:t>505</a:t>
             </a:r>
           </a:p>
         </p:txBody>
@@ -8887,7 +8887,7 @@
         <p:spPr>
           <a:xfrm>
             <a:off x="822960" y="2468880"/>
-            <a:ext cx="9199505" cy="548640"/>
+            <a:ext cx="9206628" cy="548640"/>
           </a:xfrm>
           <a:prstGeom prst="rect">
             <a:avLst/>
@@ -8931,7 +8931,7 @@
         <p:spPr>
           <a:xfrm>
             <a:off x="1005840" y="2615184"/>
-            <a:ext cx="8925185" cy="320040"/>
+            <a:ext cx="8932308" cy="320040"/>
           </a:xfrm>
           <a:prstGeom prst="rect">
             <a:avLst/>
@@ -8956,7 +8956,7 @@
                 </a:solidFill>
                 <a:latin typeface="Segoe UI"/>
               </a:rPr>
-              <a:t>Built 164</a:t>
+              <a:t>Built 165</a:t>
             </a:r>
           </a:p>
         </p:txBody>
@@ -8969,8 +8969,8 @@
         </p:nvSpPr>
         <p:spPr>
           <a:xfrm>
-            <a:off x="10022465" y="2468880"/>
-            <a:ext cx="224378" cy="548640"/>
+            <a:off x="10029588" y="2468880"/>
+            <a:ext cx="223191" cy="548640"/>
           </a:xfrm>
           <a:prstGeom prst="rect">
             <a:avLst/>
@@ -9013,8 +9013,8 @@
         </p:nvSpPr>
         <p:spPr>
           <a:xfrm>
-            <a:off x="10246843" y="2468880"/>
-            <a:ext cx="1065796" cy="548640"/>
+            <a:off x="10252779" y="2468880"/>
+            <a:ext cx="1060157" cy="548640"/>
           </a:xfrm>
           <a:prstGeom prst="rect">
             <a:avLst/>
@@ -9057,8 +9057,8 @@
         </p:nvSpPr>
         <p:spPr>
           <a:xfrm>
-            <a:off x="10429723" y="2615184"/>
-            <a:ext cx="791476" cy="320040"/>
+            <a:off x="10435659" y="2615184"/>
+            <a:ext cx="785837" cy="320040"/>
           </a:xfrm>
           <a:prstGeom prst="rect">
             <a:avLst/>
@@ -11452,7 +11452,7 @@
                 </a:solidFill>
                 <a:latin typeface="Segoe UI"/>
               </a:rPr>
-              <a:t>Staff accounts are unlimited on every plan. 30-day trial, no card.</a:t>
+              <a:t>Staff accounts are unlimited on every plan. 14-day trial; the card goes on first and is charged only when the trial ends.</a:t>
             </a:r>
           </a:p>
         </p:txBody>

--- a/docs/Carnet-Presentation.pptx
+++ b/docs/Carnet-Presentation.pptx
@@ -7437,7 +7437,7 @@
                 </a:solidFill>
                 <a:latin typeface="Georgia"/>
               </a:rPr>
-              <a:t>106</a:t>
+              <a:t>107</a:t>
             </a:r>
           </a:p>
         </p:txBody>
@@ -8052,7 +8052,7 @@
                 </a:solidFill>
                 <a:latin typeface="Georgia"/>
               </a:rPr>
-              <a:t>44</a:t>
+              <a:t>45</a:t>
             </a:r>
           </a:p>
         </p:txBody>
@@ -8257,7 +8257,7 @@
                 </a:solidFill>
                 <a:latin typeface="Georgia"/>
               </a:rPr>
-              <a:t>505</a:t>
+              <a:t>508</a:t>
             </a:r>
           </a:p>
         </p:txBody>
@@ -8887,7 +8887,7 @@
         <p:spPr>
           <a:xfrm>
             <a:off x="822960" y="2468880"/>
-            <a:ext cx="9206628" cy="548640"/>
+            <a:ext cx="9220651" cy="548640"/>
           </a:xfrm>
           <a:prstGeom prst="rect">
             <a:avLst/>
@@ -8931,7 +8931,7 @@
         <p:spPr>
           <a:xfrm>
             <a:off x="1005840" y="2615184"/>
-            <a:ext cx="8932308" cy="320040"/>
+            <a:ext cx="8946331" cy="320040"/>
           </a:xfrm>
           <a:prstGeom prst="rect">
             <a:avLst/>
@@ -8956,7 +8956,7 @@
                 </a:solidFill>
                 <a:latin typeface="Segoe UI"/>
               </a:rPr>
-              <a:t>Built 165</a:t>
+              <a:t>Built 167</a:t>
             </a:r>
           </a:p>
         </p:txBody>
@@ -8969,8 +8969,8 @@
         </p:nvSpPr>
         <p:spPr>
           <a:xfrm>
-            <a:off x="10029588" y="2468880"/>
-            <a:ext cx="223191" cy="548640"/>
+            <a:off x="10043611" y="2468880"/>
+            <a:ext cx="220853" cy="548640"/>
           </a:xfrm>
           <a:prstGeom prst="rect">
             <a:avLst/>
@@ -9013,8 +9013,8 @@
         </p:nvSpPr>
         <p:spPr>
           <a:xfrm>
-            <a:off x="10252779" y="2468880"/>
-            <a:ext cx="1060157" cy="548640"/>
+            <a:off x="10264464" y="2468880"/>
+            <a:ext cx="1049056" cy="548640"/>
           </a:xfrm>
           <a:prstGeom prst="rect">
             <a:avLst/>
@@ -9057,8 +9057,8 @@
         </p:nvSpPr>
         <p:spPr>
           <a:xfrm>
-            <a:off x="10435659" y="2615184"/>
-            <a:ext cx="785837" cy="320040"/>
+            <a:off x="10447344" y="2615184"/>
+            <a:ext cx="774736" cy="320040"/>
           </a:xfrm>
           <a:prstGeom prst="rect">
             <a:avLst/>

--- a/docs/Carnet-Presentation.pptx
+++ b/docs/Carnet-Presentation.pptx
@@ -7437,7 +7437,7 @@
                 </a:solidFill>
                 <a:latin typeface="Georgia"/>
               </a:rPr>
-              <a:t>107</a:t>
+              <a:t>109</a:t>
             </a:r>
           </a:p>
         </p:txBody>
@@ -7642,7 +7642,7 @@
                 </a:solidFill>
                 <a:latin typeface="Georgia"/>
               </a:rPr>
-              <a:t>128</a:t>
+              <a:t>129</a:t>
             </a:r>
           </a:p>
         </p:txBody>
@@ -8052,7 +8052,7 @@
                 </a:solidFill>
                 <a:latin typeface="Georgia"/>
               </a:rPr>
-              <a:t>45</a:t>
+              <a:t>46</a:t>
             </a:r>
           </a:p>
         </p:txBody>
@@ -8257,7 +8257,7 @@
                 </a:solidFill>
                 <a:latin typeface="Georgia"/>
               </a:rPr>
-              <a:t>508</a:t>
+              <a:t>514</a:t>
             </a:r>
           </a:p>
         </p:txBody>
@@ -8887,7 +8887,7 @@
         <p:spPr>
           <a:xfrm>
             <a:off x="822960" y="2468880"/>
-            <a:ext cx="9220651" cy="548640"/>
+            <a:ext cx="9331078" cy="548640"/>
           </a:xfrm>
           <a:prstGeom prst="rect">
             <a:avLst/>
@@ -8931,7 +8931,7 @@
         <p:spPr>
           <a:xfrm>
             <a:off x="1005840" y="2615184"/>
-            <a:ext cx="8946331" cy="320040"/>
+            <a:ext cx="9056758" cy="320040"/>
           </a:xfrm>
           <a:prstGeom prst="rect">
             <a:avLst/>
@@ -8956,7 +8956,7 @@
                 </a:solidFill>
                 <a:latin typeface="Segoe UI"/>
               </a:rPr>
-              <a:t>Built 167</a:t>
+              <a:t>Built 169</a:t>
             </a:r>
           </a:p>
         </p:txBody>
@@ -8969,8 +8969,8 @@
         </p:nvSpPr>
         <p:spPr>
           <a:xfrm>
-            <a:off x="10043611" y="2468880"/>
-            <a:ext cx="220853" cy="548640"/>
+            <a:off x="10154038" y="2468880"/>
+            <a:ext cx="165640" cy="548640"/>
           </a:xfrm>
           <a:prstGeom prst="rect">
             <a:avLst/>
@@ -9013,8 +9013,8 @@
         </p:nvSpPr>
         <p:spPr>
           <a:xfrm>
-            <a:off x="10264464" y="2468880"/>
-            <a:ext cx="1049056" cy="548640"/>
+            <a:off x="10319678" y="2468880"/>
+            <a:ext cx="993842" cy="548640"/>
           </a:xfrm>
           <a:prstGeom prst="rect">
             <a:avLst/>
@@ -9057,45 +9057,6 @@
         </p:nvSpPr>
         <p:spPr>
           <a:xfrm>
-            <a:off x="10447344" y="2615184"/>
-            <a:ext cx="774736" cy="320040"/>
-          </a:xfrm>
-          <a:prstGeom prst="rect">
-            <a:avLst/>
-          </a:prstGeom>
-          <a:noFill/>
-        </p:spPr>
-        <p:txBody>
-          <a:bodyPr wrap="square" anchor="t" lIns="0" rIns="0" tIns="0" bIns="0">
-            <a:spAutoFit/>
-          </a:bodyPr>
-          <a:lstStyle/>
-          <a:p>
-            <a:pPr algn="l">
-              <a:lnSpc>
-                <a:spcPct val="115000"/>
-              </a:lnSpc>
-            </a:pPr>
-            <a:r>
-              <a:rPr sz="1300" b="1">
-                <a:solidFill>
-                  <a:srgbClr val="535E60"/>
-                </a:solidFill>
-                <a:latin typeface="Segoe UI"/>
-              </a:rPr>
-              <a:t>Missing 19</a:t>
-            </a:r>
-          </a:p>
-        </p:txBody>
-      </p:sp>
-      <p:sp>
-        <p:nvSpPr>
-          <p:cNvPr id="11" name="TextBox 10"/>
-          <p:cNvSpPr txBox="1"/>
-          <p:nvPr/>
-        </p:nvSpPr>
-        <p:spPr>
-          <a:xfrm>
             <a:off x="822960" y="3246120"/>
             <a:ext cx="10424160" cy="548640"/>
           </a:xfrm>
@@ -9129,7 +9090,7 @@
       </p:sp>
       <p:sp>
         <p:nvSpPr>
-          <p:cNvPr id="12" name="Rectangle 11"/>
+          <p:cNvPr id="11" name="Rectangle 10"/>
           <p:cNvSpPr/>
           <p:nvPr/>
         </p:nvSpPr>
@@ -9173,7 +9134,7 @@
       </p:sp>
       <p:sp>
         <p:nvSpPr>
-          <p:cNvPr id="13" name="TextBox 12"/>
+          <p:cNvPr id="12" name="TextBox 11"/>
           <p:cNvSpPr txBox="1"/>
           <p:nvPr/>
         </p:nvSpPr>
@@ -9221,7 +9182,7 @@
       </p:sp>
       <p:sp>
         <p:nvSpPr>
-          <p:cNvPr id="14" name="Rectangle 13"/>
+          <p:cNvPr id="13" name="Rectangle 12"/>
           <p:cNvSpPr/>
           <p:nvPr/>
         </p:nvSpPr>
@@ -9265,7 +9226,7 @@
       </p:sp>
       <p:sp>
         <p:nvSpPr>
-          <p:cNvPr id="15" name="TextBox 14"/>
+          <p:cNvPr id="14" name="TextBox 13"/>
           <p:cNvSpPr txBox="1"/>
           <p:nvPr/>
         </p:nvSpPr>
@@ -9313,7 +9274,7 @@
       </p:sp>
       <p:sp>
         <p:nvSpPr>
-          <p:cNvPr id="16" name="Rectangle 15"/>
+          <p:cNvPr id="15" name="Rectangle 14"/>
           <p:cNvSpPr/>
           <p:nvPr/>
         </p:nvSpPr>
@@ -9357,7 +9318,7 @@
       </p:sp>
       <p:sp>
         <p:nvSpPr>
-          <p:cNvPr id="17" name="TextBox 16"/>
+          <p:cNvPr id="16" name="TextBox 15"/>
           <p:cNvSpPr txBox="1"/>
           <p:nvPr/>
         </p:nvSpPr>
@@ -9405,7 +9366,7 @@
       </p:sp>
       <p:sp>
         <p:nvSpPr>
-          <p:cNvPr id="18" name="TextBox 17"/>
+          <p:cNvPr id="17" name="TextBox 16"/>
           <p:cNvSpPr txBox="1"/>
           <p:nvPr/>
         </p:nvSpPr>
@@ -9444,7 +9405,7 @@
       </p:sp>
       <p:sp>
         <p:nvSpPr>
-          <p:cNvPr id="19" name="TextBox 18"/>
+          <p:cNvPr id="18" name="TextBox 17"/>
           <p:cNvSpPr txBox="1"/>
           <p:nvPr/>
         </p:nvSpPr>

--- a/docs/Carnet-Presentation.pptx
+++ b/docs/Carnet-Presentation.pptx
@@ -8052,7 +8052,7 @@
                 </a:solidFill>
                 <a:latin typeface="Georgia"/>
               </a:rPr>
-              <a:t>46</a:t>
+              <a:t>47</a:t>
             </a:r>
           </a:p>
         </p:txBody>
@@ -8257,7 +8257,7 @@
                 </a:solidFill>
                 <a:latin typeface="Georgia"/>
               </a:rPr>
-              <a:t>514</a:t>
+              <a:t>520</a:t>
             </a:r>
           </a:p>
         </p:txBody>
@@ -8887,7 +8887,7 @@
         <p:spPr>
           <a:xfrm>
             <a:off x="822960" y="2468880"/>
-            <a:ext cx="9331078" cy="548640"/>
+            <a:ext cx="9368074" cy="548640"/>
           </a:xfrm>
           <a:prstGeom prst="rect">
             <a:avLst/>
@@ -8931,7 +8931,7 @@
         <p:spPr>
           <a:xfrm>
             <a:off x="1005840" y="2615184"/>
-            <a:ext cx="9056758" cy="320040"/>
+            <a:ext cx="9093754" cy="320040"/>
           </a:xfrm>
           <a:prstGeom prst="rect">
             <a:avLst/>
@@ -8956,7 +8956,7 @@
                 </a:solidFill>
                 <a:latin typeface="Segoe UI"/>
               </a:rPr>
-              <a:t>Built 169</a:t>
+              <a:t>Built 175</a:t>
             </a:r>
           </a:p>
         </p:txBody>
@@ -8969,8 +8969,8 @@
         </p:nvSpPr>
         <p:spPr>
           <a:xfrm>
-            <a:off x="10154038" y="2468880"/>
-            <a:ext cx="165640" cy="548640"/>
+            <a:off x="10191034" y="2468880"/>
+            <a:ext cx="160595" cy="548640"/>
           </a:xfrm>
           <a:prstGeom prst="rect">
             <a:avLst/>
@@ -9013,8 +9013,8 @@
         </p:nvSpPr>
         <p:spPr>
           <a:xfrm>
-            <a:off x="10319678" y="2468880"/>
-            <a:ext cx="993842" cy="548640"/>
+            <a:off x="10351629" y="2468880"/>
+            <a:ext cx="963573" cy="548640"/>
           </a:xfrm>
           <a:prstGeom prst="rect">
             <a:avLst/>
@@ -11758,7 +11758,7 @@
                 </a:solidFill>
                 <a:latin typeface="Georgia"/>
               </a:rPr>
-              <a:t>33</a:t>
+              <a:t>34</a:t>
             </a:r>
           </a:p>
         </p:txBody>
@@ -11797,7 +11797,7 @@
                 </a:solidFill>
                 <a:latin typeface="Segoe UI"/>
               </a:rPr>
-              <a:t>Data in, data out</a:t>
+              <a:t>The workflow, as one thing</a:t>
             </a:r>
           </a:p>
         </p:txBody>
@@ -11836,7 +11836,7 @@
                 </a:solidFill>
                 <a:latin typeface="Segoe UI"/>
               </a:rPr>
-              <a:t>CSV import with mapping, validation and a report of what did not go in; export of everything a workshop owns.</a:t>
+              <a:t>Built: a booking becomes a job in one press; an approval puts the work on the job and reserves the parts; extra work quoted mid-job; 37 presses down to 20.</a:t>
             </a:r>
           </a:p>
         </p:txBody>
@@ -11919,7 +11919,7 @@
                 </a:solidFill>
                 <a:latin typeface="Georgia"/>
               </a:rPr>
-              <a:t>34</a:t>
+              <a:t>35</a:t>
             </a:r>
           </a:p>
         </p:txBody>
@@ -11958,7 +11958,7 @@
                 </a:solidFill>
                 <a:latin typeface="Segoe UI"/>
               </a:rPr>
-              <a:t>The workflow, as one thing</a:t>
+              <a:t>Arrival and departure</a:t>
             </a:r>
           </a:p>
         </p:txBody>
@@ -11997,7 +11997,7 @@
                 </a:solidFill>
                 <a:latin typeface="Segoe UI"/>
               </a:rPr>
-              <a:t>An approved estimate becomes a job in one press; extra work is quoted and approved without leaving the job.</a:t>
+              <a:t>Check-in and check-out, signatures on the record, key tags.</a:t>
             </a:r>
           </a:p>
         </p:txBody>
@@ -12080,7 +12080,7 @@
                 </a:solidFill>
                 <a:latin typeface="Georgia"/>
               </a:rPr>
-              <a:t>35</a:t>
+              <a:t>36</a:t>
             </a:r>
           </a:p>
         </p:txBody>
@@ -12119,7 +12119,7 @@
                 </a:solidFill>
                 <a:latin typeface="Segoe UI"/>
               </a:rPr>
-              <a:t>Arrival and departure</a:t>
+              <a:t>Conversations</a:t>
             </a:r>
           </a:p>
         </p:txBody>
@@ -12158,7 +12158,7 @@
                 </a:solidFill>
                 <a:latin typeface="Segoe UI"/>
               </a:rPr>
-              <a:t>Check-in and check-out, signatures on the record, key tags.</a:t>
+              <a:t>One thread per customer across email, SMS and WhatsApp, on the job it is about; a payment link in a message.</a:t>
             </a:r>
           </a:p>
         </p:txBody>
@@ -12241,7 +12241,7 @@
                 </a:solidFill>
                 <a:latin typeface="Georgia"/>
               </a:rPr>
-              <a:t>36</a:t>
+              <a:t>37</a:t>
             </a:r>
           </a:p>
         </p:txBody>
@@ -12280,7 +12280,7 @@
                 </a:solidFill>
                 <a:latin typeface="Segoe UI"/>
               </a:rPr>
-              <a:t>Conversations</a:t>
+              <a:t>Packages and templates</a:t>
             </a:r>
           </a:p>
         </p:txBody>
@@ -12319,7 +12319,7 @@
                 </a:solidFill>
                 <a:latin typeface="Segoe UI"/>
               </a:rPr>
-              <a:t>One thread per customer across email, SMS and WhatsApp, on the job it is about; a payment link in a message.</a:t>
+              <a:t>Service packages priced as one thing; job templates that put the right lines on from the start.</a:t>
             </a:r>
           </a:p>
         </p:txBody>
@@ -12402,7 +12402,7 @@
                 </a:solidFill>
                 <a:latin typeface="Georgia"/>
               </a:rPr>
-              <a:t>37</a:t>
+              <a:t>38</a:t>
             </a:r>
           </a:p>
         </p:txBody>
@@ -12441,7 +12441,7 @@
                 </a:solidFill>
                 <a:latin typeface="Segoe UI"/>
               </a:rPr>
-              <a:t>Packages and templates</a:t>
+              <a:t>Parts back, work out</a:t>
             </a:r>
           </a:p>
         </p:txBody>
@@ -12480,7 +12480,7 @@
                 </a:solidFill>
                 <a:latin typeface="Segoe UI"/>
               </a:rPr>
-              <a:t>Service packages priced as one thing; job templates that put the right lines on from the start.</a:t>
+              <a:t>Returns and cores to the supplier; sublet work on the job with its own cost.</a:t>
             </a:r>
           </a:p>
         </p:txBody>
@@ -12563,7 +12563,7 @@
                 </a:solidFill>
                 <a:latin typeface="Georgia"/>
               </a:rPr>
-              <a:t>38</a:t>
+              <a:t>39</a:t>
             </a:r>
           </a:p>
         </p:txBody>
@@ -12602,7 +12602,7 @@
                 </a:solidFill>
                 <a:latin typeface="Segoe UI"/>
               </a:rPr>
-              <a:t>Parts back, work out</a:t>
+              <a:t>Finding anything</a:t>
             </a:r>
           </a:p>
         </p:txBody>
@@ -12641,7 +12641,7 @@
                 </a:solidFill>
                 <a:latin typeface="Segoe UI"/>
               </a:rPr>
-              <a:t>Returns and cores to the supplier; sublet work on the job with its own cost.</a:t>
+              <a:t>One search box for a plate, a name, a part, an invoice number.</a:t>
             </a:r>
           </a:p>
         </p:txBody>

--- a/docs/Carnet-Presentation.pptx
+++ b/docs/Carnet-Presentation.pptx
@@ -7437,7 +7437,7 @@
                 </a:solidFill>
                 <a:latin typeface="Georgia"/>
               </a:rPr>
-              <a:t>109</a:t>
+              <a:t>111</a:t>
             </a:r>
           </a:p>
         </p:txBody>
@@ -7642,7 +7642,7 @@
                 </a:solidFill>
                 <a:latin typeface="Georgia"/>
               </a:rPr>
-              <a:t>129</a:t>
+              <a:t>132</a:t>
             </a:r>
           </a:p>
         </p:txBody>
@@ -8052,7 +8052,7 @@
                 </a:solidFill>
                 <a:latin typeface="Georgia"/>
               </a:rPr>
-              <a:t>47</a:t>
+              <a:t>48</a:t>
             </a:r>
           </a:p>
         </p:txBody>
@@ -8257,7 +8257,7 @@
                 </a:solidFill>
                 <a:latin typeface="Georgia"/>
               </a:rPr>
-              <a:t>520</a:t>
+              <a:t>527</a:t>
             </a:r>
           </a:p>
         </p:txBody>
@@ -8887,7 +8887,7 @@
         <p:spPr>
           <a:xfrm>
             <a:off x="822960" y="2468880"/>
-            <a:ext cx="9368074" cy="548640"/>
+            <a:ext cx="9631090" cy="548640"/>
           </a:xfrm>
           <a:prstGeom prst="rect">
             <a:avLst/>
@@ -8931,7 +8931,7 @@
         <p:spPr>
           <a:xfrm>
             <a:off x="1005840" y="2615184"/>
-            <a:ext cx="9093754" cy="320040"/>
+            <a:ext cx="9356770" cy="320040"/>
           </a:xfrm>
           <a:prstGeom prst="rect">
             <a:avLst/>
@@ -8956,7 +8956,7 @@
                 </a:solidFill>
                 <a:latin typeface="Segoe UI"/>
               </a:rPr>
-              <a:t>Built 175</a:t>
+              <a:t>Built 179</a:t>
             </a:r>
           </a:p>
         </p:txBody>
@@ -8969,8 +8969,8 @@
         </p:nvSpPr>
         <p:spPr>
           <a:xfrm>
-            <a:off x="10191034" y="2468880"/>
-            <a:ext cx="160595" cy="548640"/>
+            <a:off x="10454050" y="2468880"/>
+            <a:ext cx="161414" cy="548640"/>
           </a:xfrm>
           <a:prstGeom prst="rect">
             <a:avLst/>
@@ -9013,8 +9013,8 @@
         </p:nvSpPr>
         <p:spPr>
           <a:xfrm>
-            <a:off x="10351629" y="2468880"/>
-            <a:ext cx="963573" cy="548640"/>
+            <a:off x="10615464" y="2468880"/>
+            <a:ext cx="699464" cy="548640"/>
           </a:xfrm>
           <a:prstGeom prst="rect">
             <a:avLst/>
@@ -11997,7 +11997,7 @@
                 </a:solidFill>
                 <a:latin typeface="Segoe UI"/>
               </a:rPr>
-              <a:t>Check-in and check-out, signatures on the record, key tags.</a:t>
+              <a:t>Built: the car checked in and handed back against a signed record of what it was like; keys as events; a car cannot leave owing money without a reason.</a:t>
             </a:r>
           </a:p>
         </p:txBody>

--- a/docs/Carnet-Presentation.pptx
+++ b/docs/Carnet-Presentation.pptx
@@ -7642,7 +7642,7 @@
                 </a:solidFill>
                 <a:latin typeface="Georgia"/>
               </a:rPr>
-              <a:t>132</a:t>
+              <a:t>135</a:t>
             </a:r>
           </a:p>
         </p:txBody>
@@ -8052,7 +8052,7 @@
                 </a:solidFill>
                 <a:latin typeface="Georgia"/>
               </a:rPr>
-              <a:t>48</a:t>
+              <a:t>49</a:t>
             </a:r>
           </a:p>
         </p:txBody>
@@ -8257,7 +8257,7 @@
                 </a:solidFill>
                 <a:latin typeface="Georgia"/>
               </a:rPr>
-              <a:t>527</a:t>
+              <a:t>534</a:t>
             </a:r>
           </a:p>
         </p:txBody>
@@ -8887,7 +8887,7 @@
         <p:spPr>
           <a:xfrm>
             <a:off x="822960" y="2468880"/>
-            <a:ext cx="9631090" cy="548640"/>
+            <a:ext cx="9766530" cy="548640"/>
           </a:xfrm>
           <a:prstGeom prst="rect">
             <a:avLst/>
@@ -8931,7 +8931,7 @@
         <p:spPr>
           <a:xfrm>
             <a:off x="1005840" y="2615184"/>
-            <a:ext cx="9356770" cy="320040"/>
+            <a:ext cx="9492210" cy="320040"/>
           </a:xfrm>
           <a:prstGeom prst="rect">
             <a:avLst/>
@@ -8956,7 +8956,7 @@
                 </a:solidFill>
                 <a:latin typeface="Segoe UI"/>
               </a:rPr>
-              <a:t>Built 179</a:t>
+              <a:t>Built 188</a:t>
             </a:r>
           </a:p>
         </p:txBody>
@@ -8969,8 +8969,8 @@
         </p:nvSpPr>
         <p:spPr>
           <a:xfrm>
-            <a:off x="10454050" y="2468880"/>
-            <a:ext cx="161414" cy="548640"/>
+            <a:off x="10589490" y="2468880"/>
+            <a:ext cx="103899" cy="548640"/>
           </a:xfrm>
           <a:prstGeom prst="rect">
             <a:avLst/>
@@ -9013,8 +9013,8 @@
         </p:nvSpPr>
         <p:spPr>
           <a:xfrm>
-            <a:off x="10615464" y="2468880"/>
-            <a:ext cx="699464" cy="548640"/>
+            <a:off x="10693389" y="2468880"/>
+            <a:ext cx="623395" cy="548640"/>
           </a:xfrm>
           <a:prstGeom prst="rect">
             <a:avLst/>
@@ -12158,7 +12158,7 @@
                 </a:solidFill>
                 <a:latin typeface="Segoe UI"/>
               </a:rPr>
-              <a:t>One thread per customer across email, SMS and WhatsApp, on the job it is about; a payment link in a message.</a:t>
+              <a:t>Built: one thread per customer and per job over email, text and WhatsApp, answered from the job; templates as sentences; a payment link in one press.</a:t>
             </a:r>
           </a:p>
         </p:txBody>

--- a/docs/Carnet-Presentation.pptx
+++ b/docs/Carnet-Presentation.pptx
@@ -7437,7 +7437,7 @@
                 </a:solidFill>
                 <a:latin typeface="Georgia"/>
               </a:rPr>
-              <a:t>111</a:t>
+              <a:t>112</a:t>
             </a:r>
           </a:p>
         </p:txBody>
@@ -7642,7 +7642,7 @@
                 </a:solidFill>
                 <a:latin typeface="Georgia"/>
               </a:rPr>
-              <a:t>135</a:t>
+              <a:t>138</a:t>
             </a:r>
           </a:p>
         </p:txBody>
@@ -8052,7 +8052,7 @@
                 </a:solidFill>
                 <a:latin typeface="Georgia"/>
               </a:rPr>
-              <a:t>49</a:t>
+              <a:t>50</a:t>
             </a:r>
           </a:p>
         </p:txBody>
@@ -8257,7 +8257,7 @@
                 </a:solidFill>
                 <a:latin typeface="Georgia"/>
               </a:rPr>
-              <a:t>534</a:t>
+              <a:t>539</a:t>
             </a:r>
           </a:p>
         </p:txBody>
@@ -8887,7 +8887,7 @@
         <p:spPr>
           <a:xfrm>
             <a:off x="822960" y="2468880"/>
-            <a:ext cx="9766530" cy="548640"/>
+            <a:ext cx="9800114" cy="548640"/>
           </a:xfrm>
           <a:prstGeom prst="rect">
             <a:avLst/>
@@ -8931,7 +8931,7 @@
         <p:spPr>
           <a:xfrm>
             <a:off x="1005840" y="2615184"/>
-            <a:ext cx="9492210" cy="320040"/>
+            <a:ext cx="9525794" cy="320040"/>
           </a:xfrm>
           <a:prstGeom prst="rect">
             <a:avLst/>
@@ -8956,7 +8956,7 @@
                 </a:solidFill>
                 <a:latin typeface="Segoe UI"/>
               </a:rPr>
-              <a:t>Built 188</a:t>
+              <a:t>Built 184</a:t>
             </a:r>
           </a:p>
         </p:txBody>
@@ -8969,8 +8969,8 @@
         </p:nvSpPr>
         <p:spPr>
           <a:xfrm>
-            <a:off x="10589490" y="2468880"/>
-            <a:ext cx="103899" cy="548640"/>
+            <a:off x="10623074" y="2468880"/>
+            <a:ext cx="106522" cy="548640"/>
           </a:xfrm>
           <a:prstGeom prst="rect">
             <a:avLst/>
@@ -9013,8 +9013,8 @@
         </p:nvSpPr>
         <p:spPr>
           <a:xfrm>
-            <a:off x="10693389" y="2468880"/>
-            <a:ext cx="623395" cy="548640"/>
+            <a:off x="10729596" y="2468880"/>
+            <a:ext cx="585876" cy="548640"/>
           </a:xfrm>
           <a:prstGeom prst="rect">
             <a:avLst/>
@@ -12319,7 +12319,7 @@
                 </a:solidFill>
                 <a:latin typeface="Segoe UI"/>
               </a:rPr>
-              <a:t>Service packages priced as one thing; job templates that put the right lines on from the start.</a:t>
+              <a:t>Built: a package with labour, parts, checklist, time, price and interval; a job from it in one press, at the counter, online or on a job already open.</a:t>
             </a:r>
           </a:p>
         </p:txBody>

--- a/docs/Carnet-Presentation.pptx
+++ b/docs/Carnet-Presentation.pptx
@@ -8052,7 +8052,7 @@
                 </a:solidFill>
                 <a:latin typeface="Georgia"/>
               </a:rPr>
-              <a:t>50</a:t>
+              <a:t>51</a:t>
             </a:r>
           </a:p>
         </p:txBody>
@@ -8257,7 +8257,7 @@
                 </a:solidFill>
                 <a:latin typeface="Georgia"/>
               </a:rPr>
-              <a:t>539</a:t>
+              <a:t>544</a:t>
             </a:r>
           </a:p>
         </p:txBody>
@@ -8887,7 +8887,7 @@
         <p:spPr>
           <a:xfrm>
             <a:off x="822960" y="2468880"/>
-            <a:ext cx="9800114" cy="548640"/>
+            <a:ext cx="9818480" cy="548640"/>
           </a:xfrm>
           <a:prstGeom prst="rect">
             <a:avLst/>
@@ -8931,7 +8931,7 @@
         <p:spPr>
           <a:xfrm>
             <a:off x="1005840" y="2615184"/>
-            <a:ext cx="9525794" cy="320040"/>
+            <a:ext cx="9544160" cy="320040"/>
           </a:xfrm>
           <a:prstGeom prst="rect">
             <a:avLst/>
@@ -8956,7 +8956,7 @@
                 </a:solidFill>
                 <a:latin typeface="Segoe UI"/>
               </a:rPr>
-              <a:t>Built 184</a:t>
+              <a:t>Built 189</a:t>
             </a:r>
           </a:p>
         </p:txBody>
@@ -8969,8 +8969,8 @@
         </p:nvSpPr>
         <p:spPr>
           <a:xfrm>
-            <a:off x="10623074" y="2468880"/>
-            <a:ext cx="106522" cy="548640"/>
+            <a:off x="10641440" y="2468880"/>
+            <a:ext cx="103899" cy="548640"/>
           </a:xfrm>
           <a:prstGeom prst="rect">
             <a:avLst/>
@@ -9013,8 +9013,8 @@
         </p:nvSpPr>
         <p:spPr>
           <a:xfrm>
-            <a:off x="10729596" y="2468880"/>
-            <a:ext cx="585876" cy="548640"/>
+            <a:off x="10745339" y="2468880"/>
+            <a:ext cx="571445" cy="548640"/>
           </a:xfrm>
           <a:prstGeom prst="rect">
             <a:avLst/>
@@ -12402,7 +12402,7 @@
                 </a:solidFill>
                 <a:latin typeface="Georgia"/>
               </a:rPr>
-              <a:t>38</a:t>
+              <a:t>37.5</a:t>
             </a:r>
           </a:p>
         </p:txBody>
@@ -12441,7 +12441,7 @@
                 </a:solidFill>
                 <a:latin typeface="Segoe UI"/>
               </a:rPr>
-              <a:t>Parts back, work out</a:t>
+              <a:t>Languages</a:t>
             </a:r>
           </a:p>
         </p:txBody>
@@ -12480,7 +12480,7 @@
                 </a:solidFill>
                 <a:latin typeface="Segoe UI"/>
               </a:rPr>
-              <a:t>Returns and cores to the supplier; sublet work on the job with its own cost.</a:t>
+              <a:t>Built: English, French and Arabic, the person's choice kept on the account; Arabic right to left; the public site, the portal and the workshop shells.</a:t>
             </a:r>
           </a:p>
         </p:txBody>
@@ -12563,7 +12563,7 @@
                 </a:solidFill>
                 <a:latin typeface="Georgia"/>
               </a:rPr>
-              <a:t>39</a:t>
+              <a:t>38</a:t>
             </a:r>
           </a:p>
         </p:txBody>
@@ -12602,7 +12602,7 @@
                 </a:solidFill>
                 <a:latin typeface="Segoe UI"/>
               </a:rPr>
-              <a:t>Finding anything</a:t>
+              <a:t>Parts back, work out</a:t>
             </a:r>
           </a:p>
         </p:txBody>
@@ -12641,6 +12641,167 @@
                 </a:solidFill>
                 <a:latin typeface="Segoe UI"/>
               </a:rPr>
+              <a:t>Returns and cores to the supplier; sublet work on the job with its own cost.</a:t>
+            </a:r>
+          </a:p>
+        </p:txBody>
+      </p:sp>
+      <p:sp>
+        <p:nvSpPr>
+          <p:cNvPr id="30" name="Rectangle 29"/>
+          <p:cNvSpPr/>
+          <p:nvPr/>
+        </p:nvSpPr>
+        <p:spPr>
+          <a:xfrm>
+            <a:off x="822960" y="6327648"/>
+            <a:ext cx="475488" cy="475488"/>
+          </a:xfrm>
+          <a:prstGeom prst="rect">
+            <a:avLst/>
+          </a:prstGeom>
+          <a:solidFill>
+            <a:srgbClr val="1A4D52"/>
+          </a:solidFill>
+          <a:ln>
+            <a:noFill/>
+          </a:ln>
+          <a:effectLst/>
+        </p:spPr>
+        <p:style>
+          <a:lnRef idx="1">
+            <a:schemeClr val="accent1"/>
+          </a:lnRef>
+          <a:fillRef idx="3">
+            <a:schemeClr val="accent1"/>
+          </a:fillRef>
+          <a:effectRef idx="2">
+            <a:schemeClr val="accent1"/>
+          </a:effectRef>
+          <a:fontRef idx="minor">
+            <a:schemeClr val="lt1"/>
+          </a:fontRef>
+        </p:style>
+        <p:txBody>
+          <a:bodyPr rtlCol="0" anchor="ctr"/>
+          <a:lstStyle/>
+          <a:p>
+            <a:pPr algn="ctr"/>
+          </a:p>
+        </p:txBody>
+      </p:sp>
+      <p:sp>
+        <p:nvSpPr>
+          <p:cNvPr id="31" name="TextBox 30"/>
+          <p:cNvSpPr txBox="1"/>
+          <p:nvPr/>
+        </p:nvSpPr>
+        <p:spPr>
+          <a:xfrm>
+            <a:off x="822960" y="6428232"/>
+            <a:ext cx="475488" cy="310896"/>
+          </a:xfrm>
+          <a:prstGeom prst="rect">
+            <a:avLst/>
+          </a:prstGeom>
+          <a:noFill/>
+        </p:spPr>
+        <p:txBody>
+          <a:bodyPr wrap="square" anchor="t" lIns="0" rIns="0" tIns="0" bIns="0">
+            <a:spAutoFit/>
+          </a:bodyPr>
+          <a:lstStyle/>
+          <a:p>
+            <a:pPr algn="ctr">
+              <a:lnSpc>
+                <a:spcPct val="115000"/>
+              </a:lnSpc>
+            </a:pPr>
+            <a:r>
+              <a:rPr sz="1500" b="1">
+                <a:solidFill>
+                  <a:srgbClr val="FFFFFF"/>
+                </a:solidFill>
+                <a:latin typeface="Georgia"/>
+              </a:rPr>
+              <a:t>39</a:t>
+            </a:r>
+          </a:p>
+        </p:txBody>
+      </p:sp>
+      <p:sp>
+        <p:nvSpPr>
+          <p:cNvPr id="32" name="TextBox 31"/>
+          <p:cNvSpPr txBox="1"/>
+          <p:nvPr/>
+        </p:nvSpPr>
+        <p:spPr>
+          <a:xfrm>
+            <a:off x="1508760" y="6345936"/>
+            <a:ext cx="3291840" cy="310896"/>
+          </a:xfrm>
+          <a:prstGeom prst="rect">
+            <a:avLst/>
+          </a:prstGeom>
+          <a:noFill/>
+        </p:spPr>
+        <p:txBody>
+          <a:bodyPr wrap="square" anchor="t" lIns="0" rIns="0" tIns="0" bIns="0">
+            <a:spAutoFit/>
+          </a:bodyPr>
+          <a:lstStyle/>
+          <a:p>
+            <a:pPr algn="l">
+              <a:lnSpc>
+                <a:spcPct val="115000"/>
+              </a:lnSpc>
+            </a:pPr>
+            <a:r>
+              <a:rPr sz="1500" b="1">
+                <a:solidFill>
+                  <a:srgbClr val="161A1B"/>
+                </a:solidFill>
+                <a:latin typeface="Segoe UI"/>
+              </a:rPr>
+              <a:t>Finding anything</a:t>
+            </a:r>
+          </a:p>
+        </p:txBody>
+      </p:sp>
+      <p:sp>
+        <p:nvSpPr>
+          <p:cNvPr id="33" name="TextBox 32"/>
+          <p:cNvSpPr txBox="1"/>
+          <p:nvPr/>
+        </p:nvSpPr>
+        <p:spPr>
+          <a:xfrm>
+            <a:off x="4892040" y="6364224"/>
+            <a:ext cx="6309360" cy="548640"/>
+          </a:xfrm>
+          <a:prstGeom prst="rect">
+            <a:avLst/>
+          </a:prstGeom>
+          <a:noFill/>
+        </p:spPr>
+        <p:txBody>
+          <a:bodyPr wrap="square" anchor="t" lIns="0" rIns="0" tIns="0" bIns="0">
+            <a:spAutoFit/>
+          </a:bodyPr>
+          <a:lstStyle/>
+          <a:p>
+            <a:pPr algn="l">
+              <a:lnSpc>
+                <a:spcPct val="125000"/>
+              </a:lnSpc>
+            </a:pPr>
+            <a:r>
+              <a:rPr sz="1200" b="0">
+                <a:solidFill>
+                  <a:srgbClr val="535E60"/>
+                </a:solidFill>
+                <a:latin typeface="Segoe UI"/>
+              </a:rPr>
               <a:t>One search box for a plate, a name, a part, an invoice number.</a:t>
             </a:r>
           </a:p>
@@ -12648,7 +12809,7 @@
       </p:sp>
       <p:sp>
         <p:nvSpPr>
-          <p:cNvPr id="30" name="TextBox 29"/>
+          <p:cNvPr id="34" name="TextBox 33"/>
           <p:cNvSpPr txBox="1"/>
           <p:nvPr/>
         </p:nvSpPr>
@@ -12687,7 +12848,7 @@
       </p:sp>
       <p:sp>
         <p:nvSpPr>
-          <p:cNvPr id="31" name="TextBox 30"/>
+          <p:cNvPr id="35" name="TextBox 34"/>
           <p:cNvSpPr txBox="1"/>
           <p:nvPr/>
         </p:nvSpPr>

--- a/docs/Carnet-Presentation.pptx
+++ b/docs/Carnet-Presentation.pptx
@@ -7437,7 +7437,7 @@
                 </a:solidFill>
                 <a:latin typeface="Georgia"/>
               </a:rPr>
-              <a:t>112</a:t>
+              <a:t>113</a:t>
             </a:r>
           </a:p>
         </p:txBody>
@@ -7642,7 +7642,7 @@
                 </a:solidFill>
                 <a:latin typeface="Georgia"/>
               </a:rPr>
-              <a:t>138</a:t>
+              <a:t>142</a:t>
             </a:r>
           </a:p>
         </p:txBody>
@@ -8052,7 +8052,7 @@
                 </a:solidFill>
                 <a:latin typeface="Georgia"/>
               </a:rPr>
-              <a:t>51</a:t>
+              <a:t>52</a:t>
             </a:r>
           </a:p>
         </p:txBody>
@@ -8257,7 +8257,7 @@
                 </a:solidFill>
                 <a:latin typeface="Georgia"/>
               </a:rPr>
-              <a:t>544</a:t>
+              <a:t>551</a:t>
             </a:r>
           </a:p>
         </p:txBody>
@@ -8887,7 +8887,7 @@
         <p:spPr>
           <a:xfrm>
             <a:off x="822960" y="2468880"/>
-            <a:ext cx="9818480" cy="548640"/>
+            <a:ext cx="9928461" cy="548640"/>
           </a:xfrm>
           <a:prstGeom prst="rect">
             <a:avLst/>
@@ -8931,7 +8931,7 @@
         <p:spPr>
           <a:xfrm>
             <a:off x="1005840" y="2615184"/>
-            <a:ext cx="9544160" cy="320040"/>
+            <a:ext cx="9654141" cy="320040"/>
           </a:xfrm>
           <a:prstGeom prst="rect">
             <a:avLst/>
@@ -8956,7 +8956,7 @@
                 </a:solidFill>
                 <a:latin typeface="Segoe UI"/>
               </a:rPr>
-              <a:t>Built 189</a:t>
+              <a:t>Built 193</a:t>
             </a:r>
           </a:p>
         </p:txBody>
@@ -8969,8 +8969,8 @@
         </p:nvSpPr>
         <p:spPr>
           <a:xfrm>
-            <a:off x="10641440" y="2468880"/>
-            <a:ext cx="103899" cy="548640"/>
+            <a:off x="10751421" y="2468880"/>
+            <a:ext cx="102885" cy="548640"/>
           </a:xfrm>
           <a:prstGeom prst="rect">
             <a:avLst/>
@@ -9013,8 +9013,8 @@
         </p:nvSpPr>
         <p:spPr>
           <a:xfrm>
-            <a:off x="10745339" y="2468880"/>
-            <a:ext cx="571445" cy="548640"/>
+            <a:off x="10854306" y="2468880"/>
+            <a:ext cx="462985" cy="548640"/>
           </a:xfrm>
           <a:prstGeom prst="rect">
             <a:avLst/>
@@ -12641,7 +12641,7 @@
                 </a:solidFill>
                 <a:latin typeface="Segoe UI"/>
               </a:rPr>
-              <a:t>Returns and cores to the supplier; sublet work on the job with its own cost.</a:t>
+              <a:t>Built: returns and cores credited against what the supplier is owed, oldest bill first; sublet work on the job at its real cost.</a:t>
             </a:r>
           </a:p>
         </p:txBody>

--- a/docs/Carnet-Presentation.pptx
+++ b/docs/Carnet-Presentation.pptx
@@ -7437,7 +7437,7 @@
                 </a:solidFill>
                 <a:latin typeface="Georgia"/>
               </a:rPr>
-              <a:t>113</a:t>
+              <a:t>115</a:t>
             </a:r>
           </a:p>
         </p:txBody>
@@ -7642,7 +7642,7 @@
                 </a:solidFill>
                 <a:latin typeface="Georgia"/>
               </a:rPr>
-              <a:t>142</a:t>
+              <a:t>143</a:t>
             </a:r>
           </a:p>
         </p:txBody>
@@ -8052,7 +8052,7 @@
                 </a:solidFill>
                 <a:latin typeface="Georgia"/>
               </a:rPr>
-              <a:t>52</a:t>
+              <a:t>53</a:t>
             </a:r>
           </a:p>
         </p:txBody>
@@ -8257,7 +8257,7 @@
                 </a:solidFill>
                 <a:latin typeface="Georgia"/>
               </a:rPr>
-              <a:t>551</a:t>
+              <a:t>556</a:t>
             </a:r>
           </a:p>
         </p:txBody>
@@ -8887,7 +8887,7 @@
         <p:spPr>
           <a:xfrm>
             <a:off x="822960" y="2468880"/>
-            <a:ext cx="9928461" cy="548640"/>
+            <a:ext cx="10031346" cy="548640"/>
           </a:xfrm>
           <a:prstGeom prst="rect">
             <a:avLst/>
@@ -8931,7 +8931,7 @@
         <p:spPr>
           <a:xfrm>
             <a:off x="1005840" y="2615184"/>
-            <a:ext cx="9654141" cy="320040"/>
+            <a:ext cx="9757026" cy="320040"/>
           </a:xfrm>
           <a:prstGeom prst="rect">
             <a:avLst/>
@@ -8956,7 +8956,7 @@
                 </a:solidFill>
                 <a:latin typeface="Segoe UI"/>
               </a:rPr>
-              <a:t>Built 193</a:t>
+              <a:t>Built 195</a:t>
             </a:r>
           </a:p>
         </p:txBody>
@@ -8969,7 +8969,7 @@
         </p:nvSpPr>
         <p:spPr>
           <a:xfrm>
-            <a:off x="10751421" y="2468880"/>
+            <a:off x="10854306" y="2468880"/>
             <a:ext cx="102885" cy="548640"/>
           </a:xfrm>
           <a:prstGeom prst="rect">
@@ -9013,8 +9013,8 @@
         </p:nvSpPr>
         <p:spPr>
           <a:xfrm>
-            <a:off x="10854306" y="2468880"/>
-            <a:ext cx="462985" cy="548640"/>
+            <a:off x="10957191" y="2468880"/>
+            <a:ext cx="360099" cy="548640"/>
           </a:xfrm>
           <a:prstGeom prst="rect">
             <a:avLst/>
@@ -12802,7 +12802,7 @@
                 </a:solidFill>
                 <a:latin typeface="Segoe UI"/>
               </a:rPr>
-              <a:t>One search box for a plate, a name, a part, an invoice number.</a:t>
+              <a:t>Built: one box for a plate however typed, a VIN, a phone number, a job, an invoice or a part, straight to the record; notifications for staff.</a:t>
             </a:r>
           </a:p>
         </p:txBody>

--- a/docs/Carnet-Presentation.pptx
+++ b/docs/Carnet-Presentation.pptx
@@ -8052,7 +8052,7 @@
                 </a:solidFill>
                 <a:latin typeface="Georgia"/>
               </a:rPr>
-              <a:t>53</a:t>
+              <a:t>54</a:t>
             </a:r>
           </a:p>
         </p:txBody>
@@ -8257,7 +8257,7 @@
                 </a:solidFill>
                 <a:latin typeface="Georgia"/>
               </a:rPr>
-              <a:t>556</a:t>
+              <a:t>562</a:t>
             </a:r>
           </a:p>
         </p:txBody>
@@ -8887,7 +8887,7 @@
         <p:spPr>
           <a:xfrm>
             <a:off x="822960" y="2468880"/>
-            <a:ext cx="10031346" cy="548640"/>
+            <a:ext cx="10043595" cy="548640"/>
           </a:xfrm>
           <a:prstGeom prst="rect">
             <a:avLst/>
@@ -8931,7 +8931,7 @@
         <p:spPr>
           <a:xfrm>
             <a:off x="1005840" y="2615184"/>
-            <a:ext cx="9757026" cy="320040"/>
+            <a:ext cx="9769275" cy="320040"/>
           </a:xfrm>
           <a:prstGeom prst="rect">
             <a:avLst/>
@@ -8956,7 +8956,7 @@
                 </a:solidFill>
                 <a:latin typeface="Segoe UI"/>
               </a:rPr>
-              <a:t>Built 195</a:t>
+              <a:t>Built 200</a:t>
             </a:r>
           </a:p>
         </p:txBody>
@@ -8969,8 +8969,8 @@
         </p:nvSpPr>
         <p:spPr>
           <a:xfrm>
-            <a:off x="10854306" y="2468880"/>
-            <a:ext cx="102885" cy="548640"/>
+            <a:off x="10866555" y="2468880"/>
+            <a:ext cx="100435" cy="548640"/>
           </a:xfrm>
           <a:prstGeom prst="rect">
             <a:avLst/>
@@ -9013,8 +9013,8 @@
         </p:nvSpPr>
         <p:spPr>
           <a:xfrm>
-            <a:off x="10957191" y="2468880"/>
-            <a:ext cx="360099" cy="548640"/>
+            <a:off x="10966990" y="2468880"/>
+            <a:ext cx="351525" cy="548640"/>
           </a:xfrm>
           <a:prstGeom prst="rect">
             <a:avLst/>
@@ -11758,7 +11758,7 @@
                 </a:solidFill>
                 <a:latin typeface="Georgia"/>
               </a:rPr>
-              <a:t>34</a:t>
+              <a:t>39</a:t>
             </a:r>
           </a:p>
         </p:txBody>
@@ -11797,7 +11797,7 @@
                 </a:solidFill>
                 <a:latin typeface="Segoe UI"/>
               </a:rPr>
-              <a:t>The workflow, as one thing</a:t>
+              <a:t>Finding anything</a:t>
             </a:r>
           </a:p>
         </p:txBody>
@@ -11836,7 +11836,7 @@
                 </a:solidFill>
                 <a:latin typeface="Segoe UI"/>
               </a:rPr>
-              <a:t>Built: a booking becomes a job in one press; an approval puts the work on the job and reserves the parts; extra work quoted mid-job; 37 presses down to 20.</a:t>
+              <a:t>Built: one box for a plate however typed, a VIN, a phone number, a job, an invoice or a part, straight to the record; notifications for staff.</a:t>
             </a:r>
           </a:p>
         </p:txBody>
@@ -11919,7 +11919,7 @@
                 </a:solidFill>
                 <a:latin typeface="Georgia"/>
               </a:rPr>
-              <a:t>35</a:t>
+              <a:t>40</a:t>
             </a:r>
           </a:p>
         </p:txBody>
@@ -11958,7 +11958,7 @@
                 </a:solidFill>
                 <a:latin typeface="Segoe UI"/>
               </a:rPr>
-              <a:t>Arrival and departure</a:t>
+              <a:t>The owner's day, sharpened</a:t>
             </a:r>
           </a:p>
         </p:txBody>
@@ -11997,7 +11997,7 @@
                 </a:solidFill>
                 <a:latin typeface="Segoe UI"/>
               </a:rPr>
-              <a:t>Built: the car checked in and handed back against a signed record of what it was like; keys as events; a car cannot leave owing money without a reason.</a:t>
+              <a:t>Built: the comeback rate by site and person; the reputation trend; suppliers side by side on every part and over the year; the dashboard in three blocks.</a:t>
             </a:r>
           </a:p>
         </p:txBody>
@@ -12080,7 +12080,7 @@
                 </a:solidFill>
                 <a:latin typeface="Georgia"/>
               </a:rPr>
-              <a:t>36</a:t>
+              <a:t>41</a:t>
             </a:r>
           </a:p>
         </p:txBody>
@@ -12119,7 +12119,7 @@
                 </a:solidFill>
                 <a:latin typeface="Segoe UI"/>
               </a:rPr>
-              <a:t>Conversations</a:t>
+              <a:t>Tax, configurable</a:t>
             </a:r>
           </a:p>
         </p:txBody>
@@ -12158,7 +12158,7 @@
                 </a:solidFill>
                 <a:latin typeface="Segoe UI"/>
               </a:rPr>
-              <a:t>Built: one thread per customer and per job over email, text and WhatsApp, answered from the job; templates as sentences; a payment link in one press.</a:t>
+              <a:t>Several taxes on a line, exempt customers, tax by site, inclusive or exclusive prices, a report per tax.</a:t>
             </a:r>
           </a:p>
         </p:txBody>
@@ -12241,7 +12241,7 @@
                 </a:solidFill>
                 <a:latin typeface="Georgia"/>
               </a:rPr>
-              <a:t>37</a:t>
+              <a:t>42</a:t>
             </a:r>
           </a:p>
         </p:txBody>
@@ -12280,7 +12280,7 @@
                 </a:solidFill>
                 <a:latin typeface="Segoe UI"/>
               </a:rPr>
-              <a:t>Packages and templates</a:t>
+              <a:t>Paper</a:t>
             </a:r>
           </a:p>
         </p:txBody>
@@ -12319,7 +12319,7 @@
                 </a:solidFill>
                 <a:latin typeface="Segoe UI"/>
               </a:rPr>
-              <a:t>Built: a package with labour, parts, checklist, time, price and interval; a job from it in one press, at the counter, online or on a job already open.</a:t>
+              <a:t>Print styles for every document; work order, invoice, estimate and inspection as PDF; labels, key tags and QR codes.</a:t>
             </a:r>
           </a:p>
         </p:txBody>
@@ -12402,7 +12402,7 @@
                 </a:solidFill>
                 <a:latin typeface="Georgia"/>
               </a:rPr>
-              <a:t>37.5</a:t>
+              <a:t>43</a:t>
             </a:r>
           </a:p>
         </p:txBody>
@@ -12441,7 +12441,7 @@
                 </a:solidFill>
                 <a:latin typeface="Segoe UI"/>
               </a:rPr>
-              <a:t>Languages</a:t>
+              <a:t>Providers</a:t>
             </a:r>
           </a:p>
         </p:txBody>
@@ -12480,7 +12480,7 @@
                 </a:solidFill>
                 <a:latin typeface="Segoe UI"/>
               </a:rPr>
-              <a:t>Built: English, French and Arabic, the person's choice kept on the account; Arabic right to left; the public site, the portal and the workshop shells.</a:t>
+              <a:t>VIN decoding and a fitment feed behind seams; payroll exported; reviews posted to Google.</a:t>
             </a:r>
           </a:p>
         </p:txBody>
@@ -12563,7 +12563,7 @@
                 </a:solidFill>
                 <a:latin typeface="Georgia"/>
               </a:rPr>
-              <a:t>38</a:t>
+              <a:t>44</a:t>
             </a:r>
           </a:p>
         </p:txBody>
@@ -12602,7 +12602,7 @@
                 </a:solidFill>
                 <a:latin typeface="Segoe UI"/>
               </a:rPr>
-              <a:t>Parts back, work out</a:t>
+              <a:t>Ownership, warranty and sites</a:t>
             </a:r>
           </a:p>
         </p:txBody>
@@ -12641,7 +12641,7 @@
                 </a:solidFill>
                 <a:latin typeface="Segoe UI"/>
               </a:rPr>
-              <a:t>Built: returns and cores credited against what the supplier is owed, oldest bill first; sublet work on the job at its real cost.</a:t>
+              <a:t>A car transferred by invitation with its history; warranty cost and profit; prices and tax per site.</a:t>
             </a:r>
           </a:p>
         </p:txBody>
@@ -12724,7 +12724,7 @@
                 </a:solidFill>
                 <a:latin typeface="Georgia"/>
               </a:rPr>
-              <a:t>39</a:t>
+              <a:t>45</a:t>
             </a:r>
           </a:p>
         </p:txBody>
@@ -12763,7 +12763,7 @@
                 </a:solidFill>
                 <a:latin typeface="Segoe UI"/>
               </a:rPr>
-              <a:t>Finding anything</a:t>
+              <a:t>The first day</a:t>
             </a:r>
           </a:p>
         </p:txBody>
@@ -12802,7 +12802,7 @@
                 </a:solidFill>
                 <a:latin typeface="Segoe UI"/>
               </a:rPr>
-              <a:t>Built: one box for a plate however typed, a VIN, a phone number, a job, an invoice or a part, straight to the record; notifications for staff.</a:t>
+              <a:t>An onboarding checklist, demonstration data, and help inside the product.</a:t>
             </a:r>
           </a:p>
         </p:txBody>

--- a/docs/Carnet-Presentation.pptx
+++ b/docs/Carnet-Presentation.pptx
@@ -8257,7 +8257,7 @@
                 </a:solidFill>
                 <a:latin typeface="Georgia"/>
               </a:rPr>
-              <a:t>562</a:t>
+              <a:t>567</a:t>
             </a:r>
           </a:p>
         </p:txBody>
@@ -8887,7 +8887,7 @@
         <p:spPr>
           <a:xfrm>
             <a:off x="822960" y="2468880"/>
-            <a:ext cx="10043595" cy="548640"/>
+            <a:ext cx="10048332" cy="548640"/>
           </a:xfrm>
           <a:prstGeom prst="rect">
             <a:avLst/>
@@ -8931,7 +8931,7 @@
         <p:spPr>
           <a:xfrm>
             <a:off x="1005840" y="2615184"/>
-            <a:ext cx="9769275" cy="320040"/>
+            <a:ext cx="9774012" cy="320040"/>
           </a:xfrm>
           <a:prstGeom prst="rect">
             <a:avLst/>
@@ -8956,7 +8956,7 @@
                 </a:solidFill>
                 <a:latin typeface="Segoe UI"/>
               </a:rPr>
-              <a:t>Built 200</a:t>
+              <a:t>Built 202</a:t>
             </a:r>
           </a:p>
         </p:txBody>
@@ -8969,8 +8969,8 @@
         </p:nvSpPr>
         <p:spPr>
           <a:xfrm>
-            <a:off x="10866555" y="2468880"/>
-            <a:ext cx="100435" cy="548640"/>
+            <a:off x="10871292" y="2468880"/>
+            <a:ext cx="99488" cy="548640"/>
           </a:xfrm>
           <a:prstGeom prst="rect">
             <a:avLst/>
@@ -9013,8 +9013,8 @@
         </p:nvSpPr>
         <p:spPr>
           <a:xfrm>
-            <a:off x="10966990" y="2468880"/>
-            <a:ext cx="351525" cy="548640"/>
+            <a:off x="10970780" y="2468880"/>
+            <a:ext cx="348209" cy="548640"/>
           </a:xfrm>
           <a:prstGeom prst="rect">
             <a:avLst/>
@@ -11758,7 +11758,7 @@
                 </a:solidFill>
                 <a:latin typeface="Georgia"/>
               </a:rPr>
-              <a:t>39</a:t>
+              <a:t>40</a:t>
             </a:r>
           </a:p>
         </p:txBody>
@@ -11797,7 +11797,7 @@
                 </a:solidFill>
                 <a:latin typeface="Segoe UI"/>
               </a:rPr>
-              <a:t>Finding anything</a:t>
+              <a:t>The owner's day, sharpened</a:t>
             </a:r>
           </a:p>
         </p:txBody>
@@ -11836,7 +11836,7 @@
                 </a:solidFill>
                 <a:latin typeface="Segoe UI"/>
               </a:rPr>
-              <a:t>Built: one box for a plate however typed, a VIN, a phone number, a job, an invoice or a part, straight to the record; notifications for staff.</a:t>
+              <a:t>Built: the comeback rate by site and person; the reputation trend; suppliers side by side on every part and over the year; the dashboard in three blocks.</a:t>
             </a:r>
           </a:p>
         </p:txBody>
@@ -11919,7 +11919,7 @@
                 </a:solidFill>
                 <a:latin typeface="Georgia"/>
               </a:rPr>
-              <a:t>40</a:t>
+              <a:t>40.5</a:t>
             </a:r>
           </a:p>
         </p:txBody>
@@ -11958,7 +11958,7 @@
                 </a:solidFill>
                 <a:latin typeface="Segoe UI"/>
               </a:rPr>
-              <a:t>The owner's day, sharpened</a:t>
+              <a:t>Every word translated</a:t>
             </a:r>
           </a:p>
         </p:txBody>
@@ -11997,7 +11997,7 @@
                 </a:solidFill>
                 <a:latin typeface="Segoe UI"/>
               </a:rPr>
-              <a:t>Built: the comeback rate by site and person; the reputation trend; suppliers side by side on every part and over the year; the dashboard in three blocks.</a:t>
+              <a:t>Built: every page, component, page title and refusal in French and Arabic; a scan that fails on any text left outside the translator.</a:t>
             </a:r>
           </a:p>
         </p:txBody>

--- a/docs/Carnet-Presentation.pptx
+++ b/docs/Carnet-Presentation.pptx
@@ -7437,7 +7437,7 @@
                 </a:solidFill>
                 <a:latin typeface="Georgia"/>
               </a:rPr>
-              <a:t>115</a:t>
+              <a:t>116</a:t>
             </a:r>
           </a:p>
         </p:txBody>
@@ -7642,7 +7642,7 @@
                 </a:solidFill>
                 <a:latin typeface="Georgia"/>
               </a:rPr>
-              <a:t>143</a:t>
+              <a:t>145</a:t>
             </a:r>
           </a:p>
         </p:txBody>
@@ -8052,7 +8052,7 @@
                 </a:solidFill>
                 <a:latin typeface="Georgia"/>
               </a:rPr>
-              <a:t>54</a:t>
+              <a:t>55</a:t>
             </a:r>
           </a:p>
         </p:txBody>
@@ -8257,7 +8257,7 @@
                 </a:solidFill>
                 <a:latin typeface="Georgia"/>
               </a:rPr>
-              <a:t>567</a:t>
+              <a:t>574</a:t>
             </a:r>
           </a:p>
         </p:txBody>
@@ -8887,7 +8887,7 @@
         <p:spPr>
           <a:xfrm>
             <a:off x="822960" y="2468880"/>
-            <a:ext cx="10048332" cy="548640"/>
+            <a:ext cx="10100178" cy="548640"/>
           </a:xfrm>
           <a:prstGeom prst="rect">
             <a:avLst/>
@@ -8931,7 +8931,7 @@
         <p:spPr>
           <a:xfrm>
             <a:off x="1005840" y="2615184"/>
-            <a:ext cx="9774012" cy="320040"/>
+            <a:ext cx="9825858" cy="320040"/>
           </a:xfrm>
           <a:prstGeom prst="rect">
             <a:avLst/>
@@ -8956,7 +8956,7 @@
                 </a:solidFill>
                 <a:latin typeface="Segoe UI"/>
               </a:rPr>
-              <a:t>Built 202</a:t>
+              <a:t>Built 204</a:t>
             </a:r>
           </a:p>
         </p:txBody>
@@ -8969,8 +8969,8 @@
         </p:nvSpPr>
         <p:spPr>
           <a:xfrm>
-            <a:off x="10871292" y="2468880"/>
-            <a:ext cx="99488" cy="548640"/>
+            <a:off x="10923138" y="2468880"/>
+            <a:ext cx="99021" cy="548640"/>
           </a:xfrm>
           <a:prstGeom prst="rect">
             <a:avLst/>
@@ -9013,8 +9013,8 @@
         </p:nvSpPr>
         <p:spPr>
           <a:xfrm>
-            <a:off x="10970780" y="2468880"/>
-            <a:ext cx="348209" cy="548640"/>
+            <a:off x="11022159" y="2468880"/>
+            <a:ext cx="297064" cy="548640"/>
           </a:xfrm>
           <a:prstGeom prst="rect">
             <a:avLst/>
@@ -11758,7 +11758,7 @@
                 </a:solidFill>
                 <a:latin typeface="Georgia"/>
               </a:rPr>
-              <a:t>40</a:t>
+              <a:t>40.5</a:t>
             </a:r>
           </a:p>
         </p:txBody>
@@ -11797,7 +11797,7 @@
                 </a:solidFill>
                 <a:latin typeface="Segoe UI"/>
               </a:rPr>
-              <a:t>The owner's day, sharpened</a:t>
+              <a:t>Every word translated</a:t>
             </a:r>
           </a:p>
         </p:txBody>
@@ -11836,7 +11836,7 @@
                 </a:solidFill>
                 <a:latin typeface="Segoe UI"/>
               </a:rPr>
-              <a:t>Built: the comeback rate by site and person; the reputation trend; suppliers side by side on every part and over the year; the dashboard in three blocks.</a:t>
+              <a:t>Built: every page, component, page title and refusal in French and Arabic; a scan that fails on any text left outside the translator.</a:t>
             </a:r>
           </a:p>
         </p:txBody>
@@ -11919,7 +11919,7 @@
                 </a:solidFill>
                 <a:latin typeface="Georgia"/>
               </a:rPr>
-              <a:t>40.5</a:t>
+              <a:t>41</a:t>
             </a:r>
           </a:p>
         </p:txBody>
@@ -11958,7 +11958,7 @@
                 </a:solidFill>
                 <a:latin typeface="Segoe UI"/>
               </a:rPr>
-              <a:t>Every word translated</a:t>
+              <a:t>Tax, configurable</a:t>
             </a:r>
           </a:p>
         </p:txBody>
@@ -11997,7 +11997,7 @@
                 </a:solidFill>
                 <a:latin typeface="Segoe UI"/>
               </a:rPr>
-              <a:t>Built: every page, component, page title and refusal in French and Arabic; a scan that fails on any text left outside the translator.</a:t>
+              <a:t>Built: several taxes on a rate, prices with tax in, exempt customers, a rate per site, and a report per tax from what each document declared.</a:t>
             </a:r>
           </a:p>
         </p:txBody>
@@ -12080,7 +12080,7 @@
                 </a:solidFill>
                 <a:latin typeface="Georgia"/>
               </a:rPr>
-              <a:t>41</a:t>
+              <a:t>42</a:t>
             </a:r>
           </a:p>
         </p:txBody>
@@ -12119,7 +12119,7 @@
                 </a:solidFill>
                 <a:latin typeface="Segoe UI"/>
               </a:rPr>
-              <a:t>Tax, configurable</a:t>
+              <a:t>Paper</a:t>
             </a:r>
           </a:p>
         </p:txBody>
@@ -12158,7 +12158,7 @@
                 </a:solidFill>
                 <a:latin typeface="Segoe UI"/>
               </a:rPr>
-              <a:t>Several taxes on a line, exempt customers, tax by site, inclusive or exclusive prices, a report per tax.</a:t>
+              <a:t>Print styles for every document; work order, invoice, estimate and inspection as PDF; labels, key tags and QR codes.</a:t>
             </a:r>
           </a:p>
         </p:txBody>
@@ -12241,7 +12241,7 @@
                 </a:solidFill>
                 <a:latin typeface="Georgia"/>
               </a:rPr>
-              <a:t>42</a:t>
+              <a:t>43</a:t>
             </a:r>
           </a:p>
         </p:txBody>
@@ -12280,7 +12280,7 @@
                 </a:solidFill>
                 <a:latin typeface="Segoe UI"/>
               </a:rPr>
-              <a:t>Paper</a:t>
+              <a:t>Providers</a:t>
             </a:r>
           </a:p>
         </p:txBody>
@@ -12319,7 +12319,7 @@
                 </a:solidFill>
                 <a:latin typeface="Segoe UI"/>
               </a:rPr>
-              <a:t>Print styles for every document; work order, invoice, estimate and inspection as PDF; labels, key tags and QR codes.</a:t>
+              <a:t>VIN decoding and a fitment feed behind seams; payroll exported; reviews posted to Google.</a:t>
             </a:r>
           </a:p>
         </p:txBody>
@@ -12402,7 +12402,7 @@
                 </a:solidFill>
                 <a:latin typeface="Georgia"/>
               </a:rPr>
-              <a:t>43</a:t>
+              <a:t>44</a:t>
             </a:r>
           </a:p>
         </p:txBody>
@@ -12441,7 +12441,7 @@
                 </a:solidFill>
                 <a:latin typeface="Segoe UI"/>
               </a:rPr>
-              <a:t>Providers</a:t>
+              <a:t>Ownership, warranty and sites</a:t>
             </a:r>
           </a:p>
         </p:txBody>
@@ -12480,7 +12480,7 @@
                 </a:solidFill>
                 <a:latin typeface="Segoe UI"/>
               </a:rPr>
-              <a:t>VIN decoding and a fitment feed behind seams; payroll exported; reviews posted to Google.</a:t>
+              <a:t>A car transferred by invitation with its history; warranty cost and profit; prices and tax per site.</a:t>
             </a:r>
           </a:p>
         </p:txBody>
@@ -12563,7 +12563,7 @@
                 </a:solidFill>
                 <a:latin typeface="Georgia"/>
               </a:rPr>
-              <a:t>44</a:t>
+              <a:t>45</a:t>
             </a:r>
           </a:p>
         </p:txBody>
@@ -12602,7 +12602,7 @@
                 </a:solidFill>
                 <a:latin typeface="Segoe UI"/>
               </a:rPr>
-              <a:t>Ownership, warranty and sites</a:t>
+              <a:t>The first day</a:t>
             </a:r>
           </a:p>
         </p:txBody>
@@ -12641,167 +12641,6 @@
                 </a:solidFill>
                 <a:latin typeface="Segoe UI"/>
               </a:rPr>
-              <a:t>A car transferred by invitation with its history; warranty cost and profit; prices and tax per site.</a:t>
-            </a:r>
-          </a:p>
-        </p:txBody>
-      </p:sp>
-      <p:sp>
-        <p:nvSpPr>
-          <p:cNvPr id="30" name="Rectangle 29"/>
-          <p:cNvSpPr/>
-          <p:nvPr/>
-        </p:nvSpPr>
-        <p:spPr>
-          <a:xfrm>
-            <a:off x="822960" y="6327648"/>
-            <a:ext cx="475488" cy="475488"/>
-          </a:xfrm>
-          <a:prstGeom prst="rect">
-            <a:avLst/>
-          </a:prstGeom>
-          <a:solidFill>
-            <a:srgbClr val="1A4D52"/>
-          </a:solidFill>
-          <a:ln>
-            <a:noFill/>
-          </a:ln>
-          <a:effectLst/>
-        </p:spPr>
-        <p:style>
-          <a:lnRef idx="1">
-            <a:schemeClr val="accent1"/>
-          </a:lnRef>
-          <a:fillRef idx="3">
-            <a:schemeClr val="accent1"/>
-          </a:fillRef>
-          <a:effectRef idx="2">
-            <a:schemeClr val="accent1"/>
-          </a:effectRef>
-          <a:fontRef idx="minor">
-            <a:schemeClr val="lt1"/>
-          </a:fontRef>
-        </p:style>
-        <p:txBody>
-          <a:bodyPr rtlCol="0" anchor="ctr"/>
-          <a:lstStyle/>
-          <a:p>
-            <a:pPr algn="ctr"/>
-          </a:p>
-        </p:txBody>
-      </p:sp>
-      <p:sp>
-        <p:nvSpPr>
-          <p:cNvPr id="31" name="TextBox 30"/>
-          <p:cNvSpPr txBox="1"/>
-          <p:nvPr/>
-        </p:nvSpPr>
-        <p:spPr>
-          <a:xfrm>
-            <a:off x="822960" y="6428232"/>
-            <a:ext cx="475488" cy="310896"/>
-          </a:xfrm>
-          <a:prstGeom prst="rect">
-            <a:avLst/>
-          </a:prstGeom>
-          <a:noFill/>
-        </p:spPr>
-        <p:txBody>
-          <a:bodyPr wrap="square" anchor="t" lIns="0" rIns="0" tIns="0" bIns="0">
-            <a:spAutoFit/>
-          </a:bodyPr>
-          <a:lstStyle/>
-          <a:p>
-            <a:pPr algn="ctr">
-              <a:lnSpc>
-                <a:spcPct val="115000"/>
-              </a:lnSpc>
-            </a:pPr>
-            <a:r>
-              <a:rPr sz="1500" b="1">
-                <a:solidFill>
-                  <a:srgbClr val="FFFFFF"/>
-                </a:solidFill>
-                <a:latin typeface="Georgia"/>
-              </a:rPr>
-              <a:t>45</a:t>
-            </a:r>
-          </a:p>
-        </p:txBody>
-      </p:sp>
-      <p:sp>
-        <p:nvSpPr>
-          <p:cNvPr id="32" name="TextBox 31"/>
-          <p:cNvSpPr txBox="1"/>
-          <p:nvPr/>
-        </p:nvSpPr>
-        <p:spPr>
-          <a:xfrm>
-            <a:off x="1508760" y="6345936"/>
-            <a:ext cx="3291840" cy="310896"/>
-          </a:xfrm>
-          <a:prstGeom prst="rect">
-            <a:avLst/>
-          </a:prstGeom>
-          <a:noFill/>
-        </p:spPr>
-        <p:txBody>
-          <a:bodyPr wrap="square" anchor="t" lIns="0" rIns="0" tIns="0" bIns="0">
-            <a:spAutoFit/>
-          </a:bodyPr>
-          <a:lstStyle/>
-          <a:p>
-            <a:pPr algn="l">
-              <a:lnSpc>
-                <a:spcPct val="115000"/>
-              </a:lnSpc>
-            </a:pPr>
-            <a:r>
-              <a:rPr sz="1500" b="1">
-                <a:solidFill>
-                  <a:srgbClr val="161A1B"/>
-                </a:solidFill>
-                <a:latin typeface="Segoe UI"/>
-              </a:rPr>
-              <a:t>The first day</a:t>
-            </a:r>
-          </a:p>
-        </p:txBody>
-      </p:sp>
-      <p:sp>
-        <p:nvSpPr>
-          <p:cNvPr id="33" name="TextBox 32"/>
-          <p:cNvSpPr txBox="1"/>
-          <p:nvPr/>
-        </p:nvSpPr>
-        <p:spPr>
-          <a:xfrm>
-            <a:off x="4892040" y="6364224"/>
-            <a:ext cx="6309360" cy="548640"/>
-          </a:xfrm>
-          <a:prstGeom prst="rect">
-            <a:avLst/>
-          </a:prstGeom>
-          <a:noFill/>
-        </p:spPr>
-        <p:txBody>
-          <a:bodyPr wrap="square" anchor="t" lIns="0" rIns="0" tIns="0" bIns="0">
-            <a:spAutoFit/>
-          </a:bodyPr>
-          <a:lstStyle/>
-          <a:p>
-            <a:pPr algn="l">
-              <a:lnSpc>
-                <a:spcPct val="125000"/>
-              </a:lnSpc>
-            </a:pPr>
-            <a:r>
-              <a:rPr sz="1200" b="0">
-                <a:solidFill>
-                  <a:srgbClr val="535E60"/>
-                </a:solidFill>
-                <a:latin typeface="Segoe UI"/>
-              </a:rPr>
               <a:t>An onboarding checklist, demonstration data, and help inside the product.</a:t>
             </a:r>
           </a:p>
@@ -12809,7 +12648,7 @@
       </p:sp>
       <p:sp>
         <p:nvSpPr>
-          <p:cNvPr id="34" name="TextBox 33"/>
+          <p:cNvPr id="30" name="TextBox 29"/>
           <p:cNvSpPr txBox="1"/>
           <p:nvPr/>
         </p:nvSpPr>
@@ -12848,7 +12687,7 @@
       </p:sp>
       <p:sp>
         <p:nvSpPr>
-          <p:cNvPr id="35" name="TextBox 34"/>
+          <p:cNvPr id="31" name="TextBox 30"/>
           <p:cNvSpPr txBox="1"/>
           <p:nvPr/>
         </p:nvSpPr>

--- a/docs/Carnet-Presentation.pptx
+++ b/docs/Carnet-Presentation.pptx
@@ -7437,7 +7437,7 @@
                 </a:solidFill>
                 <a:latin typeface="Georgia"/>
               </a:rPr>
-              <a:t>116</a:t>
+              <a:t>117</a:t>
             </a:r>
           </a:p>
         </p:txBody>
@@ -8052,7 +8052,7 @@
                 </a:solidFill>
                 <a:latin typeface="Georgia"/>
               </a:rPr>
-              <a:t>55</a:t>
+              <a:t>56</a:t>
             </a:r>
           </a:p>
         </p:txBody>
@@ -8257,7 +8257,7 @@
                 </a:solidFill>
                 <a:latin typeface="Georgia"/>
               </a:rPr>
-              <a:t>574</a:t>
+              <a:t>581</a:t>
             </a:r>
           </a:p>
         </p:txBody>
@@ -8887,7 +8887,7 @@
         <p:spPr>
           <a:xfrm>
             <a:off x="822960" y="2468880"/>
-            <a:ext cx="10100178" cy="548640"/>
+            <a:ext cx="10151540" cy="548640"/>
           </a:xfrm>
           <a:prstGeom prst="rect">
             <a:avLst/>
@@ -8931,7 +8931,7 @@
         <p:spPr>
           <a:xfrm>
             <a:off x="1005840" y="2615184"/>
-            <a:ext cx="9825858" cy="320040"/>
+            <a:ext cx="9877220" cy="320040"/>
           </a:xfrm>
           <a:prstGeom prst="rect">
             <a:avLst/>
@@ -8956,7 +8956,7 @@
                 </a:solidFill>
                 <a:latin typeface="Segoe UI"/>
               </a:rPr>
-              <a:t>Built 204</a:t>
+              <a:t>Built 206</a:t>
             </a:r>
           </a:p>
         </p:txBody>
@@ -8969,8 +8969,8 @@
         </p:nvSpPr>
         <p:spPr>
           <a:xfrm>
-            <a:off x="10923138" y="2468880"/>
-            <a:ext cx="99021" cy="548640"/>
+            <a:off x="10974500" y="2468880"/>
+            <a:ext cx="49279" cy="548640"/>
           </a:xfrm>
           <a:prstGeom prst="rect">
             <a:avLst/>
@@ -9013,8 +9013,8 @@
         </p:nvSpPr>
         <p:spPr>
           <a:xfrm>
-            <a:off x="11022159" y="2468880"/>
-            <a:ext cx="297064" cy="548640"/>
+            <a:off x="11023779" y="2468880"/>
+            <a:ext cx="295675" cy="548640"/>
           </a:xfrm>
           <a:prstGeom prst="rect">
             <a:avLst/>
@@ -11758,7 +11758,7 @@
                 </a:solidFill>
                 <a:latin typeface="Georgia"/>
               </a:rPr>
-              <a:t>40.5</a:t>
+              <a:t>41</a:t>
             </a:r>
           </a:p>
         </p:txBody>
@@ -11797,7 +11797,7 @@
                 </a:solidFill>
                 <a:latin typeface="Segoe UI"/>
               </a:rPr>
-              <a:t>Every word translated</a:t>
+              <a:t>Tax, configurable</a:t>
             </a:r>
           </a:p>
         </p:txBody>
@@ -11836,7 +11836,7 @@
                 </a:solidFill>
                 <a:latin typeface="Segoe UI"/>
               </a:rPr>
-              <a:t>Built: every page, component, page title and refusal in French and Arabic; a scan that fails on any text left outside the translator.</a:t>
+              <a:t>Built: several taxes on a rate, prices with tax in, exempt customers, a rate per site, and a report per tax from what each document declared.</a:t>
             </a:r>
           </a:p>
         </p:txBody>
@@ -11919,7 +11919,7 @@
                 </a:solidFill>
                 <a:latin typeface="Georgia"/>
               </a:rPr>
-              <a:t>41</a:t>
+              <a:t>42</a:t>
             </a:r>
           </a:p>
         </p:txBody>
@@ -11958,7 +11958,7 @@
                 </a:solidFill>
                 <a:latin typeface="Segoe UI"/>
               </a:rPr>
-              <a:t>Tax, configurable</a:t>
+              <a:t>Paper</a:t>
             </a:r>
           </a:p>
         </p:txBody>
@@ -11997,7 +11997,7 @@
                 </a:solidFill>
                 <a:latin typeface="Segoe UI"/>
               </a:rPr>
-              <a:t>Built: several taxes on a rate, prices with tax in, exempt customers, a rate per site, and a report per tax from what each document declared.</a:t>
+              <a:t>Built: invoice, quote, inspection report, work order, key tag, labels and receipt, each printed or as a PDF in the reader's language, with QR codes.</a:t>
             </a:r>
           </a:p>
         </p:txBody>
@@ -12080,7 +12080,7 @@
                 </a:solidFill>
                 <a:latin typeface="Georgia"/>
               </a:rPr>
-              <a:t>42</a:t>
+              <a:t>43</a:t>
             </a:r>
           </a:p>
         </p:txBody>
@@ -12119,7 +12119,7 @@
                 </a:solidFill>
                 <a:latin typeface="Segoe UI"/>
               </a:rPr>
-              <a:t>Paper</a:t>
+              <a:t>Providers</a:t>
             </a:r>
           </a:p>
         </p:txBody>
@@ -12158,7 +12158,7 @@
                 </a:solidFill>
                 <a:latin typeface="Segoe UI"/>
               </a:rPr>
-              <a:t>Print styles for every document; work order, invoice, estimate and inspection as PDF; labels, key tags and QR codes.</a:t>
+              <a:t>VIN decoding and a fitment feed behind seams; payroll exported; reviews posted to Google.</a:t>
             </a:r>
           </a:p>
         </p:txBody>
@@ -12241,7 +12241,7 @@
                 </a:solidFill>
                 <a:latin typeface="Georgia"/>
               </a:rPr>
-              <a:t>43</a:t>
+              <a:t>44</a:t>
             </a:r>
           </a:p>
         </p:txBody>
@@ -12280,7 +12280,7 @@
                 </a:solidFill>
                 <a:latin typeface="Segoe UI"/>
               </a:rPr>
-              <a:t>Providers</a:t>
+              <a:t>Ownership, warranty and sites</a:t>
             </a:r>
           </a:p>
         </p:txBody>
@@ -12319,7 +12319,7 @@
                 </a:solidFill>
                 <a:latin typeface="Segoe UI"/>
               </a:rPr>
-              <a:t>VIN decoding and a fitment feed behind seams; payroll exported; reviews posted to Google.</a:t>
+              <a:t>A car transferred by invitation with its history; warranty cost and profit; prices and tax per site.</a:t>
             </a:r>
           </a:p>
         </p:txBody>
@@ -12402,7 +12402,7 @@
                 </a:solidFill>
                 <a:latin typeface="Georgia"/>
               </a:rPr>
-              <a:t>44</a:t>
+              <a:t>45</a:t>
             </a:r>
           </a:p>
         </p:txBody>
@@ -12441,7 +12441,7 @@
                 </a:solidFill>
                 <a:latin typeface="Segoe UI"/>
               </a:rPr>
-              <a:t>Ownership, warranty and sites</a:t>
+              <a:t>The first day</a:t>
             </a:r>
           </a:p>
         </p:txBody>
@@ -12480,167 +12480,6 @@
                 </a:solidFill>
                 <a:latin typeface="Segoe UI"/>
               </a:rPr>
-              <a:t>A car transferred by invitation with its history; warranty cost and profit; prices and tax per site.</a:t>
-            </a:r>
-          </a:p>
-        </p:txBody>
-      </p:sp>
-      <p:sp>
-        <p:nvSpPr>
-          <p:cNvPr id="26" name="Rectangle 25"/>
-          <p:cNvSpPr/>
-          <p:nvPr/>
-        </p:nvSpPr>
-        <p:spPr>
-          <a:xfrm>
-            <a:off x="822960" y="5669280"/>
-            <a:ext cx="475488" cy="475488"/>
-          </a:xfrm>
-          <a:prstGeom prst="rect">
-            <a:avLst/>
-          </a:prstGeom>
-          <a:solidFill>
-            <a:srgbClr val="1A4D52"/>
-          </a:solidFill>
-          <a:ln>
-            <a:noFill/>
-          </a:ln>
-          <a:effectLst/>
-        </p:spPr>
-        <p:style>
-          <a:lnRef idx="1">
-            <a:schemeClr val="accent1"/>
-          </a:lnRef>
-          <a:fillRef idx="3">
-            <a:schemeClr val="accent1"/>
-          </a:fillRef>
-          <a:effectRef idx="2">
-            <a:schemeClr val="accent1"/>
-          </a:effectRef>
-          <a:fontRef idx="minor">
-            <a:schemeClr val="lt1"/>
-          </a:fontRef>
-        </p:style>
-        <p:txBody>
-          <a:bodyPr rtlCol="0" anchor="ctr"/>
-          <a:lstStyle/>
-          <a:p>
-            <a:pPr algn="ctr"/>
-          </a:p>
-        </p:txBody>
-      </p:sp>
-      <p:sp>
-        <p:nvSpPr>
-          <p:cNvPr id="27" name="TextBox 26"/>
-          <p:cNvSpPr txBox="1"/>
-          <p:nvPr/>
-        </p:nvSpPr>
-        <p:spPr>
-          <a:xfrm>
-            <a:off x="822960" y="5769864"/>
-            <a:ext cx="475488" cy="310896"/>
-          </a:xfrm>
-          <a:prstGeom prst="rect">
-            <a:avLst/>
-          </a:prstGeom>
-          <a:noFill/>
-        </p:spPr>
-        <p:txBody>
-          <a:bodyPr wrap="square" anchor="t" lIns="0" rIns="0" tIns="0" bIns="0">
-            <a:spAutoFit/>
-          </a:bodyPr>
-          <a:lstStyle/>
-          <a:p>
-            <a:pPr algn="ctr">
-              <a:lnSpc>
-                <a:spcPct val="115000"/>
-              </a:lnSpc>
-            </a:pPr>
-            <a:r>
-              <a:rPr sz="1500" b="1">
-                <a:solidFill>
-                  <a:srgbClr val="FFFFFF"/>
-                </a:solidFill>
-                <a:latin typeface="Georgia"/>
-              </a:rPr>
-              <a:t>45</a:t>
-            </a:r>
-          </a:p>
-        </p:txBody>
-      </p:sp>
-      <p:sp>
-        <p:nvSpPr>
-          <p:cNvPr id="28" name="TextBox 27"/>
-          <p:cNvSpPr txBox="1"/>
-          <p:nvPr/>
-        </p:nvSpPr>
-        <p:spPr>
-          <a:xfrm>
-            <a:off x="1508760" y="5687568"/>
-            <a:ext cx="3291840" cy="310896"/>
-          </a:xfrm>
-          <a:prstGeom prst="rect">
-            <a:avLst/>
-          </a:prstGeom>
-          <a:noFill/>
-        </p:spPr>
-        <p:txBody>
-          <a:bodyPr wrap="square" anchor="t" lIns="0" rIns="0" tIns="0" bIns="0">
-            <a:spAutoFit/>
-          </a:bodyPr>
-          <a:lstStyle/>
-          <a:p>
-            <a:pPr algn="l">
-              <a:lnSpc>
-                <a:spcPct val="115000"/>
-              </a:lnSpc>
-            </a:pPr>
-            <a:r>
-              <a:rPr sz="1500" b="1">
-                <a:solidFill>
-                  <a:srgbClr val="161A1B"/>
-                </a:solidFill>
-                <a:latin typeface="Segoe UI"/>
-              </a:rPr>
-              <a:t>The first day</a:t>
-            </a:r>
-          </a:p>
-        </p:txBody>
-      </p:sp>
-      <p:sp>
-        <p:nvSpPr>
-          <p:cNvPr id="29" name="TextBox 28"/>
-          <p:cNvSpPr txBox="1"/>
-          <p:nvPr/>
-        </p:nvSpPr>
-        <p:spPr>
-          <a:xfrm>
-            <a:off x="4892040" y="5705856"/>
-            <a:ext cx="6309360" cy="548640"/>
-          </a:xfrm>
-          <a:prstGeom prst="rect">
-            <a:avLst/>
-          </a:prstGeom>
-          <a:noFill/>
-        </p:spPr>
-        <p:txBody>
-          <a:bodyPr wrap="square" anchor="t" lIns="0" rIns="0" tIns="0" bIns="0">
-            <a:spAutoFit/>
-          </a:bodyPr>
-          <a:lstStyle/>
-          <a:p>
-            <a:pPr algn="l">
-              <a:lnSpc>
-                <a:spcPct val="125000"/>
-              </a:lnSpc>
-            </a:pPr>
-            <a:r>
-              <a:rPr sz="1200" b="0">
-                <a:solidFill>
-                  <a:srgbClr val="535E60"/>
-                </a:solidFill>
-                <a:latin typeface="Segoe UI"/>
-              </a:rPr>
               <a:t>An onboarding checklist, demonstration data, and help inside the product.</a:t>
             </a:r>
           </a:p>
@@ -12648,7 +12487,7 @@
       </p:sp>
       <p:sp>
         <p:nvSpPr>
-          <p:cNvPr id="30" name="TextBox 29"/>
+          <p:cNvPr id="26" name="TextBox 25"/>
           <p:cNvSpPr txBox="1"/>
           <p:nvPr/>
         </p:nvSpPr>
@@ -12687,7 +12526,7 @@
       </p:sp>
       <p:sp>
         <p:nvSpPr>
-          <p:cNvPr id="31" name="TextBox 30"/>
+          <p:cNvPr id="27" name="TextBox 26"/>
           <p:cNvSpPr txBox="1"/>
           <p:nvPr/>
         </p:nvSpPr>

--- a/docs/Carnet-Presentation.pptx
+++ b/docs/Carnet-Presentation.pptx
@@ -7642,7 +7642,7 @@
                 </a:solidFill>
                 <a:latin typeface="Georgia"/>
               </a:rPr>
-              <a:t>145</a:t>
+              <a:t>147</a:t>
             </a:r>
           </a:p>
         </p:txBody>
@@ -8052,7 +8052,7 @@
                 </a:solidFill>
                 <a:latin typeface="Georgia"/>
               </a:rPr>
-              <a:t>56</a:t>
+              <a:t>57</a:t>
             </a:r>
           </a:p>
         </p:txBody>
@@ -8257,7 +8257,7 @@
                 </a:solidFill>
                 <a:latin typeface="Georgia"/>
               </a:rPr>
-              <a:t>581</a:t>
+              <a:t>589</a:t>
             </a:r>
           </a:p>
         </p:txBody>
@@ -8887,7 +8887,7 @@
         <p:spPr>
           <a:xfrm>
             <a:off x="822960" y="2468880"/>
-            <a:ext cx="10151540" cy="548640"/>
+            <a:ext cx="10258162" cy="548640"/>
           </a:xfrm>
           <a:prstGeom prst="rect">
             <a:avLst/>
@@ -8931,7 +8931,7 @@
         <p:spPr>
           <a:xfrm>
             <a:off x="1005840" y="2615184"/>
-            <a:ext cx="9877220" cy="320040"/>
+            <a:ext cx="9983842" cy="320040"/>
           </a:xfrm>
           <a:prstGeom prst="rect">
             <a:avLst/>
@@ -8956,7 +8956,7 @@
                 </a:solidFill>
                 <a:latin typeface="Segoe UI"/>
               </a:rPr>
-              <a:t>Built 206</a:t>
+              <a:t>Built 214</a:t>
             </a:r>
           </a:p>
         </p:txBody>
@@ -8969,8 +8969,8 @@
         </p:nvSpPr>
         <p:spPr>
           <a:xfrm>
-            <a:off x="10974500" y="2468880"/>
-            <a:ext cx="49279" cy="548640"/>
+            <a:off x="11081122" y="2468880"/>
+            <a:ext cx="47935" cy="548640"/>
           </a:xfrm>
           <a:prstGeom prst="rect">
             <a:avLst/>
@@ -9013,8 +9013,8 @@
         </p:nvSpPr>
         <p:spPr>
           <a:xfrm>
-            <a:off x="11023779" y="2468880"/>
-            <a:ext cx="295675" cy="548640"/>
+            <a:off x="11129057" y="2468880"/>
+            <a:ext cx="191741" cy="548640"/>
           </a:xfrm>
           <a:prstGeom prst="rect">
             <a:avLst/>

--- a/docs/Carnet-Presentation.pptx
+++ b/docs/Carnet-Presentation.pptx
@@ -7437,7 +7437,7 @@
                 </a:solidFill>
                 <a:latin typeface="Georgia"/>
               </a:rPr>
-              <a:t>117</a:t>
+              <a:t>118</a:t>
             </a:r>
           </a:p>
         </p:txBody>
@@ -7642,7 +7642,7 @@
                 </a:solidFill>
                 <a:latin typeface="Georgia"/>
               </a:rPr>
-              <a:t>147</a:t>
+              <a:t>150</a:t>
             </a:r>
           </a:p>
         </p:txBody>
@@ -8052,7 +8052,7 @@
                 </a:solidFill>
                 <a:latin typeface="Georgia"/>
               </a:rPr>
-              <a:t>57</a:t>
+              <a:t>58</a:t>
             </a:r>
           </a:p>
         </p:txBody>
@@ -8257,7 +8257,7 @@
                 </a:solidFill>
                 <a:latin typeface="Georgia"/>
               </a:rPr>
-              <a:t>589</a:t>
+              <a:t>597</a:t>
             </a:r>
           </a:p>
         </p:txBody>
@@ -8887,7 +8887,7 @@
         <p:spPr>
           <a:xfrm>
             <a:off x="822960" y="2468880"/>
-            <a:ext cx="10258162" cy="548640"/>
+            <a:ext cx="10264554" cy="548640"/>
           </a:xfrm>
           <a:prstGeom prst="rect">
             <a:avLst/>
@@ -8931,7 +8931,7 @@
         <p:spPr>
           <a:xfrm>
             <a:off x="1005840" y="2615184"/>
-            <a:ext cx="9983842" cy="320040"/>
+            <a:ext cx="9990234" cy="320040"/>
           </a:xfrm>
           <a:prstGeom prst="rect">
             <a:avLst/>
@@ -8956,7 +8956,7 @@
                 </a:solidFill>
                 <a:latin typeface="Segoe UI"/>
               </a:rPr>
-              <a:t>Built 214</a:t>
+              <a:t>Built 219</a:t>
             </a:r>
           </a:p>
         </p:txBody>
@@ -8969,8 +8969,8 @@
         </p:nvSpPr>
         <p:spPr>
           <a:xfrm>
-            <a:off x="11081122" y="2468880"/>
-            <a:ext cx="47935" cy="548640"/>
+            <a:off x="11087514" y="2468880"/>
+            <a:ext cx="46870" cy="548640"/>
           </a:xfrm>
           <a:prstGeom prst="rect">
             <a:avLst/>
@@ -9013,8 +9013,8 @@
         </p:nvSpPr>
         <p:spPr>
           <a:xfrm>
-            <a:off x="11129057" y="2468880"/>
-            <a:ext cx="191741" cy="548640"/>
+            <a:off x="11134384" y="2468880"/>
+            <a:ext cx="187480" cy="548640"/>
           </a:xfrm>
           <a:prstGeom prst="rect">
             <a:avLst/>

--- a/docs/Carnet-Presentation.pptx
+++ b/docs/Carnet-Presentation.pptx
@@ -7437,7 +7437,7 @@
                 </a:solidFill>
                 <a:latin typeface="Georgia"/>
               </a:rPr>
-              <a:t>118</a:t>
+              <a:t>121</a:t>
             </a:r>
           </a:p>
         </p:txBody>
@@ -8052,7 +8052,7 @@
                 </a:solidFill>
                 <a:latin typeface="Georgia"/>
               </a:rPr>
-              <a:t>58</a:t>
+              <a:t>59</a:t>
             </a:r>
           </a:p>
         </p:txBody>
@@ -8257,7 +8257,7 @@
                 </a:solidFill>
                 <a:latin typeface="Georgia"/>
               </a:rPr>
-              <a:t>597</a:t>
+              <a:t>603</a:t>
             </a:r>
           </a:p>
         </p:txBody>
@@ -8887,7 +8887,7 @@
         <p:spPr>
           <a:xfrm>
             <a:off x="822960" y="2468880"/>
-            <a:ext cx="10264554" cy="548640"/>
+            <a:ext cx="10405164" cy="548640"/>
           </a:xfrm>
           <a:prstGeom prst="rect">
             <a:avLst/>
@@ -8931,7 +8931,7 @@
         <p:spPr>
           <a:xfrm>
             <a:off x="1005840" y="2615184"/>
-            <a:ext cx="9990234" cy="320040"/>
+            <a:ext cx="10130844" cy="320040"/>
           </a:xfrm>
           <a:prstGeom prst="rect">
             <a:avLst/>
@@ -8956,7 +8956,7 @@
                 </a:solidFill>
                 <a:latin typeface="Segoe UI"/>
               </a:rPr>
-              <a:t>Built 219</a:t>
+              <a:t>Built 222</a:t>
             </a:r>
           </a:p>
         </p:txBody>
@@ -8969,7 +8969,7 @@
         </p:nvSpPr>
         <p:spPr>
           <a:xfrm>
-            <a:off x="11087514" y="2468880"/>
+            <a:off x="11228124" y="2468880"/>
             <a:ext cx="46870" cy="548640"/>
           </a:xfrm>
           <a:prstGeom prst="rect">
@@ -9013,8 +9013,8 @@
         </p:nvSpPr>
         <p:spPr>
           <a:xfrm>
-            <a:off x="11134384" y="2468880"/>
-            <a:ext cx="187480" cy="548640"/>
+            <a:off x="11274994" y="2468880"/>
+            <a:ext cx="46870" cy="548640"/>
           </a:xfrm>
           <a:prstGeom prst="rect">
             <a:avLst/>

--- a/docs/Carnet-Presentation.pptx
+++ b/docs/Carnet-Presentation.pptx
@@ -8052,7 +8052,7 @@
                 </a:solidFill>
                 <a:latin typeface="Georgia"/>
               </a:rPr>
-              <a:t>59</a:t>
+              <a:t>60</a:t>
             </a:r>
           </a:p>
         </p:txBody>
@@ -8887,7 +8887,7 @@
         <p:spPr>
           <a:xfrm>
             <a:off x="822960" y="2468880"/>
-            <a:ext cx="10405164" cy="548640"/>
+            <a:ext cx="10407620" cy="548640"/>
           </a:xfrm>
           <a:prstGeom prst="rect">
             <a:avLst/>
@@ -8931,7 +8931,7 @@
         <p:spPr>
           <a:xfrm>
             <a:off x="1005840" y="2615184"/>
-            <a:ext cx="10130844" cy="320040"/>
+            <a:ext cx="10133300" cy="320040"/>
           </a:xfrm>
           <a:prstGeom prst="rect">
             <a:avLst/>
@@ -8956,7 +8956,7 @@
                 </a:solidFill>
                 <a:latin typeface="Segoe UI"/>
               </a:rPr>
-              <a:t>Built 222</a:t>
+              <a:t>Built 226</a:t>
             </a:r>
           </a:p>
         </p:txBody>
@@ -8969,8 +8969,8 @@
         </p:nvSpPr>
         <p:spPr>
           <a:xfrm>
-            <a:off x="11228124" y="2468880"/>
-            <a:ext cx="46870" cy="548640"/>
+            <a:off x="11230580" y="2468880"/>
+            <a:ext cx="46051" cy="548640"/>
           </a:xfrm>
           <a:prstGeom prst="rect">
             <a:avLst/>
@@ -9013,8 +9013,8 @@
         </p:nvSpPr>
         <p:spPr>
           <a:xfrm>
-            <a:off x="11274994" y="2468880"/>
-            <a:ext cx="46870" cy="548640"/>
+            <a:off x="11276631" y="2468880"/>
+            <a:ext cx="46051" cy="548640"/>
           </a:xfrm>
           <a:prstGeom prst="rect">
             <a:avLst/>

--- a/docs/Carnet-Presentation.pptx
+++ b/docs/Carnet-Presentation.pptx
@@ -7437,7 +7437,7 @@
                 </a:solidFill>
                 <a:latin typeface="Georgia"/>
               </a:rPr>
-              <a:t>121</a:t>
+              <a:t>122</a:t>
             </a:r>
           </a:p>
         </p:txBody>
@@ -7642,7 +7642,7 @@
                 </a:solidFill>
                 <a:latin typeface="Georgia"/>
               </a:rPr>
-              <a:t>150</a:t>
+              <a:t>152</a:t>
             </a:r>
           </a:p>
         </p:txBody>
@@ -8052,7 +8052,7 @@
                 </a:solidFill>
                 <a:latin typeface="Georgia"/>
               </a:rPr>
-              <a:t>60</a:t>
+              <a:t>61</a:t>
             </a:r>
           </a:p>
         </p:txBody>
@@ -8257,7 +8257,7 @@
                 </a:solidFill>
                 <a:latin typeface="Georgia"/>
               </a:rPr>
-              <a:t>603</a:t>
+              <a:t>611</a:t>
             </a:r>
           </a:p>
         </p:txBody>
@@ -8887,7 +8887,7 @@
         <p:spPr>
           <a:xfrm>
             <a:off x="822960" y="2468880"/>
-            <a:ext cx="10407620" cy="548640"/>
+            <a:ext cx="10454863" cy="548640"/>
           </a:xfrm>
           <a:prstGeom prst="rect">
             <a:avLst/>
@@ -8931,7 +8931,7 @@
         <p:spPr>
           <a:xfrm>
             <a:off x="1005840" y="2615184"/>
-            <a:ext cx="10133300" cy="320040"/>
+            <a:ext cx="10180543" cy="320040"/>
           </a:xfrm>
           <a:prstGeom prst="rect">
             <a:avLst/>
@@ -8956,7 +8956,7 @@
                 </a:solidFill>
                 <a:latin typeface="Segoe UI"/>
               </a:rPr>
-              <a:t>Built 226</a:t>
+              <a:t>Built 230</a:t>
             </a:r>
           </a:p>
         </p:txBody>
@@ -8969,8 +8969,8 @@
         </p:nvSpPr>
         <p:spPr>
           <a:xfrm>
-            <a:off x="11230580" y="2468880"/>
-            <a:ext cx="46051" cy="548640"/>
+            <a:off x="11277823" y="2468880"/>
+            <a:ext cx="45455" cy="548640"/>
           </a:xfrm>
           <a:prstGeom prst="rect">
             <a:avLst/>
@@ -9013,8 +9013,8 @@
         </p:nvSpPr>
         <p:spPr>
           <a:xfrm>
-            <a:off x="11276631" y="2468880"/>
-            <a:ext cx="46051" cy="548640"/>
+            <a:off x="11323278" y="2468880"/>
+            <a:ext cx="0" cy="548640"/>
           </a:xfrm>
           <a:prstGeom prst="rect">
             <a:avLst/>

--- a/docs/Carnet-Presentation.pptx
+++ b/docs/Carnet-Presentation.pptx
@@ -7642,7 +7642,7 @@
                 </a:solidFill>
                 <a:latin typeface="Georgia"/>
               </a:rPr>
-              <a:t>152</a:t>
+              <a:t>153</a:t>
             </a:r>
           </a:p>
         </p:txBody>
@@ -8052,7 +8052,7 @@
                 </a:solidFill>
                 <a:latin typeface="Georgia"/>
               </a:rPr>
-              <a:t>61</a:t>
+              <a:t>63</a:t>
             </a:r>
           </a:p>
         </p:txBody>
@@ -8257,7 +8257,7 @@
                 </a:solidFill>
                 <a:latin typeface="Georgia"/>
               </a:rPr>
-              <a:t>611</a:t>
+              <a:t>619</a:t>
             </a:r>
           </a:p>
         </p:txBody>
@@ -8887,7 +8887,7 @@
         <p:spPr>
           <a:xfrm>
             <a:off x="822960" y="2468880"/>
-            <a:ext cx="10454863" cy="548640"/>
+            <a:ext cx="10457893" cy="548640"/>
           </a:xfrm>
           <a:prstGeom prst="rect">
             <a:avLst/>
@@ -8931,7 +8931,7 @@
         <p:spPr>
           <a:xfrm>
             <a:off x="1005840" y="2615184"/>
-            <a:ext cx="10180543" cy="320040"/>
+            <a:ext cx="10183573" cy="320040"/>
           </a:xfrm>
           <a:prstGeom prst="rect">
             <a:avLst/>
@@ -8956,7 +8956,7 @@
                 </a:solidFill>
                 <a:latin typeface="Segoe UI"/>
               </a:rPr>
-              <a:t>Built 230</a:t>
+              <a:t>Built 238</a:t>
             </a:r>
           </a:p>
         </p:txBody>
@@ -8969,8 +8969,8 @@
         </p:nvSpPr>
         <p:spPr>
           <a:xfrm>
-            <a:off x="11277823" y="2468880"/>
-            <a:ext cx="45455" cy="548640"/>
+            <a:off x="11280853" y="2468880"/>
+            <a:ext cx="43940" cy="548640"/>
           </a:xfrm>
           <a:prstGeom prst="rect">
             <a:avLst/>
@@ -9013,7 +9013,7 @@
         </p:nvSpPr>
         <p:spPr>
           <a:xfrm>
-            <a:off x="11323278" y="2468880"/>
+            <a:off x="11324793" y="2468880"/>
             <a:ext cx="0" cy="548640"/>
           </a:xfrm>
           <a:prstGeom prst="rect">

--- a/docs/Carnet-Presentation.pptx
+++ b/docs/Carnet-Presentation.pptx
@@ -7437,7 +7437,7 @@
                 </a:solidFill>
                 <a:latin typeface="Georgia"/>
               </a:rPr>
-              <a:t>122</a:t>
+              <a:t>124</a:t>
             </a:r>
           </a:p>
         </p:txBody>
@@ -8052,7 +8052,7 @@
                 </a:solidFill>
                 <a:latin typeface="Georgia"/>
               </a:rPr>
-              <a:t>63</a:t>
+              <a:t>64</a:t>
             </a:r>
           </a:p>
         </p:txBody>
@@ -8257,7 +8257,7 @@
                 </a:solidFill>
                 <a:latin typeface="Georgia"/>
               </a:rPr>
-              <a:t>619</a:t>
+              <a:t>627</a:t>
             </a:r>
           </a:p>
         </p:txBody>
@@ -8887,7 +8887,7 @@
         <p:spPr>
           <a:xfrm>
             <a:off x="822960" y="2468880"/>
-            <a:ext cx="10457893" cy="548640"/>
+            <a:ext cx="10460036" cy="548640"/>
           </a:xfrm>
           <a:prstGeom prst="rect">
             <a:avLst/>
@@ -8931,7 +8931,7 @@
         <p:spPr>
           <a:xfrm>
             <a:off x="1005840" y="2615184"/>
-            <a:ext cx="10183573" cy="320040"/>
+            <a:ext cx="10185716" cy="320040"/>
           </a:xfrm>
           <a:prstGeom prst="rect">
             <a:avLst/>
@@ -8956,7 +8956,7 @@
                 </a:solidFill>
                 <a:latin typeface="Segoe UI"/>
               </a:rPr>
-              <a:t>Built 238</a:t>
+              <a:t>Built 244</a:t>
             </a:r>
           </a:p>
         </p:txBody>
@@ -8969,8 +8969,8 @@
         </p:nvSpPr>
         <p:spPr>
           <a:xfrm>
-            <a:off x="11280853" y="2468880"/>
-            <a:ext cx="43940" cy="548640"/>
+            <a:off x="11282996" y="2468880"/>
+            <a:ext cx="42869" cy="548640"/>
           </a:xfrm>
           <a:prstGeom prst="rect">
             <a:avLst/>
@@ -9013,7 +9013,7 @@
         </p:nvSpPr>
         <p:spPr>
           <a:xfrm>
-            <a:off x="11324793" y="2468880"/>
+            <a:off x="11325865" y="2468880"/>
             <a:ext cx="0" cy="548640"/>
           </a:xfrm>
           <a:prstGeom prst="rect">

--- a/docs/Carnet-Presentation.pptx
+++ b/docs/Carnet-Presentation.pptx
@@ -8052,7 +8052,7 @@
                 </a:solidFill>
                 <a:latin typeface="Georgia"/>
               </a:rPr>
-              <a:t>64</a:t>
+              <a:t>65</a:t>
             </a:r>
           </a:p>
         </p:txBody>
@@ -8257,7 +8257,7 @@
                 </a:solidFill>
                 <a:latin typeface="Georgia"/>
               </a:rPr>
-              <a:t>627</a:t>
+              <a:t>635</a:t>
             </a:r>
           </a:p>
         </p:txBody>
@@ -8887,7 +8887,7 @@
         <p:spPr>
           <a:xfrm>
             <a:off x="822960" y="2468880"/>
-            <a:ext cx="10460036" cy="548640"/>
+            <a:ext cx="10462409" cy="548640"/>
           </a:xfrm>
           <a:prstGeom prst="rect">
             <a:avLst/>
@@ -8931,7 +8931,7 @@
         <p:spPr>
           <a:xfrm>
             <a:off x="1005840" y="2615184"/>
-            <a:ext cx="10185716" cy="320040"/>
+            <a:ext cx="10188089" cy="320040"/>
           </a:xfrm>
           <a:prstGeom prst="rect">
             <a:avLst/>
@@ -8956,7 +8956,7 @@
                 </a:solidFill>
                 <a:latin typeface="Segoe UI"/>
               </a:rPr>
-              <a:t>Built 244</a:t>
+              <a:t>Built 251</a:t>
             </a:r>
           </a:p>
         </p:txBody>
@@ -8969,8 +8969,8 @@
         </p:nvSpPr>
         <p:spPr>
           <a:xfrm>
-            <a:off x="11282996" y="2468880"/>
-            <a:ext cx="42869" cy="548640"/>
+            <a:off x="11285369" y="2468880"/>
+            <a:ext cx="41682" cy="548640"/>
           </a:xfrm>
           <a:prstGeom prst="rect">
             <a:avLst/>
@@ -9013,7 +9013,7 @@
         </p:nvSpPr>
         <p:spPr>
           <a:xfrm>
-            <a:off x="11325865" y="2468880"/>
+            <a:off x="11327051" y="2468880"/>
             <a:ext cx="0" cy="548640"/>
           </a:xfrm>
           <a:prstGeom prst="rect">

--- a/docs/Carnet-Presentation.pptx
+++ b/docs/Carnet-Presentation.pptx
@@ -8257,7 +8257,7 @@
                 </a:solidFill>
                 <a:latin typeface="Georgia"/>
               </a:rPr>
-              <a:t>635</a:t>
+              <a:t>639</a:t>
             </a:r>
           </a:p>
         </p:txBody>
@@ -8887,7 +8887,7 @@
         <p:spPr>
           <a:xfrm>
             <a:off x="822960" y="2468880"/>
-            <a:ext cx="10462409" cy="548640"/>
+            <a:ext cx="10464024" cy="548640"/>
           </a:xfrm>
           <a:prstGeom prst="rect">
             <a:avLst/>
@@ -8931,7 +8931,7 @@
         <p:spPr>
           <a:xfrm>
             <a:off x="1005840" y="2615184"/>
-            <a:ext cx="10188089" cy="320040"/>
+            <a:ext cx="10189704" cy="320040"/>
           </a:xfrm>
           <a:prstGeom prst="rect">
             <a:avLst/>
@@ -8956,7 +8956,7 @@
                 </a:solidFill>
                 <a:latin typeface="Segoe UI"/>
               </a:rPr>
-              <a:t>Built 251</a:t>
+              <a:t>Built 256</a:t>
             </a:r>
           </a:p>
         </p:txBody>
@@ -8969,8 +8969,8 @@
         </p:nvSpPr>
         <p:spPr>
           <a:xfrm>
-            <a:off x="11285369" y="2468880"/>
-            <a:ext cx="41682" cy="548640"/>
+            <a:off x="11286984" y="2468880"/>
+            <a:ext cx="40875" cy="548640"/>
           </a:xfrm>
           <a:prstGeom prst="rect">
             <a:avLst/>
@@ -9013,7 +9013,7 @@
         </p:nvSpPr>
         <p:spPr>
           <a:xfrm>
-            <a:off x="11327051" y="2468880"/>
+            <a:off x="11327859" y="2468880"/>
             <a:ext cx="0" cy="548640"/>
           </a:xfrm>
           <a:prstGeom prst="rect">

--- a/docs/Carnet-Presentation.pptx
+++ b/docs/Carnet-Presentation.pptx
@@ -7437,7 +7437,7 @@
                 </a:solidFill>
                 <a:latin typeface="Georgia"/>
               </a:rPr>
-              <a:t>124</a:t>
+              <a:t>125</a:t>
             </a:r>
           </a:p>
         </p:txBody>
@@ -8052,7 +8052,7 @@
                 </a:solidFill>
                 <a:latin typeface="Georgia"/>
               </a:rPr>
-              <a:t>65</a:t>
+              <a:t>66</a:t>
             </a:r>
           </a:p>
         </p:txBody>
@@ -8257,7 +8257,7 @@
                 </a:solidFill>
                 <a:latin typeface="Georgia"/>
               </a:rPr>
-              <a:t>639</a:t>
+              <a:t>647</a:t>
             </a:r>
           </a:p>
         </p:txBody>
@@ -8887,7 +8887,7 @@
         <p:spPr>
           <a:xfrm>
             <a:off x="822960" y="2468880"/>
-            <a:ext cx="10464024" cy="548640"/>
+            <a:ext cx="10466483" cy="548640"/>
           </a:xfrm>
           <a:prstGeom prst="rect">
             <a:avLst/>
@@ -8931,7 +8931,7 @@
         <p:spPr>
           <a:xfrm>
             <a:off x="1005840" y="2615184"/>
-            <a:ext cx="10189704" cy="320040"/>
+            <a:ext cx="10192163" cy="320040"/>
           </a:xfrm>
           <a:prstGeom prst="rect">
             <a:avLst/>
@@ -8956,7 +8956,7 @@
                 </a:solidFill>
                 <a:latin typeface="Segoe UI"/>
               </a:rPr>
-              <a:t>Built 256</a:t>
+              <a:t>Built 264</a:t>
             </a:r>
           </a:p>
         </p:txBody>
@@ -8969,8 +8969,8 @@
         </p:nvSpPr>
         <p:spPr>
           <a:xfrm>
-            <a:off x="11286984" y="2468880"/>
-            <a:ext cx="40875" cy="548640"/>
+            <a:off x="11289443" y="2468880"/>
+            <a:ext cx="39645" cy="548640"/>
           </a:xfrm>
           <a:prstGeom prst="rect">
             <a:avLst/>
@@ -9013,7 +9013,7 @@
         </p:nvSpPr>
         <p:spPr>
           <a:xfrm>
-            <a:off x="11327859" y="2468880"/>
+            <a:off x="11329088" y="2468880"/>
             <a:ext cx="0" cy="548640"/>
           </a:xfrm>
           <a:prstGeom prst="rect">

--- a/docs/Carnet-Presentation.pptx
+++ b/docs/Carnet-Presentation.pptx
@@ -8052,7 +8052,7 @@
                 </a:solidFill>
                 <a:latin typeface="Georgia"/>
               </a:rPr>
-              <a:t>66</a:t>
+              <a:t>67</a:t>
             </a:r>
           </a:p>
         </p:txBody>
@@ -8257,7 +8257,7 @@
                 </a:solidFill>
                 <a:latin typeface="Georgia"/>
               </a:rPr>
-              <a:t>647</a:t>
+              <a:t>655</a:t>
             </a:r>
           </a:p>
         </p:txBody>
@@ -8887,7 +8887,7 @@
         <p:spPr>
           <a:xfrm>
             <a:off x="822960" y="2468880"/>
-            <a:ext cx="10466483" cy="548640"/>
+            <a:ext cx="10469078" cy="548640"/>
           </a:xfrm>
           <a:prstGeom prst="rect">
             <a:avLst/>
@@ -8931,7 +8931,7 @@
         <p:spPr>
           <a:xfrm>
             <a:off x="1005840" y="2615184"/>
-            <a:ext cx="10192163" cy="320040"/>
+            <a:ext cx="10194758" cy="320040"/>
           </a:xfrm>
           <a:prstGeom prst="rect">
             <a:avLst/>
@@ -8956,7 +8956,7 @@
                 </a:solidFill>
                 <a:latin typeface="Segoe UI"/>
               </a:rPr>
-              <a:t>Built 264</a:t>
+              <a:t>Built 273</a:t>
             </a:r>
           </a:p>
         </p:txBody>
@@ -8969,8 +8969,8 @@
         </p:nvSpPr>
         <p:spPr>
           <a:xfrm>
-            <a:off x="11289443" y="2468880"/>
-            <a:ext cx="39645" cy="548640"/>
+            <a:off x="11292038" y="2468880"/>
+            <a:ext cx="38348" cy="548640"/>
           </a:xfrm>
           <a:prstGeom prst="rect">
             <a:avLst/>
@@ -9013,7 +9013,7 @@
         </p:nvSpPr>
         <p:spPr>
           <a:xfrm>
-            <a:off x="11329088" y="2468880"/>
+            <a:off x="11330386" y="2468880"/>
             <a:ext cx="0" cy="548640"/>
           </a:xfrm>
           <a:prstGeom prst="rect">

--- a/docs/Carnet-Presentation.pptx
+++ b/docs/Carnet-Presentation.pptx
@@ -8052,7 +8052,7 @@
                 </a:solidFill>
                 <a:latin typeface="Georgia"/>
               </a:rPr>
-              <a:t>67</a:t>
+              <a:t>68</a:t>
             </a:r>
           </a:p>
         </p:txBody>
@@ -8257,7 +8257,7 @@
                 </a:solidFill>
                 <a:latin typeface="Georgia"/>
               </a:rPr>
-              <a:t>655</a:t>
+              <a:t>662</a:t>
             </a:r>
           </a:p>
         </p:txBody>
@@ -8887,7 +8887,7 @@
         <p:spPr>
           <a:xfrm>
             <a:off x="822960" y="2468880"/>
-            <a:ext cx="10469078" cy="548640"/>
+            <a:ext cx="10471246" cy="548640"/>
           </a:xfrm>
           <a:prstGeom prst="rect">
             <a:avLst/>
@@ -8931,7 +8931,7 @@
         <p:spPr>
           <a:xfrm>
             <a:off x="1005840" y="2615184"/>
-            <a:ext cx="10194758" cy="320040"/>
+            <a:ext cx="10196926" cy="320040"/>
           </a:xfrm>
           <a:prstGeom prst="rect">
             <a:avLst/>
@@ -8956,7 +8956,7 @@
                 </a:solidFill>
                 <a:latin typeface="Segoe UI"/>
               </a:rPr>
-              <a:t>Built 273</a:t>
+              <a:t>Built 281</a:t>
             </a:r>
           </a:p>
         </p:txBody>
@@ -8969,8 +8969,8 @@
         </p:nvSpPr>
         <p:spPr>
           <a:xfrm>
-            <a:off x="11292038" y="2468880"/>
-            <a:ext cx="38348" cy="548640"/>
+            <a:off x="11294206" y="2468880"/>
+            <a:ext cx="37264" cy="548640"/>
           </a:xfrm>
           <a:prstGeom prst="rect">
             <a:avLst/>
@@ -9013,7 +9013,7 @@
         </p:nvSpPr>
         <p:spPr>
           <a:xfrm>
-            <a:off x="11330386" y="2468880"/>
+            <a:off x="11331470" y="2468880"/>
             <a:ext cx="0" cy="548640"/>
           </a:xfrm>
           <a:prstGeom prst="rect">

--- a/docs/Carnet-Presentation.pptx
+++ b/docs/Carnet-Presentation.pptx
@@ -7437,7 +7437,7 @@
                 </a:solidFill>
                 <a:latin typeface="Georgia"/>
               </a:rPr>
-              <a:t>125</a:t>
+              <a:t>126</a:t>
             </a:r>
           </a:p>
         </p:txBody>
@@ -8052,7 +8052,7 @@
                 </a:solidFill>
                 <a:latin typeface="Georgia"/>
               </a:rPr>
-              <a:t>68</a:t>
+              <a:t>69</a:t>
             </a:r>
           </a:p>
         </p:txBody>
@@ -8257,7 +8257,7 @@
                 </a:solidFill>
                 <a:latin typeface="Georgia"/>
               </a:rPr>
-              <a:t>662</a:t>
+              <a:t>669</a:t>
             </a:r>
           </a:p>
         </p:txBody>
@@ -8887,7 +8887,7 @@
         <p:spPr>
           <a:xfrm>
             <a:off x="822960" y="2468880"/>
-            <a:ext cx="10471246" cy="548640"/>
+            <a:ext cx="10473045" cy="548640"/>
           </a:xfrm>
           <a:prstGeom prst="rect">
             <a:avLst/>
@@ -8931,7 +8931,7 @@
         <p:spPr>
           <a:xfrm>
             <a:off x="1005840" y="2615184"/>
-            <a:ext cx="10196926" cy="320040"/>
+            <a:ext cx="10198725" cy="320040"/>
           </a:xfrm>
           <a:prstGeom prst="rect">
             <a:avLst/>
@@ -8956,7 +8956,7 @@
                 </a:solidFill>
                 <a:latin typeface="Segoe UI"/>
               </a:rPr>
-              <a:t>Built 281</a:t>
+              <a:t>Built 288</a:t>
             </a:r>
           </a:p>
         </p:txBody>
@@ -8969,8 +8969,8 @@
         </p:nvSpPr>
         <p:spPr>
           <a:xfrm>
-            <a:off x="11294206" y="2468880"/>
-            <a:ext cx="37264" cy="548640"/>
+            <a:off x="11296005" y="2468880"/>
+            <a:ext cx="36364" cy="548640"/>
           </a:xfrm>
           <a:prstGeom prst="rect">
             <a:avLst/>
@@ -9013,7 +9013,7 @@
         </p:nvSpPr>
         <p:spPr>
           <a:xfrm>
-            <a:off x="11331470" y="2468880"/>
+            <a:off x="11332369" y="2468880"/>
             <a:ext cx="0" cy="548640"/>
           </a:xfrm>
           <a:prstGeom prst="rect">

--- a/docs/Carnet-Presentation.pptx
+++ b/docs/Carnet-Presentation.pptx
@@ -8052,7 +8052,7 @@
                 </a:solidFill>
                 <a:latin typeface="Georgia"/>
               </a:rPr>
-              <a:t>69</a:t>
+              <a:t>70</a:t>
             </a:r>
           </a:p>
         </p:txBody>
@@ -8257,7 +8257,7 @@
                 </a:solidFill>
                 <a:latin typeface="Georgia"/>
               </a:rPr>
-              <a:t>669</a:t>
+              <a:t>676</a:t>
             </a:r>
           </a:p>
         </p:txBody>
@@ -8887,7 +8887,7 @@
         <p:spPr>
           <a:xfrm>
             <a:off x="822960" y="2468880"/>
-            <a:ext cx="10473045" cy="548640"/>
+            <a:ext cx="10475234" cy="548640"/>
           </a:xfrm>
           <a:prstGeom prst="rect">
             <a:avLst/>
@@ -8931,7 +8931,7 @@
         <p:spPr>
           <a:xfrm>
             <a:off x="1005840" y="2615184"/>
-            <a:ext cx="10198725" cy="320040"/>
+            <a:ext cx="10200914" cy="320040"/>
           </a:xfrm>
           <a:prstGeom prst="rect">
             <a:avLst/>
@@ -8956,7 +8956,7 @@
                 </a:solidFill>
                 <a:latin typeface="Segoe UI"/>
               </a:rPr>
-              <a:t>Built 288</a:t>
+              <a:t>Built 297</a:t>
             </a:r>
           </a:p>
         </p:txBody>
@@ -8969,8 +8969,8 @@
         </p:nvSpPr>
         <p:spPr>
           <a:xfrm>
-            <a:off x="11296005" y="2468880"/>
-            <a:ext cx="36364" cy="548640"/>
+            <a:off x="11298194" y="2468880"/>
+            <a:ext cx="35270" cy="548640"/>
           </a:xfrm>
           <a:prstGeom prst="rect">
             <a:avLst/>
@@ -9013,7 +9013,7 @@
         </p:nvSpPr>
         <p:spPr>
           <a:xfrm>
-            <a:off x="11332369" y="2468880"/>
+            <a:off x="11333464" y="2468880"/>
             <a:ext cx="0" cy="548640"/>
           </a:xfrm>
           <a:prstGeom prst="rect">

--- a/docs/Carnet-Presentation.pptx
+++ b/docs/Carnet-Presentation.pptx
@@ -7437,7 +7437,7 @@
                 </a:solidFill>
                 <a:latin typeface="Georgia"/>
               </a:rPr>
-              <a:t>126</a:t>
+              <a:t>127</a:t>
             </a:r>
           </a:p>
         </p:txBody>
@@ -8052,7 +8052,7 @@
                 </a:solidFill>
                 <a:latin typeface="Georgia"/>
               </a:rPr>
-              <a:t>70</a:t>
+              <a:t>71</a:t>
             </a:r>
           </a:p>
         </p:txBody>
@@ -8257,7 +8257,7 @@
                 </a:solidFill>
                 <a:latin typeface="Georgia"/>
               </a:rPr>
-              <a:t>676</a:t>
+              <a:t>683</a:t>
             </a:r>
           </a:p>
         </p:txBody>
@@ -8887,7 +8887,7 @@
         <p:spPr>
           <a:xfrm>
             <a:off x="822960" y="2468880"/>
-            <a:ext cx="10475234" cy="548640"/>
+            <a:ext cx="10476848" cy="548640"/>
           </a:xfrm>
           <a:prstGeom prst="rect">
             <a:avLst/>
@@ -8931,7 +8931,7 @@
         <p:spPr>
           <a:xfrm>
             <a:off x="1005840" y="2615184"/>
-            <a:ext cx="10200914" cy="320040"/>
+            <a:ext cx="10202528" cy="320040"/>
           </a:xfrm>
           <a:prstGeom prst="rect">
             <a:avLst/>
@@ -8956,7 +8956,7 @@
                 </a:solidFill>
                 <a:latin typeface="Segoe UI"/>
               </a:rPr>
-              <a:t>Built 297</a:t>
+              <a:t>Built 304</a:t>
             </a:r>
           </a:p>
         </p:txBody>
@@ -8969,8 +8969,8 @@
         </p:nvSpPr>
         <p:spPr>
           <a:xfrm>
-            <a:off x="11298194" y="2468880"/>
-            <a:ext cx="35270" cy="548640"/>
+            <a:off x="11299808" y="2468880"/>
+            <a:ext cx="34463" cy="548640"/>
           </a:xfrm>
           <a:prstGeom prst="rect">
             <a:avLst/>
@@ -9013,7 +9013,7 @@
         </p:nvSpPr>
         <p:spPr>
           <a:xfrm>
-            <a:off x="11333464" y="2468880"/>
+            <a:off x="11334271" y="2468880"/>
             <a:ext cx="0" cy="548640"/>
           </a:xfrm>
           <a:prstGeom prst="rect">

--- a/docs/Carnet-Presentation.pptx
+++ b/docs/Carnet-Presentation.pptx
@@ -8052,7 +8052,7 @@
                 </a:solidFill>
                 <a:latin typeface="Georgia"/>
               </a:rPr>
-              <a:t>71</a:t>
+              <a:t>72</a:t>
             </a:r>
           </a:p>
         </p:txBody>
@@ -8257,7 +8257,7 @@
                 </a:solidFill>
                 <a:latin typeface="Georgia"/>
               </a:rPr>
-              <a:t>683</a:t>
+              <a:t>692</a:t>
             </a:r>
           </a:p>
         </p:txBody>
@@ -8887,7 +8887,7 @@
         <p:spPr>
           <a:xfrm>
             <a:off x="822960" y="2468880"/>
-            <a:ext cx="10476848" cy="548640"/>
+            <a:ext cx="10478817" cy="548640"/>
           </a:xfrm>
           <a:prstGeom prst="rect">
             <a:avLst/>
@@ -8931,7 +8931,7 @@
         <p:spPr>
           <a:xfrm>
             <a:off x="1005840" y="2615184"/>
-            <a:ext cx="10202528" cy="320040"/>
+            <a:ext cx="10204497" cy="320040"/>
           </a:xfrm>
           <a:prstGeom prst="rect">
             <a:avLst/>
@@ -8956,7 +8956,7 @@
                 </a:solidFill>
                 <a:latin typeface="Segoe UI"/>
               </a:rPr>
-              <a:t>Built 304</a:t>
+              <a:t>Built 313</a:t>
             </a:r>
           </a:p>
         </p:txBody>
@@ -8969,8 +8969,8 @@
         </p:nvSpPr>
         <p:spPr>
           <a:xfrm>
-            <a:off x="11299808" y="2468880"/>
-            <a:ext cx="34463" cy="548640"/>
+            <a:off x="11301777" y="2468880"/>
+            <a:ext cx="33478" cy="548640"/>
           </a:xfrm>
           <a:prstGeom prst="rect">
             <a:avLst/>
@@ -9013,7 +9013,7 @@
         </p:nvSpPr>
         <p:spPr>
           <a:xfrm>
-            <a:off x="11334271" y="2468880"/>
+            <a:off x="11335255" y="2468880"/>
             <a:ext cx="0" cy="548640"/>
           </a:xfrm>
           <a:prstGeom prst="rect">

--- a/docs/Carnet-Presentation.pptx
+++ b/docs/Carnet-Presentation.pptx
@@ -7437,7 +7437,7 @@
                 </a:solidFill>
                 <a:latin typeface="Georgia"/>
               </a:rPr>
-              <a:t>127</a:t>
+              <a:t>128</a:t>
             </a:r>
           </a:p>
         </p:txBody>
@@ -8052,7 +8052,7 @@
                 </a:solidFill>
                 <a:latin typeface="Georgia"/>
               </a:rPr>
-              <a:t>72</a:t>
+              <a:t>73</a:t>
             </a:r>
           </a:p>
         </p:txBody>
@@ -8257,7 +8257,7 @@
                 </a:solidFill>
                 <a:latin typeface="Georgia"/>
               </a:rPr>
-              <a:t>692</a:t>
+              <a:t>699</a:t>
             </a:r>
           </a:p>
         </p:txBody>
@@ -8887,7 +8887,7 @@
         <p:spPr>
           <a:xfrm>
             <a:off x="822960" y="2468880"/>
-            <a:ext cx="10478817" cy="548640"/>
+            <a:ext cx="10480476" cy="548640"/>
           </a:xfrm>
           <a:prstGeom prst="rect">
             <a:avLst/>
@@ -8931,7 +8931,7 @@
         <p:spPr>
           <a:xfrm>
             <a:off x="1005840" y="2615184"/>
-            <a:ext cx="10204497" cy="320040"/>
+            <a:ext cx="10206156" cy="320040"/>
           </a:xfrm>
           <a:prstGeom prst="rect">
             <a:avLst/>
@@ -8956,7 +8956,7 @@
                 </a:solidFill>
                 <a:latin typeface="Segoe UI"/>
               </a:rPr>
-              <a:t>Built 313</a:t>
+              <a:t>Built 321</a:t>
             </a:r>
           </a:p>
         </p:txBody>
@@ -8969,8 +8969,8 @@
         </p:nvSpPr>
         <p:spPr>
           <a:xfrm>
-            <a:off x="11301777" y="2468880"/>
-            <a:ext cx="33478" cy="548640"/>
+            <a:off x="11303436" y="2468880"/>
+            <a:ext cx="32649" cy="548640"/>
           </a:xfrm>
           <a:prstGeom prst="rect">
             <a:avLst/>
@@ -9013,7 +9013,7 @@
         </p:nvSpPr>
         <p:spPr>
           <a:xfrm>
-            <a:off x="11335255" y="2468880"/>
+            <a:off x="11336085" y="2468880"/>
             <a:ext cx="0" cy="548640"/>
           </a:xfrm>
           <a:prstGeom prst="rect">

--- a/docs/Carnet-Presentation.pptx
+++ b/docs/Carnet-Presentation.pptx
@@ -8052,7 +8052,7 @@
                 </a:solidFill>
                 <a:latin typeface="Georgia"/>
               </a:rPr>
-              <a:t>73</a:t>
+              <a:t>74</a:t>
             </a:r>
           </a:p>
         </p:txBody>
@@ -8257,7 +8257,7 @@
                 </a:solidFill>
                 <a:latin typeface="Georgia"/>
               </a:rPr>
-              <a:t>699</a:t>
+              <a:t>708</a:t>
             </a:r>
           </a:p>
         </p:txBody>
@@ -8887,7 +8887,7 @@
         <p:spPr>
           <a:xfrm>
             <a:off x="822960" y="2468880"/>
-            <a:ext cx="10480476" cy="548640"/>
+            <a:ext cx="10482246" cy="548640"/>
           </a:xfrm>
           <a:prstGeom prst="rect">
             <a:avLst/>
@@ -8931,7 +8931,7 @@
         <p:spPr>
           <a:xfrm>
             <a:off x="1005840" y="2615184"/>
-            <a:ext cx="10206156" cy="320040"/>
+            <a:ext cx="10207926" cy="320040"/>
           </a:xfrm>
           <a:prstGeom prst="rect">
             <a:avLst/>
@@ -8956,7 +8956,7 @@
                 </a:solidFill>
                 <a:latin typeface="Segoe UI"/>
               </a:rPr>
-              <a:t>Built 321</a:t>
+              <a:t>Built 330</a:t>
             </a:r>
           </a:p>
         </p:txBody>
@@ -8969,8 +8969,8 @@
         </p:nvSpPr>
         <p:spPr>
           <a:xfrm>
-            <a:off x="11303436" y="2468880"/>
-            <a:ext cx="32649" cy="548640"/>
+            <a:off x="11305206" y="2468880"/>
+            <a:ext cx="31764" cy="548640"/>
           </a:xfrm>
           <a:prstGeom prst="rect">
             <a:avLst/>
@@ -9013,7 +9013,7 @@
         </p:nvSpPr>
         <p:spPr>
           <a:xfrm>
-            <a:off x="11336085" y="2468880"/>
+            <a:off x="11336970" y="2468880"/>
             <a:ext cx="0" cy="548640"/>
           </a:xfrm>
           <a:prstGeom prst="rect">

--- a/docs/Carnet-Presentation.pptx
+++ b/docs/Carnet-Presentation.pptx
@@ -8052,7 +8052,7 @@
                 </a:solidFill>
                 <a:latin typeface="Georgia"/>
               </a:rPr>
-              <a:t>74</a:t>
+              <a:t>76</a:t>
             </a:r>
           </a:p>
         </p:txBody>
@@ -8257,7 +8257,7 @@
                 </a:solidFill>
                 <a:latin typeface="Georgia"/>
               </a:rPr>
-              <a:t>708</a:t>
+              <a:t>713</a:t>
             </a:r>
           </a:p>
         </p:txBody>
@@ -8887,7 +8887,7 @@
         <p:spPr>
           <a:xfrm>
             <a:off x="822960" y="2468880"/>
-            <a:ext cx="10482246" cy="548640"/>
+            <a:ext cx="10483188" cy="548640"/>
           </a:xfrm>
           <a:prstGeom prst="rect">
             <a:avLst/>
@@ -8931,7 +8931,7 @@
         <p:spPr>
           <a:xfrm>
             <a:off x="1005840" y="2615184"/>
-            <a:ext cx="10207926" cy="320040"/>
+            <a:ext cx="10208868" cy="320040"/>
           </a:xfrm>
           <a:prstGeom prst="rect">
             <a:avLst/>
@@ -8956,7 +8956,7 @@
                 </a:solidFill>
                 <a:latin typeface="Segoe UI"/>
               </a:rPr>
-              <a:t>Built 330</a:t>
+              <a:t>Built 335</a:t>
             </a:r>
           </a:p>
         </p:txBody>
@@ -8969,8 +8969,8 @@
         </p:nvSpPr>
         <p:spPr>
           <a:xfrm>
-            <a:off x="11305206" y="2468880"/>
-            <a:ext cx="31764" cy="548640"/>
+            <a:off x="11306148" y="2468880"/>
+            <a:ext cx="31293" cy="548640"/>
           </a:xfrm>
           <a:prstGeom prst="rect">
             <a:avLst/>
@@ -9013,7 +9013,7 @@
         </p:nvSpPr>
         <p:spPr>
           <a:xfrm>
-            <a:off x="11336970" y="2468880"/>
+            <a:off x="11337441" y="2468880"/>
             <a:ext cx="0" cy="548640"/>
           </a:xfrm>
           <a:prstGeom prst="rect">

--- a/docs/Carnet-Presentation.pptx
+++ b/docs/Carnet-Presentation.pptx
@@ -7642,7 +7642,7 @@
                 </a:solidFill>
                 <a:latin typeface="Georgia"/>
               </a:rPr>
-              <a:t>153</a:t>
+              <a:t>154</a:t>
             </a:r>
           </a:p>
         </p:txBody>
@@ -8052,7 +8052,7 @@
                 </a:solidFill>
                 <a:latin typeface="Georgia"/>
               </a:rPr>
-              <a:t>76</a:t>
+              <a:t>77</a:t>
             </a:r>
           </a:p>
         </p:txBody>
@@ -8257,7 +8257,7 @@
                 </a:solidFill>
                 <a:latin typeface="Georgia"/>
               </a:rPr>
-              <a:t>713</a:t>
+              <a:t>720</a:t>
             </a:r>
           </a:p>
         </p:txBody>
@@ -8887,7 +8887,7 @@
         <p:spPr>
           <a:xfrm>
             <a:off x="822960" y="2468880"/>
-            <a:ext cx="10483188" cy="548640"/>
+            <a:ext cx="10484462" cy="548640"/>
           </a:xfrm>
           <a:prstGeom prst="rect">
             <a:avLst/>
@@ -8931,7 +8931,7 @@
         <p:spPr>
           <a:xfrm>
             <a:off x="1005840" y="2615184"/>
-            <a:ext cx="10208868" cy="320040"/>
+            <a:ext cx="10210142" cy="320040"/>
           </a:xfrm>
           <a:prstGeom prst="rect">
             <a:avLst/>
@@ -8956,7 +8956,7 @@
                 </a:solidFill>
                 <a:latin typeface="Segoe UI"/>
               </a:rPr>
-              <a:t>Built 335</a:t>
+              <a:t>Built 342</a:t>
             </a:r>
           </a:p>
         </p:txBody>
@@ -8969,8 +8969,8 @@
         </p:nvSpPr>
         <p:spPr>
           <a:xfrm>
-            <a:off x="11306148" y="2468880"/>
-            <a:ext cx="31293" cy="548640"/>
+            <a:off x="11307422" y="2468880"/>
+            <a:ext cx="30656" cy="548640"/>
           </a:xfrm>
           <a:prstGeom prst="rect">
             <a:avLst/>
@@ -9013,7 +9013,7 @@
         </p:nvSpPr>
         <p:spPr>
           <a:xfrm>
-            <a:off x="11337441" y="2468880"/>
+            <a:off x="11338078" y="2468880"/>
             <a:ext cx="0" cy="548640"/>
           </a:xfrm>
           <a:prstGeom prst="rect">

--- a/docs/Carnet-Presentation.pptx
+++ b/docs/Carnet-Presentation.pptx
@@ -8052,7 +8052,7 @@
                 </a:solidFill>
                 <a:latin typeface="Georgia"/>
               </a:rPr>
-              <a:t>77</a:t>
+              <a:t>78</a:t>
             </a:r>
           </a:p>
         </p:txBody>
@@ -8257,7 +8257,7 @@
                 </a:solidFill>
                 <a:latin typeface="Georgia"/>
               </a:rPr>
-              <a:t>720</a:t>
+              <a:t>726</a:t>
             </a:r>
           </a:p>
         </p:txBody>
@@ -8887,7 +8887,7 @@
         <p:spPr>
           <a:xfrm>
             <a:off x="822960" y="2468880"/>
-            <a:ext cx="10484462" cy="548640"/>
+            <a:ext cx="10485513" cy="548640"/>
           </a:xfrm>
           <a:prstGeom prst="rect">
             <a:avLst/>
@@ -8931,7 +8931,7 @@
         <p:spPr>
           <a:xfrm>
             <a:off x="1005840" y="2615184"/>
-            <a:ext cx="10210142" cy="320040"/>
+            <a:ext cx="10211193" cy="320040"/>
           </a:xfrm>
           <a:prstGeom prst="rect">
             <a:avLst/>
@@ -8956,7 +8956,7 @@
                 </a:solidFill>
                 <a:latin typeface="Segoe UI"/>
               </a:rPr>
-              <a:t>Built 342</a:t>
+              <a:t>Built 348</a:t>
             </a:r>
           </a:p>
         </p:txBody>
@@ -8969,8 +8969,8 @@
         </p:nvSpPr>
         <p:spPr>
           <a:xfrm>
-            <a:off x="11307422" y="2468880"/>
-            <a:ext cx="30656" cy="548640"/>
+            <a:off x="11308473" y="2468880"/>
+            <a:ext cx="30130" cy="548640"/>
           </a:xfrm>
           <a:prstGeom prst="rect">
             <a:avLst/>
@@ -9013,7 +9013,7 @@
         </p:nvSpPr>
         <p:spPr>
           <a:xfrm>
-            <a:off x="11338078" y="2468880"/>
+            <a:off x="11338603" y="2468880"/>
             <a:ext cx="0" cy="548640"/>
           </a:xfrm>
           <a:prstGeom prst="rect">

--- a/docs/Carnet-Presentation.pptx
+++ b/docs/Carnet-Presentation.pptx
@@ -8052,7 +8052,7 @@
                 </a:solidFill>
                 <a:latin typeface="Georgia"/>
               </a:rPr>
-              <a:t>78</a:t>
+              <a:t>79</a:t>
             </a:r>
           </a:p>
         </p:txBody>
@@ -8257,7 +8257,7 @@
                 </a:solidFill>
                 <a:latin typeface="Georgia"/>
               </a:rPr>
-              <a:t>726</a:t>
+              <a:t>733</a:t>
             </a:r>
           </a:p>
         </p:txBody>
@@ -8887,7 +8887,7 @@
         <p:spPr>
           <a:xfrm>
             <a:off x="822960" y="2468880"/>
-            <a:ext cx="10485513" cy="548640"/>
+            <a:ext cx="10486529" cy="548640"/>
           </a:xfrm>
           <a:prstGeom prst="rect">
             <a:avLst/>
@@ -8931,7 +8931,7 @@
         <p:spPr>
           <a:xfrm>
             <a:off x="1005840" y="2615184"/>
-            <a:ext cx="10211193" cy="320040"/>
+            <a:ext cx="10212209" cy="320040"/>
           </a:xfrm>
           <a:prstGeom prst="rect">
             <a:avLst/>
@@ -8956,7 +8956,7 @@
                 </a:solidFill>
                 <a:latin typeface="Segoe UI"/>
               </a:rPr>
-              <a:t>Built 348</a:t>
+              <a:t>Built 354</a:t>
             </a:r>
           </a:p>
         </p:txBody>
@@ -8969,8 +8969,8 @@
         </p:nvSpPr>
         <p:spPr>
           <a:xfrm>
-            <a:off x="11308473" y="2468880"/>
-            <a:ext cx="30130" cy="548640"/>
+            <a:off x="11309489" y="2468880"/>
+            <a:ext cx="29622" cy="548640"/>
           </a:xfrm>
           <a:prstGeom prst="rect">
             <a:avLst/>
@@ -9013,7 +9013,7 @@
         </p:nvSpPr>
         <p:spPr>
           <a:xfrm>
-            <a:off x="11338603" y="2468880"/>
+            <a:off x="11339111" y="2468880"/>
             <a:ext cx="0" cy="548640"/>
           </a:xfrm>
           <a:prstGeom prst="rect">

--- a/docs/Carnet-Presentation.pptx
+++ b/docs/Carnet-Presentation.pptx
@@ -8052,7 +8052,7 @@
                 </a:solidFill>
                 <a:latin typeface="Georgia"/>
               </a:rPr>
-              <a:t>79</a:t>
+              <a:t>80</a:t>
             </a:r>
           </a:p>
         </p:txBody>
@@ -8257,7 +8257,7 @@
                 </a:solidFill>
                 <a:latin typeface="Georgia"/>
               </a:rPr>
-              <a:t>733</a:t>
+              <a:t>739</a:t>
             </a:r>
           </a:p>
         </p:txBody>
@@ -8887,7 +8887,7 @@
         <p:spPr>
           <a:xfrm>
             <a:off x="822960" y="2468880"/>
-            <a:ext cx="10486529" cy="548640"/>
+            <a:ext cx="10487511" cy="548640"/>
           </a:xfrm>
           <a:prstGeom prst="rect">
             <a:avLst/>
@@ -8931,7 +8931,7 @@
         <p:spPr>
           <a:xfrm>
             <a:off x="1005840" y="2615184"/>
-            <a:ext cx="10212209" cy="320040"/>
+            <a:ext cx="10213191" cy="320040"/>
           </a:xfrm>
           <a:prstGeom prst="rect">
             <a:avLst/>
@@ -8956,7 +8956,7 @@
                 </a:solidFill>
                 <a:latin typeface="Segoe UI"/>
               </a:rPr>
-              <a:t>Built 354</a:t>
+              <a:t>Built 360</a:t>
             </a:r>
           </a:p>
         </p:txBody>
@@ -8969,8 +8969,8 @@
         </p:nvSpPr>
         <p:spPr>
           <a:xfrm>
-            <a:off x="11309489" y="2468880"/>
-            <a:ext cx="29622" cy="548640"/>
+            <a:off x="11310471" y="2468880"/>
+            <a:ext cx="29131" cy="548640"/>
           </a:xfrm>
           <a:prstGeom prst="rect">
             <a:avLst/>
@@ -9013,7 +9013,7 @@
         </p:nvSpPr>
         <p:spPr>
           <a:xfrm>
-            <a:off x="11339111" y="2468880"/>
+            <a:off x="11339602" y="2468880"/>
             <a:ext cx="0" cy="548640"/>
           </a:xfrm>
           <a:prstGeom prst="rect">

--- a/docs/Carnet-Presentation.pptx
+++ b/docs/Carnet-Presentation.pptx
@@ -8052,7 +8052,7 @@
                 </a:solidFill>
                 <a:latin typeface="Georgia"/>
               </a:rPr>
-              <a:t>80</a:t>
+              <a:t>81</a:t>
             </a:r>
           </a:p>
         </p:txBody>
@@ -8257,7 +8257,7 @@
                 </a:solidFill>
                 <a:latin typeface="Georgia"/>
               </a:rPr>
-              <a:t>739</a:t>
+              <a:t>744</a:t>
             </a:r>
           </a:p>
         </p:txBody>
@@ -8887,7 +8887,7 @@
         <p:spPr>
           <a:xfrm>
             <a:off x="822960" y="2468880"/>
-            <a:ext cx="10487511" cy="548640"/>
+            <a:ext cx="10488304" cy="548640"/>
           </a:xfrm>
           <a:prstGeom prst="rect">
             <a:avLst/>
@@ -8931,7 +8931,7 @@
         <p:spPr>
           <a:xfrm>
             <a:off x="1005840" y="2615184"/>
-            <a:ext cx="10213191" cy="320040"/>
+            <a:ext cx="10213984" cy="320040"/>
           </a:xfrm>
           <a:prstGeom prst="rect">
             <a:avLst/>
@@ -8956,7 +8956,7 @@
                 </a:solidFill>
                 <a:latin typeface="Segoe UI"/>
               </a:rPr>
-              <a:t>Built 360</a:t>
+              <a:t>Built 365</a:t>
             </a:r>
           </a:p>
         </p:txBody>
@@ -8969,8 +8969,8 @@
         </p:nvSpPr>
         <p:spPr>
           <a:xfrm>
-            <a:off x="11310471" y="2468880"/>
-            <a:ext cx="29131" cy="548640"/>
+            <a:off x="11311264" y="2468880"/>
+            <a:ext cx="28735" cy="548640"/>
           </a:xfrm>
           <a:prstGeom prst="rect">
             <a:avLst/>
@@ -9013,7 +9013,7 @@
         </p:nvSpPr>
         <p:spPr>
           <a:xfrm>
-            <a:off x="11339602" y="2468880"/>
+            <a:off x="11339999" y="2468880"/>
             <a:ext cx="0" cy="548640"/>
           </a:xfrm>
           <a:prstGeom prst="rect">

--- a/docs/Carnet-Presentation.pptx
+++ b/docs/Carnet-Presentation.pptx
@@ -8052,7 +8052,7 @@
                 </a:solidFill>
                 <a:latin typeface="Georgia"/>
               </a:rPr>
-              <a:t>81</a:t>
+              <a:t>82</a:t>
             </a:r>
           </a:p>
         </p:txBody>
@@ -8257,7 +8257,7 @@
                 </a:solidFill>
                 <a:latin typeface="Georgia"/>
               </a:rPr>
-              <a:t>744</a:t>
+              <a:t>751</a:t>
             </a:r>
           </a:p>
         </p:txBody>
@@ -8887,7 +8887,7 @@
         <p:spPr>
           <a:xfrm>
             <a:off x="822960" y="2468880"/>
-            <a:ext cx="10488304" cy="548640"/>
+            <a:ext cx="10489530" cy="548640"/>
           </a:xfrm>
           <a:prstGeom prst="rect">
             <a:avLst/>
@@ -8931,7 +8931,7 @@
         <p:spPr>
           <a:xfrm>
             <a:off x="1005840" y="2615184"/>
-            <a:ext cx="10213984" cy="320040"/>
+            <a:ext cx="10215210" cy="320040"/>
           </a:xfrm>
           <a:prstGeom prst="rect">
             <a:avLst/>
@@ -8956,7 +8956,7 @@
                 </a:solidFill>
                 <a:latin typeface="Segoe UI"/>
               </a:rPr>
-              <a:t>Built 365</a:t>
+              <a:t>Built 373</a:t>
             </a:r>
           </a:p>
         </p:txBody>
@@ -8969,8 +8969,8 @@
         </p:nvSpPr>
         <p:spPr>
           <a:xfrm>
-            <a:off x="11311264" y="2468880"/>
-            <a:ext cx="28735" cy="548640"/>
+            <a:off x="11312490" y="2468880"/>
+            <a:ext cx="28122" cy="548640"/>
           </a:xfrm>
           <a:prstGeom prst="rect">
             <a:avLst/>
@@ -9013,7 +9013,7 @@
         </p:nvSpPr>
         <p:spPr>
           <a:xfrm>
-            <a:off x="11339999" y="2468880"/>
+            <a:off x="11340612" y="2468880"/>
             <a:ext cx="0" cy="548640"/>
           </a:xfrm>
           <a:prstGeom prst="rect">

--- a/docs/Carnet-Presentation.pptx
+++ b/docs/Carnet-Presentation.pptx
@@ -7437,7 +7437,7 @@
                 </a:solidFill>
                 <a:latin typeface="Georgia"/>
               </a:rPr>
-              <a:t>128</a:t>
+              <a:t>129</a:t>
             </a:r>
           </a:p>
         </p:txBody>
@@ -8052,7 +8052,7 @@
                 </a:solidFill>
                 <a:latin typeface="Georgia"/>
               </a:rPr>
-              <a:t>82</a:t>
+              <a:t>83</a:t>
             </a:r>
           </a:p>
         </p:txBody>
@@ -8257,7 +8257,7 @@
                 </a:solidFill>
                 <a:latin typeface="Georgia"/>
               </a:rPr>
-              <a:t>751</a:t>
+              <a:t>760</a:t>
             </a:r>
           </a:p>
         </p:txBody>
@@ -8887,7 +8887,7 @@
         <p:spPr>
           <a:xfrm>
             <a:off x="822960" y="2468880"/>
-            <a:ext cx="10489530" cy="548640"/>
+            <a:ext cx="10490705" cy="548640"/>
           </a:xfrm>
           <a:prstGeom prst="rect">
             <a:avLst/>
@@ -8931,7 +8931,7 @@
         <p:spPr>
           <a:xfrm>
             <a:off x="1005840" y="2615184"/>
-            <a:ext cx="10215210" cy="320040"/>
+            <a:ext cx="10216385" cy="320040"/>
           </a:xfrm>
           <a:prstGeom prst="rect">
             <a:avLst/>
@@ -8956,7 +8956,7 @@
                 </a:solidFill>
                 <a:latin typeface="Segoe UI"/>
               </a:rPr>
-              <a:t>Built 373</a:t>
+              <a:t>Built 381</a:t>
             </a:r>
           </a:p>
         </p:txBody>
@@ -8969,8 +8969,8 @@
         </p:nvSpPr>
         <p:spPr>
           <a:xfrm>
-            <a:off x="11312490" y="2468880"/>
-            <a:ext cx="28122" cy="548640"/>
+            <a:off x="11313665" y="2468880"/>
+            <a:ext cx="27534" cy="548640"/>
           </a:xfrm>
           <a:prstGeom prst="rect">
             <a:avLst/>
@@ -9013,7 +9013,7 @@
         </p:nvSpPr>
         <p:spPr>
           <a:xfrm>
-            <a:off x="11340612" y="2468880"/>
+            <a:off x="11341199" y="2468880"/>
             <a:ext cx="0" cy="548640"/>
           </a:xfrm>
           <a:prstGeom prst="rect">

--- a/docs/Carnet-Presentation.pptx
+++ b/docs/Carnet-Presentation.pptx
@@ -8052,7 +8052,7 @@
                 </a:solidFill>
                 <a:latin typeface="Georgia"/>
               </a:rPr>
-              <a:t>83</a:t>
+              <a:t>84</a:t>
             </a:r>
           </a:p>
         </p:txBody>
@@ -8257,7 +8257,7 @@
                 </a:solidFill>
                 <a:latin typeface="Georgia"/>
               </a:rPr>
-              <a:t>760</a:t>
+              <a:t>765</a:t>
             </a:r>
           </a:p>
         </p:txBody>
@@ -8887,7 +8887,7 @@
         <p:spPr>
           <a:xfrm>
             <a:off x="822960" y="2468880"/>
-            <a:ext cx="10490705" cy="548640"/>
+            <a:ext cx="10491274" cy="548640"/>
           </a:xfrm>
           <a:prstGeom prst="rect">
             <a:avLst/>
@@ -8931,7 +8931,7 @@
         <p:spPr>
           <a:xfrm>
             <a:off x="1005840" y="2615184"/>
-            <a:ext cx="10216385" cy="320040"/>
+            <a:ext cx="10216954" cy="320040"/>
           </a:xfrm>
           <a:prstGeom prst="rect">
             <a:avLst/>
@@ -8956,7 +8956,7 @@
                 </a:solidFill>
                 <a:latin typeface="Segoe UI"/>
               </a:rPr>
-              <a:t>Built 381</a:t>
+              <a:t>Built 385</a:t>
             </a:r>
           </a:p>
         </p:txBody>
@@ -8969,8 +8969,8 @@
         </p:nvSpPr>
         <p:spPr>
           <a:xfrm>
-            <a:off x="11313665" y="2468880"/>
-            <a:ext cx="27534" cy="548640"/>
+            <a:off x="11314234" y="2468880"/>
+            <a:ext cx="27250" cy="548640"/>
           </a:xfrm>
           <a:prstGeom prst="rect">
             <a:avLst/>
@@ -9013,7 +9013,7 @@
         </p:nvSpPr>
         <p:spPr>
           <a:xfrm>
-            <a:off x="11341199" y="2468880"/>
+            <a:off x="11341484" y="2468880"/>
             <a:ext cx="0" cy="548640"/>
           </a:xfrm>
           <a:prstGeom prst="rect">

--- a/docs/Carnet-Presentation.pptx
+++ b/docs/Carnet-Presentation.pptx
@@ -8257,7 +8257,7 @@
                 </a:solidFill>
                 <a:latin typeface="Georgia"/>
               </a:rPr>
-              <a:t>765</a:t>
+              <a:t>768</a:t>
             </a:r>
           </a:p>
         </p:txBody>
@@ -8887,7 +8887,7 @@
         <p:spPr>
           <a:xfrm>
             <a:off x="822960" y="2468880"/>
-            <a:ext cx="10491274" cy="548640"/>
+            <a:ext cx="10491832" cy="548640"/>
           </a:xfrm>
           <a:prstGeom prst="rect">
             <a:avLst/>
@@ -8931,7 +8931,7 @@
         <p:spPr>
           <a:xfrm>
             <a:off x="1005840" y="2615184"/>
-            <a:ext cx="10216954" cy="320040"/>
+            <a:ext cx="10217512" cy="320040"/>
           </a:xfrm>
           <a:prstGeom prst="rect">
             <a:avLst/>
@@ -8956,7 +8956,7 @@
                 </a:solidFill>
                 <a:latin typeface="Segoe UI"/>
               </a:rPr>
-              <a:t>Built 385</a:t>
+              <a:t>Built 389</a:t>
             </a:r>
           </a:p>
         </p:txBody>
@@ -8969,8 +8969,8 @@
         </p:nvSpPr>
         <p:spPr>
           <a:xfrm>
-            <a:off x="11314234" y="2468880"/>
-            <a:ext cx="27250" cy="548640"/>
+            <a:off x="11314792" y="2468880"/>
+            <a:ext cx="26971" cy="548640"/>
           </a:xfrm>
           <a:prstGeom prst="rect">
             <a:avLst/>
@@ -9013,7 +9013,7 @@
         </p:nvSpPr>
         <p:spPr>
           <a:xfrm>
-            <a:off x="11341484" y="2468880"/>
+            <a:off x="11341763" y="2468880"/>
             <a:ext cx="0" cy="548640"/>
           </a:xfrm>
           <a:prstGeom prst="rect">

--- a/docs/Carnet-Presentation.pptx
+++ b/docs/Carnet-Presentation.pptx
@@ -8052,7 +8052,7 @@
                 </a:solidFill>
                 <a:latin typeface="Georgia"/>
               </a:rPr>
-              <a:t>84</a:t>
+              <a:t>85</a:t>
             </a:r>
           </a:p>
         </p:txBody>
@@ -8257,7 +8257,7 @@
                 </a:solidFill>
                 <a:latin typeface="Georgia"/>
               </a:rPr>
-              <a:t>768</a:t>
+              <a:t>773</a:t>
             </a:r>
           </a:p>
         </p:txBody>
@@ -8887,7 +8887,7 @@
         <p:spPr>
           <a:xfrm>
             <a:off x="822960" y="2468880"/>
-            <a:ext cx="10491832" cy="548640"/>
+            <a:ext cx="10492781" cy="548640"/>
           </a:xfrm>
           <a:prstGeom prst="rect">
             <a:avLst/>
@@ -8931,7 +8931,7 @@
         <p:spPr>
           <a:xfrm>
             <a:off x="1005840" y="2615184"/>
-            <a:ext cx="10217512" cy="320040"/>
+            <a:ext cx="10218461" cy="320040"/>
           </a:xfrm>
           <a:prstGeom prst="rect">
             <a:avLst/>
@@ -8956,7 +8956,7 @@
                 </a:solidFill>
                 <a:latin typeface="Segoe UI"/>
               </a:rPr>
-              <a:t>Built 389</a:t>
+              <a:t>Built 396</a:t>
             </a:r>
           </a:p>
         </p:txBody>
@@ -8969,8 +8969,8 @@
         </p:nvSpPr>
         <p:spPr>
           <a:xfrm>
-            <a:off x="11314792" y="2468880"/>
-            <a:ext cx="26971" cy="548640"/>
+            <a:off x="11315741" y="2468880"/>
+            <a:ext cx="26496" cy="548640"/>
           </a:xfrm>
           <a:prstGeom prst="rect">
             <a:avLst/>
@@ -9013,7 +9013,7 @@
         </p:nvSpPr>
         <p:spPr>
           <a:xfrm>
-            <a:off x="11341763" y="2468880"/>
+            <a:off x="11342237" y="2468880"/>
             <a:ext cx="0" cy="548640"/>
           </a:xfrm>
           <a:prstGeom prst="rect">

--- a/docs/Carnet-Presentation.pptx
+++ b/docs/Carnet-Presentation.pptx
@@ -7437,7 +7437,7 @@
                 </a:solidFill>
                 <a:latin typeface="Georgia"/>
               </a:rPr>
-              <a:t>129</a:t>
+              <a:t>130</a:t>
             </a:r>
           </a:p>
         </p:txBody>
@@ -7642,7 +7642,7 @@
                 </a:solidFill>
                 <a:latin typeface="Georgia"/>
               </a:rPr>
-              <a:t>154</a:t>
+              <a:t>156</a:t>
             </a:r>
           </a:p>
         </p:txBody>
@@ -8052,7 +8052,7 @@
                 </a:solidFill>
                 <a:latin typeface="Georgia"/>
               </a:rPr>
-              <a:t>85</a:t>
+              <a:t>86</a:t>
             </a:r>
           </a:p>
         </p:txBody>
@@ -8257,7 +8257,7 @@
                 </a:solidFill>
                 <a:latin typeface="Georgia"/>
               </a:rPr>
-              <a:t>773</a:t>
+              <a:t>780</a:t>
             </a:r>
           </a:p>
         </p:txBody>
@@ -8887,7 +8887,7 @@
         <p:spPr>
           <a:xfrm>
             <a:off x="822960" y="2468880"/>
-            <a:ext cx="10492781" cy="548640"/>
+            <a:ext cx="10493697" cy="548640"/>
           </a:xfrm>
           <a:prstGeom prst="rect">
             <a:avLst/>
@@ -8931,7 +8931,7 @@
         <p:spPr>
           <a:xfrm>
             <a:off x="1005840" y="2615184"/>
-            <a:ext cx="10218461" cy="320040"/>
+            <a:ext cx="10219377" cy="320040"/>
           </a:xfrm>
           <a:prstGeom prst="rect">
             <a:avLst/>
@@ -8956,7 +8956,7 @@
                 </a:solidFill>
                 <a:latin typeface="Segoe UI"/>
               </a:rPr>
-              <a:t>Built 396</a:t>
+              <a:t>Built 403</a:t>
             </a:r>
           </a:p>
         </p:txBody>
@@ -8969,8 +8969,8 @@
         </p:nvSpPr>
         <p:spPr>
           <a:xfrm>
-            <a:off x="11315741" y="2468880"/>
-            <a:ext cx="26496" cy="548640"/>
+            <a:off x="11316657" y="2468880"/>
+            <a:ext cx="26038" cy="548640"/>
           </a:xfrm>
           <a:prstGeom prst="rect">
             <a:avLst/>
@@ -9013,7 +9013,7 @@
         </p:nvSpPr>
         <p:spPr>
           <a:xfrm>
-            <a:off x="11342237" y="2468880"/>
+            <a:off x="11342695" y="2468880"/>
             <a:ext cx="0" cy="548640"/>
           </a:xfrm>
           <a:prstGeom prst="rect">

--- a/docs/Carnet-Presentation.pptx
+++ b/docs/Carnet-Presentation.pptx
@@ -8052,7 +8052,7 @@
                 </a:solidFill>
                 <a:latin typeface="Georgia"/>
               </a:rPr>
-              <a:t>86</a:t>
+              <a:t>87</a:t>
             </a:r>
           </a:p>
         </p:txBody>
@@ -8257,7 +8257,7 @@
                 </a:solidFill>
                 <a:latin typeface="Georgia"/>
               </a:rPr>
-              <a:t>780</a:t>
+              <a:t>783</a:t>
             </a:r>
           </a:p>
         </p:txBody>
@@ -8887,7 +8887,7 @@
         <p:spPr>
           <a:xfrm>
             <a:off x="822960" y="2468880"/>
-            <a:ext cx="10493697" cy="548640"/>
+            <a:ext cx="10468042" cy="548640"/>
           </a:xfrm>
           <a:prstGeom prst="rect">
             <a:avLst/>
@@ -8931,7 +8931,7 @@
         <p:spPr>
           <a:xfrm>
             <a:off x="1005840" y="2615184"/>
-            <a:ext cx="10219377" cy="320040"/>
+            <a:ext cx="10193722" cy="320040"/>
           </a:xfrm>
           <a:prstGeom prst="rect">
             <a:avLst/>
@@ -8956,7 +8956,7 @@
                 </a:solidFill>
                 <a:latin typeface="Segoe UI"/>
               </a:rPr>
-              <a:t>Built 403</a:t>
+              <a:t>Built 404</a:t>
             </a:r>
           </a:p>
         </p:txBody>
@@ -8969,8 +8969,8 @@
         </p:nvSpPr>
         <p:spPr>
           <a:xfrm>
-            <a:off x="11316657" y="2468880"/>
-            <a:ext cx="26038" cy="548640"/>
+            <a:off x="11291002" y="2468880"/>
+            <a:ext cx="51821" cy="548640"/>
           </a:xfrm>
           <a:prstGeom prst="rect">
             <a:avLst/>
@@ -9013,7 +9013,7 @@
         </p:nvSpPr>
         <p:spPr>
           <a:xfrm>
-            <a:off x="11342695" y="2468880"/>
+            <a:off x="11342823" y="2468880"/>
             <a:ext cx="0" cy="548640"/>
           </a:xfrm>
           <a:prstGeom prst="rect">

--- a/docs/Carnet-Presentation.pptx
+++ b/docs/Carnet-Presentation.pptx
@@ -7642,7 +7642,7 @@
                 </a:solidFill>
                 <a:latin typeface="Georgia"/>
               </a:rPr>
-              <a:t>156</a:t>
+              <a:t>157</a:t>
             </a:r>
           </a:p>
         </p:txBody>
@@ -8052,7 +8052,7 @@
                 </a:solidFill>
                 <a:latin typeface="Georgia"/>
               </a:rPr>
-              <a:t>87</a:t>
+              <a:t>88</a:t>
             </a:r>
           </a:p>
         </p:txBody>
@@ -8257,7 +8257,7 @@
                 </a:solidFill>
                 <a:latin typeface="Georgia"/>
               </a:rPr>
-              <a:t>783</a:t>
+              <a:t>787</a:t>
             </a:r>
           </a:p>
         </p:txBody>
@@ -8887,7 +8887,7 @@
         <p:spPr>
           <a:xfrm>
             <a:off x="822960" y="2468880"/>
-            <a:ext cx="10468042" cy="548640"/>
+            <a:ext cx="10468798" cy="548640"/>
           </a:xfrm>
           <a:prstGeom prst="rect">
             <a:avLst/>
@@ -8931,7 +8931,7 @@
         <p:spPr>
           <a:xfrm>
             <a:off x="1005840" y="2615184"/>
-            <a:ext cx="10193722" cy="320040"/>
+            <a:ext cx="10194478" cy="320040"/>
           </a:xfrm>
           <a:prstGeom prst="rect">
             <a:avLst/>
@@ -8956,7 +8956,7 @@
                 </a:solidFill>
                 <a:latin typeface="Segoe UI"/>
               </a:rPr>
-              <a:t>Built 404</a:t>
+              <a:t>Built 408</a:t>
             </a:r>
           </a:p>
         </p:txBody>
@@ -8969,8 +8969,8 @@
         </p:nvSpPr>
         <p:spPr>
           <a:xfrm>
-            <a:off x="11291002" y="2468880"/>
-            <a:ext cx="51821" cy="548640"/>
+            <a:off x="11291758" y="2468880"/>
+            <a:ext cx="51317" cy="548640"/>
           </a:xfrm>
           <a:prstGeom prst="rect">
             <a:avLst/>
@@ -9013,7 +9013,7 @@
         </p:nvSpPr>
         <p:spPr>
           <a:xfrm>
-            <a:off x="11342823" y="2468880"/>
+            <a:off x="11343075" y="2468880"/>
             <a:ext cx="0" cy="548640"/>
           </a:xfrm>
           <a:prstGeom prst="rect">

--- a/docs/Carnet-Presentation.pptx
+++ b/docs/Carnet-Presentation.pptx
@@ -8257,7 +8257,7 @@
                 </a:solidFill>
                 <a:latin typeface="Georgia"/>
               </a:rPr>
-              <a:t>787</a:t>
+              <a:t>791</a:t>
             </a:r>
           </a:p>
         </p:txBody>
@@ -8887,7 +8887,7 @@
         <p:spPr>
           <a:xfrm>
             <a:off x="822960" y="2468880"/>
-            <a:ext cx="10468798" cy="548640"/>
+            <a:ext cx="10469356" cy="548640"/>
           </a:xfrm>
           <a:prstGeom prst="rect">
             <a:avLst/>
@@ -8931,7 +8931,7 @@
         <p:spPr>
           <a:xfrm>
             <a:off x="1005840" y="2615184"/>
-            <a:ext cx="10194478" cy="320040"/>
+            <a:ext cx="10195036" cy="320040"/>
           </a:xfrm>
           <a:prstGeom prst="rect">
             <a:avLst/>
@@ -8956,7 +8956,7 @@
                 </a:solidFill>
                 <a:latin typeface="Segoe UI"/>
               </a:rPr>
-              <a:t>Built 408</a:t>
+              <a:t>Built 411</a:t>
             </a:r>
           </a:p>
         </p:txBody>
@@ -8969,8 +8969,8 @@
         </p:nvSpPr>
         <p:spPr>
           <a:xfrm>
-            <a:off x="11291758" y="2468880"/>
-            <a:ext cx="51317" cy="548640"/>
+            <a:off x="11292316" y="2468880"/>
+            <a:ext cx="50945" cy="548640"/>
           </a:xfrm>
           <a:prstGeom prst="rect">
             <a:avLst/>
@@ -9013,7 +9013,7 @@
         </p:nvSpPr>
         <p:spPr>
           <a:xfrm>
-            <a:off x="11343075" y="2468880"/>
+            <a:off x="11343261" y="2468880"/>
             <a:ext cx="0" cy="548640"/>
           </a:xfrm>
           <a:prstGeom prst="rect">

--- a/docs/Carnet-Presentation.pptx
+++ b/docs/Carnet-Presentation.pptx
@@ -8887,7 +8887,7 @@
         <p:spPr>
           <a:xfrm>
             <a:off x="822960" y="2468880"/>
-            <a:ext cx="10469356" cy="548640"/>
+            <a:ext cx="10444616" cy="548640"/>
           </a:xfrm>
           <a:prstGeom prst="rect">
             <a:avLst/>
@@ -8931,7 +8931,7 @@
         <p:spPr>
           <a:xfrm>
             <a:off x="1005840" y="2615184"/>
-            <a:ext cx="10195036" cy="320040"/>
+            <a:ext cx="10170296" cy="320040"/>
           </a:xfrm>
           <a:prstGeom prst="rect">
             <a:avLst/>
@@ -8956,7 +8956,7 @@
                 </a:solidFill>
                 <a:latin typeface="Segoe UI"/>
               </a:rPr>
-              <a:t>Built 411</a:t>
+              <a:t>Built 413</a:t>
             </a:r>
           </a:p>
         </p:txBody>
@@ -8969,8 +8969,8 @@
         </p:nvSpPr>
         <p:spPr>
           <a:xfrm>
-            <a:off x="11292316" y="2468880"/>
-            <a:ext cx="50945" cy="548640"/>
+            <a:off x="11267576" y="2468880"/>
+            <a:ext cx="75868" cy="548640"/>
           </a:xfrm>
           <a:prstGeom prst="rect">
             <a:avLst/>
@@ -9013,7 +9013,7 @@
         </p:nvSpPr>
         <p:spPr>
           <a:xfrm>
-            <a:off x="11343261" y="2468880"/>
+            <a:off x="11343444" y="2468880"/>
             <a:ext cx="0" cy="548640"/>
           </a:xfrm>
           <a:prstGeom prst="rect">

--- a/docs/Carnet-Presentation.pptx
+++ b/docs/Carnet-Presentation.pptx
@@ -8052,7 +8052,7 @@
                 </a:solidFill>
                 <a:latin typeface="Georgia"/>
               </a:rPr>
-              <a:t>88</a:t>
+              <a:t>89</a:t>
             </a:r>
           </a:p>
         </p:txBody>
@@ -8257,7 +8257,7 @@
                 </a:solidFill>
                 <a:latin typeface="Georgia"/>
               </a:rPr>
-              <a:t>791</a:t>
+              <a:t>795</a:t>
             </a:r>
           </a:p>
         </p:txBody>
@@ -8887,7 +8887,7 @@
         <p:spPr>
           <a:xfrm>
             <a:off x="822960" y="2468880"/>
-            <a:ext cx="10444616" cy="548640"/>
+            <a:ext cx="10445339" cy="548640"/>
           </a:xfrm>
           <a:prstGeom prst="rect">
             <a:avLst/>
@@ -8931,7 +8931,7 @@
         <p:spPr>
           <a:xfrm>
             <a:off x="1005840" y="2615184"/>
-            <a:ext cx="10170296" cy="320040"/>
+            <a:ext cx="10171019" cy="320040"/>
           </a:xfrm>
           <a:prstGeom prst="rect">
             <a:avLst/>
@@ -8956,7 +8956,7 @@
                 </a:solidFill>
                 <a:latin typeface="Segoe UI"/>
               </a:rPr>
-              <a:t>Built 413</a:t>
+              <a:t>Built 416</a:t>
             </a:r>
           </a:p>
         </p:txBody>
@@ -8969,8 +8969,8 @@
         </p:nvSpPr>
         <p:spPr>
           <a:xfrm>
-            <a:off x="11267576" y="2468880"/>
-            <a:ext cx="75868" cy="548640"/>
+            <a:off x="11268299" y="2468880"/>
+            <a:ext cx="75326" cy="548640"/>
           </a:xfrm>
           <a:prstGeom prst="rect">
             <a:avLst/>
@@ -9013,7 +9013,7 @@
         </p:nvSpPr>
         <p:spPr>
           <a:xfrm>
-            <a:off x="11343444" y="2468880"/>
+            <a:off x="11343625" y="2468880"/>
             <a:ext cx="0" cy="548640"/>
           </a:xfrm>
           <a:prstGeom prst="rect">

--- a/docs/Carnet-Presentation.pptx
+++ b/docs/Carnet-Presentation.pptx
@@ -8052,7 +8052,7 @@
                 </a:solidFill>
                 <a:latin typeface="Georgia"/>
               </a:rPr>
-              <a:t>89</a:t>
+              <a:t>90</a:t>
             </a:r>
           </a:p>
         </p:txBody>
@@ -8257,7 +8257,7 @@
                 </a:solidFill>
                 <a:latin typeface="Georgia"/>
               </a:rPr>
-              <a:t>795</a:t>
+              <a:t>799</a:t>
             </a:r>
           </a:p>
         </p:txBody>
@@ -8887,7 +8887,7 @@
         <p:spPr>
           <a:xfrm>
             <a:off x="822960" y="2468880"/>
-            <a:ext cx="10445339" cy="548640"/>
+            <a:ext cx="10445815" cy="548640"/>
           </a:xfrm>
           <a:prstGeom prst="rect">
             <a:avLst/>
@@ -8931,7 +8931,7 @@
         <p:spPr>
           <a:xfrm>
             <a:off x="1005840" y="2615184"/>
-            <a:ext cx="10171019" cy="320040"/>
+            <a:ext cx="10171495" cy="320040"/>
           </a:xfrm>
           <a:prstGeom prst="rect">
             <a:avLst/>
@@ -8956,7 +8956,7 @@
                 </a:solidFill>
                 <a:latin typeface="Segoe UI"/>
               </a:rPr>
-              <a:t>Built 416</a:t>
+              <a:t>Built 418</a:t>
             </a:r>
           </a:p>
         </p:txBody>
@@ -8969,8 +8969,8 @@
         </p:nvSpPr>
         <p:spPr>
           <a:xfrm>
-            <a:off x="11268299" y="2468880"/>
-            <a:ext cx="75326" cy="548640"/>
+            <a:off x="11268775" y="2468880"/>
+            <a:ext cx="74969" cy="548640"/>
           </a:xfrm>
           <a:prstGeom prst="rect">
             <a:avLst/>
@@ -9013,7 +9013,7 @@
         </p:nvSpPr>
         <p:spPr>
           <a:xfrm>
-            <a:off x="11343625" y="2468880"/>
+            <a:off x="11343744" y="2468880"/>
             <a:ext cx="0" cy="548640"/>
           </a:xfrm>
           <a:prstGeom prst="rect">

--- a/docs/Carnet-Presentation.pptx
+++ b/docs/Carnet-Presentation.pptx
@@ -8257,7 +8257,7 @@
                 </a:solidFill>
                 <a:latin typeface="Georgia"/>
               </a:rPr>
-              <a:t>799</a:t>
+              <a:t>801</a:t>
             </a:r>
           </a:p>
         </p:txBody>
@@ -8887,7 +8887,7 @@
         <p:spPr>
           <a:xfrm>
             <a:off x="822960" y="2468880"/>
-            <a:ext cx="10445815" cy="548640"/>
+            <a:ext cx="10446051" cy="548640"/>
           </a:xfrm>
           <a:prstGeom prst="rect">
             <a:avLst/>
@@ -8931,7 +8931,7 @@
         <p:spPr>
           <a:xfrm>
             <a:off x="1005840" y="2615184"/>
-            <a:ext cx="10171495" cy="320040"/>
+            <a:ext cx="10171731" cy="320040"/>
           </a:xfrm>
           <a:prstGeom prst="rect">
             <a:avLst/>
@@ -8956,7 +8956,7 @@
                 </a:solidFill>
                 <a:latin typeface="Segoe UI"/>
               </a:rPr>
-              <a:t>Built 418</a:t>
+              <a:t>Built 419</a:t>
             </a:r>
           </a:p>
         </p:txBody>
@@ -8969,8 +8969,8 @@
         </p:nvSpPr>
         <p:spPr>
           <a:xfrm>
-            <a:off x="11268775" y="2468880"/>
-            <a:ext cx="74969" cy="548640"/>
+            <a:off x="11269011" y="2468880"/>
+            <a:ext cx="74792" cy="548640"/>
           </a:xfrm>
           <a:prstGeom prst="rect">
             <a:avLst/>
@@ -9013,7 +9013,7 @@
         </p:nvSpPr>
         <p:spPr>
           <a:xfrm>
-            <a:off x="11343744" y="2468880"/>
+            <a:off x="11343803" y="2468880"/>
             <a:ext cx="0" cy="548640"/>
           </a:xfrm>
           <a:prstGeom prst="rect">

--- a/docs/Carnet-Presentation.pptx
+++ b/docs/Carnet-Presentation.pptx
@@ -8257,7 +8257,7 @@
                 </a:solidFill>
                 <a:latin typeface="Georgia"/>
               </a:rPr>
-              <a:t>801</a:t>
+              <a:t>803</a:t>
             </a:r>
           </a:p>
         </p:txBody>

--- a/docs/Carnet-Presentation.pptx
+++ b/docs/Carnet-Presentation.pptx
@@ -8257,7 +8257,7 @@
                 </a:solidFill>
                 <a:latin typeface="Georgia"/>
               </a:rPr>
-              <a:t>803</a:t>
+              <a:t>805</a:t>
             </a:r>
           </a:p>
         </p:txBody>

--- a/docs/Carnet-Presentation.pptx
+++ b/docs/Carnet-Presentation.pptx
@@ -8257,7 +8257,7 @@
                 </a:solidFill>
                 <a:latin typeface="Georgia"/>
               </a:rPr>
-              <a:t>805</a:t>
+              <a:t>807</a:t>
             </a:r>
           </a:p>
         </p:txBody>
@@ -8887,7 +8887,7 @@
         <p:spPr>
           <a:xfrm>
             <a:off x="822960" y="2468880"/>
-            <a:ext cx="10446051" cy="548640"/>
+            <a:ext cx="10446520" cy="548640"/>
           </a:xfrm>
           <a:prstGeom prst="rect">
             <a:avLst/>
@@ -8931,7 +8931,7 @@
         <p:spPr>
           <a:xfrm>
             <a:off x="1005840" y="2615184"/>
-            <a:ext cx="10171731" cy="320040"/>
+            <a:ext cx="10172200" cy="320040"/>
           </a:xfrm>
           <a:prstGeom prst="rect">
             <a:avLst/>
@@ -8956,7 +8956,7 @@
                 </a:solidFill>
                 <a:latin typeface="Segoe UI"/>
               </a:rPr>
-              <a:t>Built 419</a:t>
+              <a:t>Built 421</a:t>
             </a:r>
           </a:p>
         </p:txBody>
@@ -8969,8 +8969,8 @@
         </p:nvSpPr>
         <p:spPr>
           <a:xfrm>
-            <a:off x="11269011" y="2468880"/>
-            <a:ext cx="74792" cy="548640"/>
+            <a:off x="11269480" y="2468880"/>
+            <a:ext cx="74440" cy="548640"/>
           </a:xfrm>
           <a:prstGeom prst="rect">
             <a:avLst/>
@@ -9013,7 +9013,7 @@
         </p:nvSpPr>
         <p:spPr>
           <a:xfrm>
-            <a:off x="11343803" y="2468880"/>
+            <a:off x="11343920" y="2468880"/>
             <a:ext cx="0" cy="548640"/>
           </a:xfrm>
           <a:prstGeom prst="rect">

--- a/docs/Carnet-Presentation.pptx
+++ b/docs/Carnet-Presentation.pptx
@@ -8257,7 +8257,7 @@
                 </a:solidFill>
                 <a:latin typeface="Georgia"/>
               </a:rPr>
-              <a:t>807</a:t>
+              <a:t>809</a:t>
             </a:r>
           </a:p>
         </p:txBody>

--- a/docs/Carnet-Presentation.pptx
+++ b/docs/Carnet-Presentation.pptx
@@ -8257,7 +8257,7 @@
                 </a:solidFill>
                 <a:latin typeface="Georgia"/>
               </a:rPr>
-              <a:t>809</a:t>
+              <a:t>812</a:t>
             </a:r>
           </a:p>
         </p:txBody>
@@ -8887,7 +8887,7 @@
         <p:spPr>
           <a:xfrm>
             <a:off x="822960" y="2468880"/>
-            <a:ext cx="10446520" cy="548640"/>
+            <a:ext cx="10446753" cy="548640"/>
           </a:xfrm>
           <a:prstGeom prst="rect">
             <a:avLst/>
@@ -8931,7 +8931,7 @@
         <p:spPr>
           <a:xfrm>
             <a:off x="1005840" y="2615184"/>
-            <a:ext cx="10172200" cy="320040"/>
+            <a:ext cx="10172433" cy="320040"/>
           </a:xfrm>
           <a:prstGeom prst="rect">
             <a:avLst/>
@@ -8956,7 +8956,7 @@
                 </a:solidFill>
                 <a:latin typeface="Segoe UI"/>
               </a:rPr>
-              <a:t>Built 421</a:t>
+              <a:t>Built 422</a:t>
             </a:r>
           </a:p>
         </p:txBody>
@@ -8969,8 +8969,8 @@
         </p:nvSpPr>
         <p:spPr>
           <a:xfrm>
-            <a:off x="11269480" y="2468880"/>
-            <a:ext cx="74440" cy="548640"/>
+            <a:off x="11269713" y="2468880"/>
+            <a:ext cx="74266" cy="548640"/>
           </a:xfrm>
           <a:prstGeom prst="rect">
             <a:avLst/>
@@ -9013,7 +9013,7 @@
         </p:nvSpPr>
         <p:spPr>
           <a:xfrm>
-            <a:off x="11343920" y="2468880"/>
+            <a:off x="11343979" y="2468880"/>
             <a:ext cx="0" cy="548640"/>
           </a:xfrm>
           <a:prstGeom prst="rect">

--- a/docs/Carnet-Presentation.pptx
+++ b/docs/Carnet-Presentation.pptx
@@ -8052,7 +8052,7 @@
                 </a:solidFill>
                 <a:latin typeface="Georgia"/>
               </a:rPr>
-              <a:t>90</a:t>
+              <a:t>91</a:t>
             </a:r>
           </a:p>
         </p:txBody>
@@ -8257,7 +8257,7 @@
                 </a:solidFill>
                 <a:latin typeface="Georgia"/>
               </a:rPr>
-              <a:t>812</a:t>
+              <a:t>816</a:t>
             </a:r>
           </a:p>
         </p:txBody>
@@ -8887,7 +8887,7 @@
         <p:spPr>
           <a:xfrm>
             <a:off x="822960" y="2468880"/>
-            <a:ext cx="10446753" cy="548640"/>
+            <a:ext cx="10471508" cy="548640"/>
           </a:xfrm>
           <a:prstGeom prst="rect">
             <a:avLst/>
@@ -8931,7 +8931,7 @@
         <p:spPr>
           <a:xfrm>
             <a:off x="1005840" y="2615184"/>
-            <a:ext cx="10172433" cy="320040"/>
+            <a:ext cx="10197188" cy="320040"/>
           </a:xfrm>
           <a:prstGeom prst="rect">
             <a:avLst/>
@@ -8956,7 +8956,7 @@
                 </a:solidFill>
                 <a:latin typeface="Segoe UI"/>
               </a:rPr>
-              <a:t>Built 422</a:t>
+              <a:t>Built 423</a:t>
             </a:r>
           </a:p>
         </p:txBody>
@@ -8969,8 +8969,8 @@
         </p:nvSpPr>
         <p:spPr>
           <a:xfrm>
-            <a:off x="11269713" y="2468880"/>
-            <a:ext cx="74266" cy="548640"/>
+            <a:off x="11294468" y="2468880"/>
+            <a:ext cx="49510" cy="548640"/>
           </a:xfrm>
           <a:prstGeom prst="rect">
             <a:avLst/>
@@ -9013,7 +9013,7 @@
         </p:nvSpPr>
         <p:spPr>
           <a:xfrm>
-            <a:off x="11343979" y="2468880"/>
+            <a:off x="11343978" y="2468880"/>
             <a:ext cx="0" cy="548640"/>
           </a:xfrm>
           <a:prstGeom prst="rect">

--- a/docs/Carnet-Presentation.pptx
+++ b/docs/Carnet-Presentation.pptx
@@ -7642,7 +7642,7 @@
                 </a:solidFill>
                 <a:latin typeface="Georgia"/>
               </a:rPr>
-              <a:t>157</a:t>
+              <a:t>161</a:t>
             </a:r>
           </a:p>
         </p:txBody>
@@ -8052,7 +8052,7 @@
                 </a:solidFill>
                 <a:latin typeface="Georgia"/>
               </a:rPr>
-              <a:t>91</a:t>
+              <a:t>92</a:t>
             </a:r>
           </a:p>
         </p:txBody>
@@ -8257,7 +8257,7 @@
                 </a:solidFill>
                 <a:latin typeface="Georgia"/>
               </a:rPr>
-              <a:t>816</a:t>
+              <a:t>824</a:t>
             </a:r>
           </a:p>
         </p:txBody>
@@ -8887,7 +8887,7 @@
         <p:spPr>
           <a:xfrm>
             <a:off x="822960" y="2468880"/>
-            <a:ext cx="10471508" cy="548640"/>
+            <a:ext cx="10496264" cy="548640"/>
           </a:xfrm>
           <a:prstGeom prst="rect">
             <a:avLst/>
@@ -8931,7 +8931,7 @@
         <p:spPr>
           <a:xfrm>
             <a:off x="1005840" y="2615184"/>
-            <a:ext cx="10197188" cy="320040"/>
+            <a:ext cx="10221944" cy="320040"/>
           </a:xfrm>
           <a:prstGeom prst="rect">
             <a:avLst/>
@@ -8956,7 +8956,7 @@
                 </a:solidFill>
                 <a:latin typeface="Segoe UI"/>
               </a:rPr>
-              <a:t>Built 423</a:t>
+              <a:t>Built 424</a:t>
             </a:r>
           </a:p>
         </p:txBody>
@@ -8969,7 +8969,7 @@
         </p:nvSpPr>
         <p:spPr>
           <a:xfrm>
-            <a:off x="11294468" y="2468880"/>
+            <a:off x="11319224" y="2468880"/>
             <a:ext cx="49510" cy="548640"/>
           </a:xfrm>
           <a:prstGeom prst="rect">
@@ -9013,7 +9013,7 @@
         </p:nvSpPr>
         <p:spPr>
           <a:xfrm>
-            <a:off x="11343978" y="2468880"/>
+            <a:off x="11368734" y="2468880"/>
             <a:ext cx="0" cy="548640"/>
           </a:xfrm>
           <a:prstGeom prst="rect">

--- a/docs/Carnet-Presentation.pptx
+++ b/docs/Carnet-Presentation.pptx
@@ -8257,7 +8257,7 @@
                 </a:solidFill>
                 <a:latin typeface="Georgia"/>
               </a:rPr>
-              <a:t>824</a:t>
+              <a:t>827</a:t>
             </a:r>
           </a:p>
         </p:txBody>

--- a/docs/Carnet-Presentation.pptx
+++ b/docs/Carnet-Presentation.pptx
@@ -7437,7 +7437,7 @@
                 </a:solidFill>
                 <a:latin typeface="Georgia"/>
               </a:rPr>
-              <a:t>130</a:t>
+              <a:t>131</a:t>
             </a:r>
           </a:p>
         </p:txBody>
@@ -8052,7 +8052,7 @@
                 </a:solidFill>
                 <a:latin typeface="Georgia"/>
               </a:rPr>
-              <a:t>92</a:t>
+              <a:t>93</a:t>
             </a:r>
           </a:p>
         </p:txBody>
@@ -8257,7 +8257,7 @@
                 </a:solidFill>
                 <a:latin typeface="Georgia"/>
               </a:rPr>
-              <a:t>827</a:t>
+              <a:t>832</a:t>
             </a:r>
           </a:p>
         </p:txBody>
@@ -8887,7 +8887,7 @@
         <p:spPr>
           <a:xfrm>
             <a:off x="822960" y="2468880"/>
-            <a:ext cx="10496264" cy="548640"/>
+            <a:ext cx="10496724" cy="548640"/>
           </a:xfrm>
           <a:prstGeom prst="rect">
             <a:avLst/>
@@ -8931,7 +8931,7 @@
         <p:spPr>
           <a:xfrm>
             <a:off x="1005840" y="2615184"/>
-            <a:ext cx="10221944" cy="320040"/>
+            <a:ext cx="10222404" cy="320040"/>
           </a:xfrm>
           <a:prstGeom prst="rect">
             <a:avLst/>
@@ -8956,7 +8956,7 @@
                 </a:solidFill>
                 <a:latin typeface="Segoe UI"/>
               </a:rPr>
-              <a:t>Built 424</a:t>
+              <a:t>Built 428</a:t>
             </a:r>
           </a:p>
         </p:txBody>
@@ -8969,8 +8969,8 @@
         </p:nvSpPr>
         <p:spPr>
           <a:xfrm>
-            <a:off x="11319224" y="2468880"/>
-            <a:ext cx="49510" cy="548640"/>
+            <a:off x="11319684" y="2468880"/>
+            <a:ext cx="49050" cy="548640"/>
           </a:xfrm>
           <a:prstGeom prst="rect">
             <a:avLst/>

--- a/docs/Carnet-Presentation.pptx
+++ b/docs/Carnet-Presentation.pptx
@@ -7642,7 +7642,7 @@
                 </a:solidFill>
                 <a:latin typeface="Georgia"/>
               </a:rPr>
-              <a:t>161</a:t>
+              <a:t>163</a:t>
             </a:r>
           </a:p>
         </p:txBody>
@@ -8052,7 +8052,7 @@
                 </a:solidFill>
                 <a:latin typeface="Georgia"/>
               </a:rPr>
-              <a:t>93</a:t>
+              <a:t>94</a:t>
             </a:r>
           </a:p>
         </p:txBody>
@@ -8257,7 +8257,7 @@
                 </a:solidFill>
                 <a:latin typeface="Georgia"/>
               </a:rPr>
-              <a:t>832</a:t>
+              <a:t>839</a:t>
             </a:r>
           </a:p>
         </p:txBody>
@@ -8887,7 +8887,7 @@
         <p:spPr>
           <a:xfrm>
             <a:off x="822960" y="2468880"/>
-            <a:ext cx="10496724" cy="548640"/>
+            <a:ext cx="10497176" cy="548640"/>
           </a:xfrm>
           <a:prstGeom prst="rect">
             <a:avLst/>
@@ -8931,7 +8931,7 @@
         <p:spPr>
           <a:xfrm>
             <a:off x="1005840" y="2615184"/>
-            <a:ext cx="10222404" cy="320040"/>
+            <a:ext cx="10222856" cy="320040"/>
           </a:xfrm>
           <a:prstGeom prst="rect">
             <a:avLst/>
@@ -8956,7 +8956,7 @@
                 </a:solidFill>
                 <a:latin typeface="Segoe UI"/>
               </a:rPr>
-              <a:t>Built 428</a:t>
+              <a:t>Built 432</a:t>
             </a:r>
           </a:p>
         </p:txBody>
@@ -8969,8 +8969,8 @@
         </p:nvSpPr>
         <p:spPr>
           <a:xfrm>
-            <a:off x="11319684" y="2468880"/>
-            <a:ext cx="49050" cy="548640"/>
+            <a:off x="11320136" y="2468880"/>
+            <a:ext cx="48598" cy="548640"/>
           </a:xfrm>
           <a:prstGeom prst="rect">
             <a:avLst/>

--- a/docs/Carnet-Presentation.pptx
+++ b/docs/Carnet-Presentation.pptx
@@ -8052,7 +8052,7 @@
                 </a:solidFill>
                 <a:latin typeface="Georgia"/>
               </a:rPr>
-              <a:t>94</a:t>
+              <a:t>95</a:t>
             </a:r>
           </a:p>
         </p:txBody>
@@ -8257,7 +8257,7 @@
                 </a:solidFill>
                 <a:latin typeface="Georgia"/>
               </a:rPr>
-              <a:t>839</a:t>
+              <a:t>846</a:t>
             </a:r>
           </a:p>
         </p:txBody>
@@ -8887,7 +8887,7 @@
         <p:spPr>
           <a:xfrm>
             <a:off x="822960" y="2468880"/>
-            <a:ext cx="10497176" cy="548640"/>
+            <a:ext cx="10497839" cy="548640"/>
           </a:xfrm>
           <a:prstGeom prst="rect">
             <a:avLst/>
@@ -8931,7 +8931,7 @@
         <p:spPr>
           <a:xfrm>
             <a:off x="1005840" y="2615184"/>
-            <a:ext cx="10222856" cy="320040"/>
+            <a:ext cx="10223519" cy="320040"/>
           </a:xfrm>
           <a:prstGeom prst="rect">
             <a:avLst/>
@@ -8956,7 +8956,7 @@
                 </a:solidFill>
                 <a:latin typeface="Segoe UI"/>
               </a:rPr>
-              <a:t>Built 432</a:t>
+              <a:t>Built 438</a:t>
             </a:r>
           </a:p>
         </p:txBody>
@@ -8969,8 +8969,8 @@
         </p:nvSpPr>
         <p:spPr>
           <a:xfrm>
-            <a:off x="11320136" y="2468880"/>
-            <a:ext cx="48598" cy="548640"/>
+            <a:off x="11320799" y="2468880"/>
+            <a:ext cx="47935" cy="548640"/>
           </a:xfrm>
           <a:prstGeom prst="rect">
             <a:avLst/>

--- a/docs/Carnet-Presentation.pptx
+++ b/docs/Carnet-Presentation.pptx
@@ -7642,7 +7642,7 @@
                 </a:solidFill>
                 <a:latin typeface="Georgia"/>
               </a:rPr>
-              <a:t>163</a:t>
+              <a:t>164</a:t>
             </a:r>
           </a:p>
         </p:txBody>
@@ -8052,7 +8052,7 @@
                 </a:solidFill>
                 <a:latin typeface="Georgia"/>
               </a:rPr>
-              <a:t>95</a:t>
+              <a:t>96</a:t>
             </a:r>
           </a:p>
         </p:txBody>
@@ -8257,7 +8257,7 @@
                 </a:solidFill>
                 <a:latin typeface="Georgia"/>
               </a:rPr>
-              <a:t>846</a:t>
+              <a:t>858</a:t>
             </a:r>
           </a:p>
         </p:txBody>
@@ -8887,7 +8887,7 @@
         <p:spPr>
           <a:xfrm>
             <a:off x="822960" y="2468880"/>
-            <a:ext cx="10497839" cy="548640"/>
+            <a:ext cx="10498800" cy="548640"/>
           </a:xfrm>
           <a:prstGeom prst="rect">
             <a:avLst/>
@@ -8931,7 +8931,7 @@
         <p:spPr>
           <a:xfrm>
             <a:off x="1005840" y="2615184"/>
-            <a:ext cx="10223519" cy="320040"/>
+            <a:ext cx="10224480" cy="320040"/>
           </a:xfrm>
           <a:prstGeom prst="rect">
             <a:avLst/>
@@ -8956,7 +8956,7 @@
                 </a:solidFill>
                 <a:latin typeface="Segoe UI"/>
               </a:rPr>
-              <a:t>Built 438</a:t>
+              <a:t>Built 447</a:t>
             </a:r>
           </a:p>
         </p:txBody>
@@ -8969,8 +8969,8 @@
         </p:nvSpPr>
         <p:spPr>
           <a:xfrm>
-            <a:off x="11320799" y="2468880"/>
-            <a:ext cx="47935" cy="548640"/>
+            <a:off x="11321760" y="2468880"/>
+            <a:ext cx="46974" cy="548640"/>
           </a:xfrm>
           <a:prstGeom prst="rect">
             <a:avLst/>

--- a/docs/Carnet-Presentation.pptx
+++ b/docs/Carnet-Presentation.pptx
@@ -7437,7 +7437,7 @@
                 </a:solidFill>
                 <a:latin typeface="Georgia"/>
               </a:rPr>
-              <a:t>131</a:t>
+              <a:t>132</a:t>
             </a:r>
           </a:p>
         </p:txBody>
@@ -7642,7 +7642,7 @@
                 </a:solidFill>
                 <a:latin typeface="Georgia"/>
               </a:rPr>
-              <a:t>164</a:t>
+              <a:t>165</a:t>
             </a:r>
           </a:p>
         </p:txBody>
@@ -8052,7 +8052,7 @@
                 </a:solidFill>
                 <a:latin typeface="Georgia"/>
               </a:rPr>
-              <a:t>96</a:t>
+              <a:t>97</a:t>
             </a:r>
           </a:p>
         </p:txBody>
@@ -8257,7 +8257,7 @@
                 </a:solidFill>
                 <a:latin typeface="Georgia"/>
               </a:rPr>
-              <a:t>858</a:t>
+              <a:t>868</a:t>
             </a:r>
           </a:p>
         </p:txBody>
@@ -8887,7 +8887,7 @@
         <p:spPr>
           <a:xfrm>
             <a:off x="822960" y="2468880"/>
-            <a:ext cx="10498800" cy="548640"/>
+            <a:ext cx="10499622" cy="548640"/>
           </a:xfrm>
           <a:prstGeom prst="rect">
             <a:avLst/>
@@ -8931,7 +8931,7 @@
         <p:spPr>
           <a:xfrm>
             <a:off x="1005840" y="2615184"/>
-            <a:ext cx="10224480" cy="320040"/>
+            <a:ext cx="10225302" cy="320040"/>
           </a:xfrm>
           <a:prstGeom prst="rect">
             <a:avLst/>
@@ -8956,7 +8956,7 @@
                 </a:solidFill>
                 <a:latin typeface="Segoe UI"/>
               </a:rPr>
-              <a:t>Built 447</a:t>
+              <a:t>Built 455</a:t>
             </a:r>
           </a:p>
         </p:txBody>
@@ -8969,8 +8969,8 @@
         </p:nvSpPr>
         <p:spPr>
           <a:xfrm>
-            <a:off x="11321760" y="2468880"/>
-            <a:ext cx="46974" cy="548640"/>
+            <a:off x="11322582" y="2468880"/>
+            <a:ext cx="46152" cy="548640"/>
           </a:xfrm>
           <a:prstGeom prst="rect">
             <a:avLst/>

--- a/docs/Carnet-Presentation.pptx
+++ b/docs/Carnet-Presentation.pptx
@@ -7437,7 +7437,7 @@
                 </a:solidFill>
                 <a:latin typeface="Georgia"/>
               </a:rPr>
-              <a:t>132</a:t>
+              <a:t>134</a:t>
             </a:r>
           </a:p>
         </p:txBody>
@@ -7642,7 +7642,7 @@
                 </a:solidFill>
                 <a:latin typeface="Georgia"/>
               </a:rPr>
-              <a:t>165</a:t>
+              <a:t>167</a:t>
             </a:r>
           </a:p>
         </p:txBody>
@@ -8052,7 +8052,7 @@
                 </a:solidFill>
                 <a:latin typeface="Georgia"/>
               </a:rPr>
-              <a:t>97</a:t>
+              <a:t>98</a:t>
             </a:r>
           </a:p>
         </p:txBody>
@@ -8257,7 +8257,7 @@
                 </a:solidFill>
                 <a:latin typeface="Georgia"/>
               </a:rPr>
-              <a:t>868</a:t>
+              <a:t>879</a:t>
             </a:r>
           </a:p>
         </p:txBody>
@@ -8887,7 +8887,7 @@
         <p:spPr>
           <a:xfrm>
             <a:off x="822960" y="2468880"/>
-            <a:ext cx="10499622" cy="548640"/>
+            <a:ext cx="10500416" cy="548640"/>
           </a:xfrm>
           <a:prstGeom prst="rect">
             <a:avLst/>
@@ -8931,7 +8931,7 @@
         <p:spPr>
           <a:xfrm>
             <a:off x="1005840" y="2615184"/>
-            <a:ext cx="10225302" cy="320040"/>
+            <a:ext cx="10226096" cy="320040"/>
           </a:xfrm>
           <a:prstGeom prst="rect">
             <a:avLst/>
@@ -8956,7 +8956,7 @@
                 </a:solidFill>
                 <a:latin typeface="Segoe UI"/>
               </a:rPr>
-              <a:t>Built 455</a:t>
+              <a:t>Built 463</a:t>
             </a:r>
           </a:p>
         </p:txBody>
@@ -8969,8 +8969,8 @@
         </p:nvSpPr>
         <p:spPr>
           <a:xfrm>
-            <a:off x="11322582" y="2468880"/>
-            <a:ext cx="46152" cy="548640"/>
+            <a:off x="11323376" y="2468880"/>
+            <a:ext cx="45358" cy="548640"/>
           </a:xfrm>
           <a:prstGeom prst="rect">
             <a:avLst/>

--- a/docs/Carnet-Presentation.pptx
+++ b/docs/Carnet-Presentation.pptx
@@ -7642,7 +7642,7 @@
                 </a:solidFill>
                 <a:latin typeface="Georgia"/>
               </a:rPr>
-              <a:t>167</a:t>
+              <a:t>169</a:t>
             </a:r>
           </a:p>
         </p:txBody>
@@ -8052,7 +8052,7 @@
                 </a:solidFill>
                 <a:latin typeface="Georgia"/>
               </a:rPr>
-              <a:t>98</a:t>
+              <a:t>99</a:t>
             </a:r>
           </a:p>
         </p:txBody>
@@ -8257,7 +8257,7 @@
                 </a:solidFill>
                 <a:latin typeface="Georgia"/>
               </a:rPr>
-              <a:t>879</a:t>
+              <a:t>888</a:t>
             </a:r>
           </a:p>
         </p:txBody>
@@ -8887,7 +8887,7 @@
         <p:spPr>
           <a:xfrm>
             <a:off x="822960" y="2468880"/>
-            <a:ext cx="10500416" cy="548640"/>
+            <a:ext cx="10501089" cy="548640"/>
           </a:xfrm>
           <a:prstGeom prst="rect">
             <a:avLst/>
@@ -8931,7 +8931,7 @@
         <p:spPr>
           <a:xfrm>
             <a:off x="1005840" y="2615184"/>
-            <a:ext cx="10226096" cy="320040"/>
+            <a:ext cx="10226769" cy="320040"/>
           </a:xfrm>
           <a:prstGeom prst="rect">
             <a:avLst/>
@@ -8956,7 +8956,7 @@
                 </a:solidFill>
                 <a:latin typeface="Segoe UI"/>
               </a:rPr>
-              <a:t>Built 463</a:t>
+              <a:t>Built 470</a:t>
             </a:r>
           </a:p>
         </p:txBody>
@@ -8969,8 +8969,8 @@
         </p:nvSpPr>
         <p:spPr>
           <a:xfrm>
-            <a:off x="11323376" y="2468880"/>
-            <a:ext cx="45358" cy="548640"/>
+            <a:off x="11324049" y="2468880"/>
+            <a:ext cx="44685" cy="548640"/>
           </a:xfrm>
           <a:prstGeom prst="rect">
             <a:avLst/>

--- a/docs/Carnet-Presentation.pptx
+++ b/docs/Carnet-Presentation.pptx
@@ -8052,7 +8052,7 @@
                 </a:solidFill>
                 <a:latin typeface="Georgia"/>
               </a:rPr>
-              <a:t>99</a:t>
+              <a:t>100</a:t>
             </a:r>
           </a:p>
         </p:txBody>
@@ -8257,7 +8257,7 @@
                 </a:solidFill>
                 <a:latin typeface="Georgia"/>
               </a:rPr>
-              <a:t>888</a:t>
+              <a:t>898</a:t>
             </a:r>
           </a:p>
         </p:txBody>
@@ -8887,7 +8887,7 @@
         <p:spPr>
           <a:xfrm>
             <a:off x="822960" y="2468880"/>
-            <a:ext cx="10501089" cy="548640"/>
+            <a:ext cx="10501742" cy="548640"/>
           </a:xfrm>
           <a:prstGeom prst="rect">
             <a:avLst/>
@@ -8931,7 +8931,7 @@
         <p:spPr>
           <a:xfrm>
             <a:off x="1005840" y="2615184"/>
-            <a:ext cx="10226769" cy="320040"/>
+            <a:ext cx="10227422" cy="320040"/>
           </a:xfrm>
           <a:prstGeom prst="rect">
             <a:avLst/>
@@ -8956,7 +8956,7 @@
                 </a:solidFill>
                 <a:latin typeface="Segoe UI"/>
               </a:rPr>
-              <a:t>Built 470</a:t>
+              <a:t>Built 477</a:t>
             </a:r>
           </a:p>
         </p:txBody>
@@ -8969,8 +8969,8 @@
         </p:nvSpPr>
         <p:spPr>
           <a:xfrm>
-            <a:off x="11324049" y="2468880"/>
-            <a:ext cx="44685" cy="548640"/>
+            <a:off x="11324702" y="2468880"/>
+            <a:ext cx="44032" cy="548640"/>
           </a:xfrm>
           <a:prstGeom prst="rect">
             <a:avLst/>

--- a/docs/Carnet-Presentation.pptx
+++ b/docs/Carnet-Presentation.pptx
@@ -7437,7 +7437,7 @@
                 </a:solidFill>
                 <a:latin typeface="Georgia"/>
               </a:rPr>
-              <a:t>134</a:t>
+              <a:t>135</a:t>
             </a:r>
           </a:p>
         </p:txBody>
@@ -8052,7 +8052,7 @@
                 </a:solidFill>
                 <a:latin typeface="Georgia"/>
               </a:rPr>
-              <a:t>100</a:t>
+              <a:t>101</a:t>
             </a:r>
           </a:p>
         </p:txBody>
@@ -8257,7 +8257,7 @@
                 </a:solidFill>
                 <a:latin typeface="Georgia"/>
               </a:rPr>
-              <a:t>898</a:t>
+              <a:t>907</a:t>
             </a:r>
           </a:p>
         </p:txBody>
@@ -8887,7 +8887,7 @@
         <p:spPr>
           <a:xfrm>
             <a:off x="822960" y="2468880"/>
-            <a:ext cx="10501742" cy="548640"/>
+            <a:ext cx="10502465" cy="548640"/>
           </a:xfrm>
           <a:prstGeom prst="rect">
             <a:avLst/>
@@ -8931,7 +8931,7 @@
         <p:spPr>
           <a:xfrm>
             <a:off x="1005840" y="2615184"/>
-            <a:ext cx="10227422" cy="320040"/>
+            <a:ext cx="10228145" cy="320040"/>
           </a:xfrm>
           <a:prstGeom prst="rect">
             <a:avLst/>
@@ -8956,7 +8956,7 @@
                 </a:solidFill>
                 <a:latin typeface="Segoe UI"/>
               </a:rPr>
-              <a:t>Built 477</a:t>
+              <a:t>Built 485</a:t>
             </a:r>
           </a:p>
         </p:txBody>
@@ -8969,8 +8969,8 @@
         </p:nvSpPr>
         <p:spPr>
           <a:xfrm>
-            <a:off x="11324702" y="2468880"/>
-            <a:ext cx="44032" cy="548640"/>
+            <a:off x="11325425" y="2468880"/>
+            <a:ext cx="43309" cy="548640"/>
           </a:xfrm>
           <a:prstGeom prst="rect">
             <a:avLst/>

--- a/docs/Carnet-Presentation.pptx
+++ b/docs/Carnet-Presentation.pptx
@@ -7437,7 +7437,7 @@
                 </a:solidFill>
                 <a:latin typeface="Georgia"/>
               </a:rPr>
-              <a:t>135</a:t>
+              <a:t>137</a:t>
             </a:r>
           </a:p>
         </p:txBody>
@@ -8052,7 +8052,7 @@
                 </a:solidFill>
                 <a:latin typeface="Georgia"/>
               </a:rPr>
-              <a:t>101</a:t>
+              <a:t>102</a:t>
             </a:r>
           </a:p>
         </p:txBody>
@@ -8257,7 +8257,7 @@
                 </a:solidFill>
                 <a:latin typeface="Georgia"/>
               </a:rPr>
-              <a:t>907</a:t>
+              <a:t>916</a:t>
             </a:r>
           </a:p>
         </p:txBody>
@@ -8887,7 +8887,7 @@
         <p:spPr>
           <a:xfrm>
             <a:off x="822960" y="2468880"/>
-            <a:ext cx="10502465" cy="548640"/>
+            <a:ext cx="10503165" cy="548640"/>
           </a:xfrm>
           <a:prstGeom prst="rect">
             <a:avLst/>
@@ -8931,7 +8931,7 @@
         <p:spPr>
           <a:xfrm>
             <a:off x="1005840" y="2615184"/>
-            <a:ext cx="10228145" cy="320040"/>
+            <a:ext cx="10228845" cy="320040"/>
           </a:xfrm>
           <a:prstGeom prst="rect">
             <a:avLst/>
@@ -8956,7 +8956,7 @@
                 </a:solidFill>
                 <a:latin typeface="Segoe UI"/>
               </a:rPr>
-              <a:t>Built 485</a:t>
+              <a:t>Built 493</a:t>
             </a:r>
           </a:p>
         </p:txBody>
@@ -8969,8 +8969,8 @@
         </p:nvSpPr>
         <p:spPr>
           <a:xfrm>
-            <a:off x="11325425" y="2468880"/>
-            <a:ext cx="43309" cy="548640"/>
+            <a:off x="11326125" y="2468880"/>
+            <a:ext cx="42609" cy="548640"/>
           </a:xfrm>
           <a:prstGeom prst="rect">
             <a:avLst/>

--- a/docs/Carnet-Presentation.pptx
+++ b/docs/Carnet-Presentation.pptx
@@ -7437,7 +7437,7 @@
                 </a:solidFill>
                 <a:latin typeface="Georgia"/>
               </a:rPr>
-              <a:t>137</a:t>
+              <a:t>138</a:t>
             </a:r>
           </a:p>
         </p:txBody>
@@ -8052,7 +8052,7 @@
                 </a:solidFill>
                 <a:latin typeface="Georgia"/>
               </a:rPr>
-              <a:t>102</a:t>
+              <a:t>103</a:t>
             </a:r>
           </a:p>
         </p:txBody>
@@ -8257,7 +8257,7 @@
                 </a:solidFill>
                 <a:latin typeface="Georgia"/>
               </a:rPr>
-              <a:t>916</a:t>
+              <a:t>925</a:t>
             </a:r>
           </a:p>
         </p:txBody>
@@ -8887,7 +8887,7 @@
         <p:spPr>
           <a:xfrm>
             <a:off x="822960" y="2468880"/>
-            <a:ext cx="10503165" cy="548640"/>
+            <a:ext cx="10503843" cy="548640"/>
           </a:xfrm>
           <a:prstGeom prst="rect">
             <a:avLst/>
@@ -8931,7 +8931,7 @@
         <p:spPr>
           <a:xfrm>
             <a:off x="1005840" y="2615184"/>
-            <a:ext cx="10228845" cy="320040"/>
+            <a:ext cx="10229523" cy="320040"/>
           </a:xfrm>
           <a:prstGeom prst="rect">
             <a:avLst/>
@@ -8956,7 +8956,7 @@
                 </a:solidFill>
                 <a:latin typeface="Segoe UI"/>
               </a:rPr>
-              <a:t>Built 493</a:t>
+              <a:t>Built 501</a:t>
             </a:r>
           </a:p>
         </p:txBody>
@@ -8969,8 +8969,8 @@
         </p:nvSpPr>
         <p:spPr>
           <a:xfrm>
-            <a:off x="11326125" y="2468880"/>
-            <a:ext cx="42609" cy="548640"/>
+            <a:off x="11326803" y="2468880"/>
+            <a:ext cx="41931" cy="548640"/>
           </a:xfrm>
           <a:prstGeom prst="rect">
             <a:avLst/>

--- a/docs/Carnet-Presentation.pptx
+++ b/docs/Carnet-Presentation.pptx
@@ -7437,7 +7437,7 @@
                 </a:solidFill>
                 <a:latin typeface="Georgia"/>
               </a:rPr>
-              <a:t>138</a:t>
+              <a:t>139</a:t>
             </a:r>
           </a:p>
         </p:txBody>
@@ -7642,7 +7642,7 @@
                 </a:solidFill>
                 <a:latin typeface="Georgia"/>
               </a:rPr>
-              <a:t>169</a:t>
+              <a:t>171</a:t>
             </a:r>
           </a:p>
         </p:txBody>
@@ -8052,7 +8052,7 @@
                 </a:solidFill>
                 <a:latin typeface="Georgia"/>
               </a:rPr>
-              <a:t>103</a:t>
+              <a:t>104</a:t>
             </a:r>
           </a:p>
         </p:txBody>
@@ -8257,7 +8257,7 @@
                 </a:solidFill>
                 <a:latin typeface="Georgia"/>
               </a:rPr>
-              <a:t>925</a:t>
+              <a:t>936</a:t>
             </a:r>
           </a:p>
         </p:txBody>
@@ -8887,7 +8887,7 @@
         <p:spPr>
           <a:xfrm>
             <a:off x="822960" y="2468880"/>
-            <a:ext cx="10503843" cy="548640"/>
+            <a:ext cx="10504580" cy="548640"/>
           </a:xfrm>
           <a:prstGeom prst="rect">
             <a:avLst/>
@@ -8931,7 +8931,7 @@
         <p:spPr>
           <a:xfrm>
             <a:off x="1005840" y="2615184"/>
-            <a:ext cx="10229523" cy="320040"/>
+            <a:ext cx="10230260" cy="320040"/>
           </a:xfrm>
           <a:prstGeom prst="rect">
             <a:avLst/>
@@ -8956,7 +8956,7 @@
                 </a:solidFill>
                 <a:latin typeface="Segoe UI"/>
               </a:rPr>
-              <a:t>Built 501</a:t>
+              <a:t>Built 510</a:t>
             </a:r>
           </a:p>
         </p:txBody>
@@ -8969,8 +8969,8 @@
         </p:nvSpPr>
         <p:spPr>
           <a:xfrm>
-            <a:off x="11326803" y="2468880"/>
-            <a:ext cx="41931" cy="548640"/>
+            <a:off x="11327540" y="2468880"/>
+            <a:ext cx="41194" cy="548640"/>
           </a:xfrm>
           <a:prstGeom prst="rect">
             <a:avLst/>

--- a/docs/Carnet-Presentation.pptx
+++ b/docs/Carnet-Presentation.pptx
@@ -7437,7 +7437,7 @@
                 </a:solidFill>
                 <a:latin typeface="Georgia"/>
               </a:rPr>
-              <a:t>139</a:t>
+              <a:t>140</a:t>
             </a:r>
           </a:p>
         </p:txBody>
@@ -8052,7 +8052,7 @@
                 </a:solidFill>
                 <a:latin typeface="Georgia"/>
               </a:rPr>
-              <a:t>104</a:t>
+              <a:t>105</a:t>
             </a:r>
           </a:p>
         </p:txBody>
@@ -8257,7 +8257,7 @@
                 </a:solidFill>
                 <a:latin typeface="Georgia"/>
               </a:rPr>
-              <a:t>936</a:t>
+              <a:t>946</a:t>
             </a:r>
           </a:p>
         </p:txBody>
@@ -8887,7 +8887,7 @@
         <p:spPr>
           <a:xfrm>
             <a:off x="822960" y="2468880"/>
-            <a:ext cx="10504580" cy="548640"/>
+            <a:ext cx="10505292" cy="548640"/>
           </a:xfrm>
           <a:prstGeom prst="rect">
             <a:avLst/>
@@ -8931,7 +8931,7 @@
         <p:spPr>
           <a:xfrm>
             <a:off x="1005840" y="2615184"/>
-            <a:ext cx="10230260" cy="320040"/>
+            <a:ext cx="10230972" cy="320040"/>
           </a:xfrm>
           <a:prstGeom prst="rect">
             <a:avLst/>
@@ -8956,7 +8956,7 @@
                 </a:solidFill>
                 <a:latin typeface="Segoe UI"/>
               </a:rPr>
-              <a:t>Built 510</a:t>
+              <a:t>Built 519</a:t>
             </a:r>
           </a:p>
         </p:txBody>
@@ -8969,8 +8969,8 @@
         </p:nvSpPr>
         <p:spPr>
           <a:xfrm>
-            <a:off x="11327540" y="2468880"/>
-            <a:ext cx="41194" cy="548640"/>
+            <a:off x="11328252" y="2468880"/>
+            <a:ext cx="40482" cy="548640"/>
           </a:xfrm>
           <a:prstGeom prst="rect">
             <a:avLst/>

--- a/docs/Carnet-Presentation.pptx
+++ b/docs/Carnet-Presentation.pptx
@@ -7847,7 +7847,7 @@
                 </a:solidFill>
                 <a:latin typeface="Georgia"/>
               </a:rPr>
-              <a:t>—</a:t>
+              <a:t>2,083</a:t>
             </a:r>
           </a:p>
         </p:txBody>
@@ -8052,7 +8052,7 @@
                 </a:solidFill>
                 <a:latin typeface="Georgia"/>
               </a:rPr>
-              <a:t>105</a:t>
+              <a:t>106</a:t>
             </a:r>
           </a:p>
         </p:txBody>
@@ -8257,7 +8257,7 @@
                 </a:solidFill>
                 <a:latin typeface="Georgia"/>
               </a:rPr>
-              <a:t>946</a:t>
+              <a:t>956</a:t>
             </a:r>
           </a:p>
         </p:txBody>
@@ -8887,7 +8887,7 @@
         <p:spPr>
           <a:xfrm>
             <a:off x="822960" y="2468880"/>
-            <a:ext cx="10505292" cy="548640"/>
+            <a:ext cx="10506351" cy="548640"/>
           </a:xfrm>
           <a:prstGeom prst="rect">
             <a:avLst/>
@@ -8931,7 +8931,7 @@
         <p:spPr>
           <a:xfrm>
             <a:off x="1005840" y="2615184"/>
-            <a:ext cx="10230972" cy="320040"/>
+            <a:ext cx="10232031" cy="320040"/>
           </a:xfrm>
           <a:prstGeom prst="rect">
             <a:avLst/>
@@ -8956,7 +8956,7 @@
                 </a:solidFill>
                 <a:latin typeface="Segoe UI"/>
               </a:rPr>
-              <a:t>Built 519</a:t>
+              <a:t>Built 533</a:t>
             </a:r>
           </a:p>
         </p:txBody>
@@ -8969,8 +8969,8 @@
         </p:nvSpPr>
         <p:spPr>
           <a:xfrm>
-            <a:off x="11328252" y="2468880"/>
-            <a:ext cx="40482" cy="548640"/>
+            <a:off x="11329311" y="2468880"/>
+            <a:ext cx="39423" cy="548640"/>
           </a:xfrm>
           <a:prstGeom prst="rect">
             <a:avLst/>

--- a/docs/Carnet-Presentation.pptx
+++ b/docs/Carnet-Presentation.pptx
@@ -7437,7 +7437,7 @@
                 </a:solidFill>
                 <a:latin typeface="Georgia"/>
               </a:rPr>
-              <a:t>140</a:t>
+              <a:t>141</a:t>
             </a:r>
           </a:p>
         </p:txBody>
@@ -7847,7 +7847,7 @@
                 </a:solidFill>
                 <a:latin typeface="Georgia"/>
               </a:rPr>
-              <a:t>2,083</a:t>
+              <a:t>2,094</a:t>
             </a:r>
           </a:p>
         </p:txBody>
@@ -8052,7 +8052,7 @@
                 </a:solidFill>
                 <a:latin typeface="Georgia"/>
               </a:rPr>
-              <a:t>106</a:t>
+              <a:t>107</a:t>
             </a:r>
           </a:p>
         </p:txBody>
@@ -8257,7 +8257,7 @@
                 </a:solidFill>
                 <a:latin typeface="Georgia"/>
               </a:rPr>
-              <a:t>956</a:t>
+              <a:t>966</a:t>
             </a:r>
           </a:p>
         </p:txBody>
@@ -8887,7 +8887,7 @@
         <p:spPr>
           <a:xfrm>
             <a:off x="822960" y="2468880"/>
-            <a:ext cx="10506351" cy="548640"/>
+            <a:ext cx="10507074" cy="548640"/>
           </a:xfrm>
           <a:prstGeom prst="rect">
             <a:avLst/>
@@ -8931,7 +8931,7 @@
         <p:spPr>
           <a:xfrm>
             <a:off x="1005840" y="2615184"/>
-            <a:ext cx="10232031" cy="320040"/>
+            <a:ext cx="10232754" cy="320040"/>
           </a:xfrm>
           <a:prstGeom prst="rect">
             <a:avLst/>
@@ -8956,7 +8956,7 @@
                 </a:solidFill>
                 <a:latin typeface="Segoe UI"/>
               </a:rPr>
-              <a:t>Built 533</a:t>
+              <a:t>Built 543</a:t>
             </a:r>
           </a:p>
         </p:txBody>
@@ -8969,8 +8969,8 @@
         </p:nvSpPr>
         <p:spPr>
           <a:xfrm>
-            <a:off x="11329311" y="2468880"/>
-            <a:ext cx="39423" cy="548640"/>
+            <a:off x="11330034" y="2468880"/>
+            <a:ext cx="38700" cy="548640"/>
           </a:xfrm>
           <a:prstGeom prst="rect">
             <a:avLst/>
